--- a/src/reports/report-templates/new/Econet Infraco March Website Report.pptx
+++ b/src/reports/report-templates/new/Econet Infraco March Website Report.pptx
@@ -5,20 +5,25 @@
     <p:sldMasterId id="2147483648" r:id="rId1"/>
   </p:sldMasterIdLst>
   <p:notesMasterIdLst>
-    <p:notesMasterId r:id="rId11"/>
+    <p:notesMasterId r:id="rId16"/>
   </p:notesMasterIdLst>
   <p:handoutMasterIdLst>
-    <p:handoutMasterId r:id="rId12"/>
+    <p:handoutMasterId r:id="rId17"/>
   </p:handoutMasterIdLst>
   <p:sldIdLst>
     <p:sldId id="256" r:id="rId3"/>
     <p:sldId id="257" r:id="rId4"/>
-    <p:sldId id="258" r:id="rId5"/>
-    <p:sldId id="259" r:id="rId6"/>
-    <p:sldId id="260" r:id="rId7"/>
-    <p:sldId id="261" r:id="rId8"/>
-    <p:sldId id="262" r:id="rId9"/>
-    <p:sldId id="263" r:id="rId10"/>
+    <p:sldId id="264" r:id="rId5"/>
+    <p:sldId id="258" r:id="rId6"/>
+    <p:sldId id="259" r:id="rId7"/>
+    <p:sldId id="260" r:id="rId8"/>
+    <p:sldId id="268" r:id="rId9"/>
+    <p:sldId id="261" r:id="rId10"/>
+    <p:sldId id="265" r:id="rId11"/>
+    <p:sldId id="266" r:id="rId12"/>
+    <p:sldId id="267" r:id="rId13"/>
+    <p:sldId id="262" r:id="rId14"/>
+    <p:sldId id="263" r:id="rId15"/>
   </p:sldIdLst>
   <p:sldSz cx="9144000" cy="5149850"/>
   <p:notesSz cx="9144000" cy="5149850"/>
@@ -1982,29 +1987,12 @@
                 <a:latin typeface="Raleway" pitchFamily="2" charset="77"/>
                 <a:cs typeface="Times New Roman" panose="02020603050405020304"/>
               </a:rPr>
-              <a:t>March</a:t>
-            </a:r>
-            <a:r>
-              <a:rPr sz="1000" b="1" spc="-20">
-                <a:solidFill>
-                  <a:srgbClr val="334154"/>
-                </a:solidFill>
-                <a:latin typeface="Raleway" pitchFamily="2" charset="77"/>
-                <a:cs typeface="Times New Roman" panose="02020603050405020304"/>
-              </a:rPr>
-              <a:t>,</a:t>
-            </a:r>
-            <a:r>
-              <a:rPr lang="en-US" sz="1000" b="1" spc="-20">
-                <a:solidFill>
-                  <a:srgbClr val="334154"/>
-                </a:solidFill>
-                <a:latin typeface="Raleway" pitchFamily="2" charset="77"/>
-                <a:cs typeface="Times New Roman" panose="02020603050405020304"/>
-              </a:rPr>
-              <a:t>2026</a:t>
-            </a:r>
-            <a:endParaRPr sz="1000">
+              <a:t>July,2026</a:t>
+            </a:r>
+            <a:endParaRPr lang="en-US" sz="1000" b="1" spc="-20">
+              <a:solidFill>
+                <a:srgbClr val="334154"/>
+              </a:solidFill>
               <a:latin typeface="Raleway" pitchFamily="2" charset="77"/>
               <a:cs typeface="Times New Roman" panose="02020603050405020304"/>
             </a:endParaRPr>
@@ -2278,7 +2266,7 @@
       </p:pic>
       <p:pic>
         <p:nvPicPr>
-          <p:cNvPr id="14" name="Picture 13" descr="Screenshot 2026-03-30 at 12.41.42"/>
+          <p:cNvPr id="13" name="Picture 12" descr="snapshot_card.png"/>
           <p:cNvPicPr>
             <a:picLocks noChangeAspect="1"/>
           </p:cNvPicPr>
@@ -2308,8 +2296,1769 @@
 </p:sld>
 </file>
 
+<file path=ppt/slides/slide10.xml><?xml version="1.0" encoding="utf-8"?>
+<p:sld xmlns:a="http://schemas.openxmlformats.org/drawingml/2006/main" xmlns:r="http://schemas.openxmlformats.org/officeDocument/2006/relationships" xmlns:p="http://schemas.openxmlformats.org/presentationml/2006/main">
+  <p:cSld>
+    <p:spTree>
+      <p:nvGrpSpPr>
+        <p:cNvPr id="1" name=""/>
+        <p:cNvGrpSpPr/>
+        <p:nvPr/>
+      </p:nvGrpSpPr>
+      <p:grpSpPr>
+        <a:xfrm>
+          <a:off x="0" y="0"/>
+          <a:ext cx="0" cy="0"/>
+          <a:chOff x="0" y="0"/>
+          <a:chExt cx="0" cy="0"/>
+        </a:xfrm>
+      </p:grpSpPr>
+      <p:sp>
+        <p:nvSpPr>
+          <p:cNvPr id="11" name="object 2"/>
+          <p:cNvSpPr/>
+          <p:nvPr/>
+        </p:nvSpPr>
+        <p:spPr>
+          <a:xfrm>
+            <a:off x="428625" y="428866"/>
+            <a:ext cx="57150" cy="609600"/>
+          </a:xfrm>
+          <a:custGeom>
+            <a:avLst/>
+            <a:gdLst/>
+            <a:ahLst/>
+            <a:cxnLst/>
+            <a:rect l="l" t="t" r="r" b="b"/>
+            <a:pathLst>
+              <a:path w="57150" h="609600">
+                <a:moveTo>
+                  <a:pt x="56756" y="0"/>
+                </a:moveTo>
+                <a:lnTo>
+                  <a:pt x="0" y="0"/>
+                </a:lnTo>
+                <a:lnTo>
+                  <a:pt x="0" y="609485"/>
+                </a:lnTo>
+                <a:lnTo>
+                  <a:pt x="56756" y="609485"/>
+                </a:lnTo>
+                <a:lnTo>
+                  <a:pt x="56756" y="0"/>
+                </a:lnTo>
+                <a:close/>
+              </a:path>
+            </a:pathLst>
+          </a:custGeom>
+          <a:solidFill>
+            <a:srgbClr val="1E3988"/>
+          </a:solidFill>
+        </p:spPr>
+        <p:txBody>
+          <a:bodyPr wrap="square" lIns="0" tIns="0" rIns="0" bIns="0" rtlCol="0"/>
+          <a:lstStyle/>
+          <a:p>
+            <a:endParaRPr>
+              <a:latin typeface="Raleway Regular" charset="0"/>
+              <a:cs typeface="Raleway Regular" charset="0"/>
+            </a:endParaRPr>
+          </a:p>
+        </p:txBody>
+      </p:sp>
+      <p:sp>
+        <p:nvSpPr>
+          <p:cNvPr id="3" name="object 3"/>
+          <p:cNvSpPr txBox="1">
+            <a:spLocks noGrp="1"/>
+          </p:cNvSpPr>
+          <p:nvPr>
+            <p:ph type="title"/>
+          </p:nvPr>
+        </p:nvSpPr>
+        <p:spPr>
+          <a:xfrm>
+            <a:off x="631190" y="381000"/>
+            <a:ext cx="3439795" cy="335915"/>
+          </a:xfrm>
+          <a:prstGeom prst="rect">
+            <a:avLst/>
+          </a:prstGeom>
+        </p:spPr>
+        <p:txBody>
+          <a:bodyPr vert="horz" wrap="square" lIns="0" tIns="13335" rIns="0" bIns="0" rtlCol="0">
+            <a:spAutoFit/>
+          </a:bodyPr>
+          <a:lstStyle/>
+          <a:p>
+            <a:pPr marL="12700">
+              <a:lnSpc>
+                <a:spcPct val="100000"/>
+              </a:lnSpc>
+              <a:spcBef>
+                <a:spcPts val="105"/>
+              </a:spcBef>
+            </a:pPr>
+            <a:r>
+              <a:rPr lang="en-US" dirty="0">
+                <a:latin typeface="Raleway Bold" charset="0"/>
+                <a:cs typeface="Raleway Bold" charset="0"/>
+              </a:rPr>
+              <a:t>SEO</a:t>
+            </a:r>
+            <a:endParaRPr lang="en-US" spc="-10" dirty="0">
+              <a:latin typeface="Raleway Bold" charset="0"/>
+              <a:cs typeface="Raleway Bold" charset="0"/>
+            </a:endParaRPr>
+          </a:p>
+        </p:txBody>
+      </p:sp>
+      <p:sp>
+        <p:nvSpPr>
+          <p:cNvPr id="4" name="object 5"/>
+          <p:cNvSpPr txBox="1"/>
+          <p:nvPr/>
+        </p:nvSpPr>
+        <p:spPr>
+          <a:xfrm>
+            <a:off x="176212" y="1815838"/>
+            <a:ext cx="3590925" cy="1047115"/>
+          </a:xfrm>
+          <a:prstGeom prst="rect">
+            <a:avLst/>
+          </a:prstGeom>
+          <a:solidFill>
+            <a:srgbClr val="F8F8FA"/>
+          </a:solidFill>
+          <a:ln w="9157">
+            <a:solidFill>
+              <a:srgbClr val="E0E8EE"/>
+            </a:solidFill>
+          </a:ln>
+        </p:spPr>
+        <p:txBody>
+          <a:bodyPr vert="horz" wrap="square" lIns="0" tIns="12065" rIns="0" bIns="0" rtlCol="0">
+            <a:spAutoFit/>
+          </a:bodyPr>
+          <a:lstStyle/>
+          <a:p>
+            <a:pPr marL="171450" indent="-171450">
+              <a:lnSpc>
+                <a:spcPct val="100000"/>
+              </a:lnSpc>
+              <a:spcBef>
+                <a:spcPts val="95"/>
+              </a:spcBef>
+              <a:buFont typeface="Arial" panose="020B0704020202020204" pitchFamily="34" charset="0"/>
+              <a:buChar char="•"/>
+            </a:pPr>
+            <a:r>
+              <a:rPr lang="en-US" altLang="en-US" sz="950" dirty="0">
+                <a:solidFill>
+                  <a:srgbClr val="334153"/>
+                </a:solidFill>
+                <a:latin typeface="Raleway Regular" charset="0"/>
+                <a:cs typeface="Raleway Regular" charset="0"/>
+              </a:rPr>
+              <a:t>The search results for Econet Infraco are correctly pulling through relevant brand-owned and associated pages, with the official Econet Infraco website appearing prominently as the top result. This indicates that the brand has strong search visibility and is discoverable when users search for Econet Infraco directly. ​</a:t>
+            </a:r>
+            <a:endParaRPr lang="en-US" altLang="en-US" sz="950" dirty="0">
+              <a:solidFill>
+                <a:srgbClr val="334153"/>
+              </a:solidFill>
+              <a:latin typeface="Raleway Regular" charset="0"/>
+              <a:cs typeface="Raleway Regular" charset="0"/>
+            </a:endParaRPr>
+          </a:p>
+          <a:p>
+            <a:pPr marL="0" indent="0">
+              <a:lnSpc>
+                <a:spcPct val="100000"/>
+              </a:lnSpc>
+              <a:spcBef>
+                <a:spcPts val="95"/>
+              </a:spcBef>
+              <a:buFont typeface="Arial" panose="020B0704020202020204" pitchFamily="34" charset="0"/>
+              <a:buNone/>
+            </a:pPr>
+            <a:endParaRPr lang="en-US" altLang="en-US" sz="950" dirty="0">
+              <a:solidFill>
+                <a:srgbClr val="334153"/>
+              </a:solidFill>
+              <a:latin typeface="Raleway Regular" charset="0"/>
+              <a:cs typeface="Raleway Regular" charset="0"/>
+            </a:endParaRPr>
+          </a:p>
+        </p:txBody>
+      </p:sp>
+      <p:sp>
+        <p:nvSpPr>
+          <p:cNvPr id="5" name="object 3"/>
+          <p:cNvSpPr txBox="1">
+            <a:spLocks noGrp="1"/>
+          </p:cNvSpPr>
+          <p:nvPr/>
+        </p:nvSpPr>
+        <p:spPr>
+          <a:xfrm>
+            <a:off x="631190" y="749300"/>
+            <a:ext cx="3439795" cy="228600"/>
+          </a:xfrm>
+          <a:prstGeom prst="rect">
+            <a:avLst/>
+          </a:prstGeom>
+        </p:spPr>
+        <p:txBody>
+          <a:bodyPr vert="horz" wrap="square" lIns="0" tIns="13335" rIns="0" bIns="0" rtlCol="0">
+            <a:spAutoFit/>
+          </a:bodyPr>
+          <a:lstStyle>
+            <a:lvl1pPr>
+              <a:defRPr sz="2100" b="1" i="0">
+                <a:solidFill>
+                  <a:srgbClr val="1E3988"/>
+                </a:solidFill>
+                <a:latin typeface="Times New Roman" panose="02020603050405020304"/>
+                <a:ea typeface="+mj-ea"/>
+                <a:cs typeface="Times New Roman" panose="02020603050405020304"/>
+              </a:defRPr>
+            </a:lvl1pPr>
+          </a:lstStyle>
+          <a:p>
+            <a:pPr marL="12700">
+              <a:lnSpc>
+                <a:spcPct val="100000"/>
+              </a:lnSpc>
+              <a:spcBef>
+                <a:spcPts val="105"/>
+              </a:spcBef>
+            </a:pPr>
+            <a:r>
+              <a:rPr lang="en-US" sz="1400" dirty="0">
+                <a:solidFill>
+                  <a:schemeClr val="tx1"/>
+                </a:solidFill>
+                <a:latin typeface="Raleway Regular" charset="0"/>
+                <a:cs typeface="Raleway Regular" charset="0"/>
+              </a:rPr>
+              <a:t>Econet Infraco</a:t>
+            </a:r>
+            <a:endParaRPr lang="en-US" sz="1400" spc="-10" dirty="0">
+              <a:solidFill>
+                <a:schemeClr val="tx1"/>
+              </a:solidFill>
+              <a:latin typeface="Raleway Regular" charset="0"/>
+              <a:cs typeface="Raleway Regular" charset="0"/>
+            </a:endParaRPr>
+          </a:p>
+        </p:txBody>
+      </p:sp>
+      <p:pic>
+        <p:nvPicPr>
+          <p:cNvPr id="8" name="Picture 7" descr="Screenshot 2026-07-24 at 10.49.41"/>
+          <p:cNvPicPr>
+            <a:picLocks noChangeAspect="1"/>
+          </p:cNvPicPr>
+          <p:nvPr/>
+        </p:nvPicPr>
+        <p:blipFill>
+          <a:blip r:embed="rId1"/>
+          <a:stretch>
+            <a:fillRect/>
+          </a:stretch>
+        </p:blipFill>
+        <p:spPr>
+          <a:xfrm>
+            <a:off x="3886200" y="1203325"/>
+            <a:ext cx="5171440" cy="2812415"/>
+          </a:xfrm>
+          <a:prstGeom prst="rect">
+            <a:avLst/>
+          </a:prstGeom>
+        </p:spPr>
+      </p:pic>
+    </p:spTree>
+  </p:cSld>
+  <p:clrMapOvr>
+    <a:masterClrMapping/>
+  </p:clrMapOvr>
+</p:sld>
+</file>
+
+<file path=ppt/slides/slide11.xml><?xml version="1.0" encoding="utf-8"?>
+<p:sld xmlns:a="http://schemas.openxmlformats.org/drawingml/2006/main" xmlns:r="http://schemas.openxmlformats.org/officeDocument/2006/relationships" xmlns:p="http://schemas.openxmlformats.org/presentationml/2006/main">
+  <p:cSld>
+    <p:spTree>
+      <p:nvGrpSpPr>
+        <p:cNvPr id="1" name=""/>
+        <p:cNvGrpSpPr/>
+        <p:nvPr/>
+      </p:nvGrpSpPr>
+      <p:grpSpPr>
+        <a:xfrm>
+          <a:off x="0" y="0"/>
+          <a:ext cx="0" cy="0"/>
+          <a:chOff x="0" y="0"/>
+          <a:chExt cx="0" cy="0"/>
+        </a:xfrm>
+      </p:grpSpPr>
+      <p:sp>
+        <p:nvSpPr>
+          <p:cNvPr id="6" name="object 2"/>
+          <p:cNvSpPr/>
+          <p:nvPr/>
+        </p:nvSpPr>
+        <p:spPr>
+          <a:xfrm>
+            <a:off x="428625" y="428866"/>
+            <a:ext cx="57150" cy="609600"/>
+          </a:xfrm>
+          <a:custGeom>
+            <a:avLst/>
+            <a:gdLst/>
+            <a:ahLst/>
+            <a:cxnLst/>
+            <a:rect l="l" t="t" r="r" b="b"/>
+            <a:pathLst>
+              <a:path w="57150" h="609600">
+                <a:moveTo>
+                  <a:pt x="56756" y="0"/>
+                </a:moveTo>
+                <a:lnTo>
+                  <a:pt x="0" y="0"/>
+                </a:lnTo>
+                <a:lnTo>
+                  <a:pt x="0" y="609485"/>
+                </a:lnTo>
+                <a:lnTo>
+                  <a:pt x="56756" y="609485"/>
+                </a:lnTo>
+                <a:lnTo>
+                  <a:pt x="56756" y="0"/>
+                </a:lnTo>
+                <a:close/>
+              </a:path>
+            </a:pathLst>
+          </a:custGeom>
+          <a:solidFill>
+            <a:srgbClr val="1E3988"/>
+          </a:solidFill>
+        </p:spPr>
+        <p:txBody>
+          <a:bodyPr wrap="square" lIns="0" tIns="0" rIns="0" bIns="0" rtlCol="0"/>
+          <a:lstStyle/>
+          <a:p>
+            <a:endParaRPr>
+              <a:latin typeface="Raleway Regular" charset="0"/>
+              <a:cs typeface="Raleway Regular" charset="0"/>
+            </a:endParaRPr>
+          </a:p>
+        </p:txBody>
+      </p:sp>
+      <p:sp>
+        <p:nvSpPr>
+          <p:cNvPr id="7" name="object 3"/>
+          <p:cNvSpPr txBox="1">
+            <a:spLocks noGrp="1"/>
+          </p:cNvSpPr>
+          <p:nvPr>
+            <p:ph type="title"/>
+          </p:nvPr>
+        </p:nvSpPr>
+        <p:spPr>
+          <a:xfrm>
+            <a:off x="631190" y="381000"/>
+            <a:ext cx="3439795" cy="659130"/>
+          </a:xfrm>
+          <a:prstGeom prst="rect">
+            <a:avLst/>
+          </a:prstGeom>
+        </p:spPr>
+        <p:txBody>
+          <a:bodyPr vert="horz" wrap="square" lIns="0" tIns="13335" rIns="0" bIns="0" rtlCol="0">
+            <a:spAutoFit/>
+          </a:bodyPr>
+          <a:lstStyle/>
+          <a:p>
+            <a:pPr marL="12700">
+              <a:lnSpc>
+                <a:spcPct val="100000"/>
+              </a:lnSpc>
+              <a:spcBef>
+                <a:spcPts val="105"/>
+              </a:spcBef>
+            </a:pPr>
+            <a:r>
+              <a:rPr lang="en-US" dirty="0">
+                <a:latin typeface="Raleway Bold" charset="0"/>
+                <a:cs typeface="Raleway Bold" charset="0"/>
+              </a:rPr>
+              <a:t>Uptime and System Reliability Insight</a:t>
+            </a:r>
+            <a:endParaRPr lang="en-US" spc="-10" dirty="0">
+              <a:latin typeface="Raleway Bold" charset="0"/>
+              <a:cs typeface="Raleway Bold" charset="0"/>
+            </a:endParaRPr>
+          </a:p>
+        </p:txBody>
+      </p:sp>
+      <p:sp>
+        <p:nvSpPr>
+          <p:cNvPr id="9" name="object 5"/>
+          <p:cNvSpPr txBox="1"/>
+          <p:nvPr/>
+        </p:nvSpPr>
+        <p:spPr>
+          <a:xfrm>
+            <a:off x="305117" y="1434838"/>
+            <a:ext cx="3590925" cy="2216785"/>
+          </a:xfrm>
+          <a:prstGeom prst="rect">
+            <a:avLst/>
+          </a:prstGeom>
+          <a:solidFill>
+            <a:srgbClr val="F8F8FA"/>
+          </a:solidFill>
+          <a:ln w="9157">
+            <a:solidFill>
+              <a:srgbClr val="E0E8EE"/>
+            </a:solidFill>
+          </a:ln>
+        </p:spPr>
+        <p:txBody>
+          <a:bodyPr vert="horz" wrap="square" lIns="0" tIns="12065" rIns="0" bIns="0" rtlCol="0">
+            <a:spAutoFit/>
+          </a:bodyPr>
+          <a:lstStyle/>
+          <a:p>
+            <a:pPr marL="0" indent="0">
+              <a:lnSpc>
+                <a:spcPct val="100000"/>
+              </a:lnSpc>
+              <a:spcBef>
+                <a:spcPts val="95"/>
+              </a:spcBef>
+              <a:buFont typeface="Arial" panose="020B0704020202020204" pitchFamily="34" charset="0"/>
+              <a:buNone/>
+            </a:pPr>
+            <a:r>
+              <a:rPr lang="en-US" altLang="en-US" sz="950" dirty="0">
+                <a:solidFill>
+                  <a:srgbClr val="334153"/>
+                </a:solidFill>
+                <a:latin typeface="Raleway Regular" charset="0"/>
+                <a:cs typeface="Raleway Regular" charset="0"/>
+              </a:rPr>
+              <a:t>    ​</a:t>
+            </a:r>
+            <a:endParaRPr lang="en-US" altLang="en-US" sz="950" dirty="0">
+              <a:solidFill>
+                <a:srgbClr val="334153"/>
+              </a:solidFill>
+              <a:latin typeface="Raleway Regular" charset="0"/>
+              <a:cs typeface="Raleway Regular" charset="0"/>
+            </a:endParaRPr>
+          </a:p>
+          <a:p>
+            <a:pPr marL="0" indent="0">
+              <a:lnSpc>
+                <a:spcPct val="100000"/>
+              </a:lnSpc>
+              <a:spcBef>
+                <a:spcPts val="95"/>
+              </a:spcBef>
+              <a:buFont typeface="Arial" panose="020B0704020202020204" pitchFamily="34" charset="0"/>
+              <a:buNone/>
+            </a:pPr>
+            <a:endParaRPr lang="en-US" altLang="en-US" sz="950" dirty="0">
+              <a:solidFill>
+                <a:srgbClr val="334153"/>
+              </a:solidFill>
+              <a:latin typeface="Raleway Regular" charset="0"/>
+              <a:cs typeface="Raleway Regular" charset="0"/>
+            </a:endParaRPr>
+          </a:p>
+          <a:p>
+            <a:pPr marL="0" indent="0">
+              <a:lnSpc>
+                <a:spcPct val="100000"/>
+              </a:lnSpc>
+              <a:spcBef>
+                <a:spcPts val="95"/>
+              </a:spcBef>
+              <a:buFont typeface="Arial" panose="020B0704020202020204" pitchFamily="34" charset="0"/>
+              <a:buNone/>
+            </a:pPr>
+            <a:r>
+              <a:rPr lang="en-US" altLang="en-US" sz="950" dirty="0">
+                <a:solidFill>
+                  <a:srgbClr val="334153"/>
+                </a:solidFill>
+                <a:latin typeface="Raleway Regular" charset="0"/>
+                <a:cs typeface="Raleway Regular" charset="0"/>
+              </a:rPr>
+              <a:t>    The website demonstrates strong operational stability,</a:t>
+            </a:r>
+            <a:endParaRPr lang="en-US" altLang="en-US" sz="950" dirty="0">
+              <a:solidFill>
+                <a:srgbClr val="334153"/>
+              </a:solidFill>
+              <a:latin typeface="Raleway Regular" charset="0"/>
+              <a:cs typeface="Raleway Regular" charset="0"/>
+            </a:endParaRPr>
+          </a:p>
+          <a:p>
+            <a:pPr marL="0" indent="0">
+              <a:lnSpc>
+                <a:spcPct val="100000"/>
+              </a:lnSpc>
+              <a:spcBef>
+                <a:spcPts val="95"/>
+              </a:spcBef>
+              <a:buFont typeface="Arial" panose="020B0704020202020204" pitchFamily="34" charset="0"/>
+              <a:buNone/>
+            </a:pPr>
+            <a:r>
+              <a:rPr lang="en-US" altLang="en-US" sz="950" dirty="0">
+                <a:solidFill>
+                  <a:srgbClr val="334153"/>
+                </a:solidFill>
+                <a:latin typeface="Raleway Regular" charset="0"/>
+                <a:cs typeface="Raleway Regular" charset="0"/>
+              </a:rPr>
+              <a:t>    maintaining a 100% uptime over the past 24 hours and</a:t>
+            </a:r>
+            <a:endParaRPr lang="en-US" altLang="en-US" sz="950" dirty="0">
+              <a:solidFill>
+                <a:srgbClr val="334153"/>
+              </a:solidFill>
+              <a:latin typeface="Raleway Regular" charset="0"/>
+              <a:cs typeface="Raleway Regular" charset="0"/>
+            </a:endParaRPr>
+          </a:p>
+          <a:p>
+            <a:pPr marL="0" indent="0">
+              <a:lnSpc>
+                <a:spcPct val="100000"/>
+              </a:lnSpc>
+              <a:spcBef>
+                <a:spcPts val="95"/>
+              </a:spcBef>
+              <a:buFont typeface="Arial" panose="020B0704020202020204" pitchFamily="34" charset="0"/>
+              <a:buNone/>
+            </a:pPr>
+            <a:r>
+              <a:rPr lang="en-US" altLang="en-US" sz="950" dirty="0">
+                <a:solidFill>
+                  <a:srgbClr val="334153"/>
+                </a:solidFill>
+                <a:latin typeface="Raleway Regular" charset="0"/>
+                <a:cs typeface="Raleway Regular" charset="0"/>
+              </a:rPr>
+              <a:t>    99.92% uptime over the last 30 days, indicating highly</a:t>
+            </a:r>
+            <a:endParaRPr lang="en-US" altLang="en-US" sz="950" dirty="0">
+              <a:solidFill>
+                <a:srgbClr val="334153"/>
+              </a:solidFill>
+              <a:latin typeface="Raleway Regular" charset="0"/>
+              <a:cs typeface="Raleway Regular" charset="0"/>
+            </a:endParaRPr>
+          </a:p>
+          <a:p>
+            <a:pPr marL="0" indent="0">
+              <a:lnSpc>
+                <a:spcPct val="100000"/>
+              </a:lnSpc>
+              <a:spcBef>
+                <a:spcPts val="95"/>
+              </a:spcBef>
+              <a:buFont typeface="Arial" panose="020B0704020202020204" pitchFamily="34" charset="0"/>
+              <a:buNone/>
+            </a:pPr>
+            <a:r>
+              <a:rPr lang="en-US" altLang="en-US" sz="950" dirty="0">
+                <a:solidFill>
+                  <a:srgbClr val="334153"/>
+                </a:solidFill>
+                <a:latin typeface="Raleway Regular" charset="0"/>
+                <a:cs typeface="Raleway Regular" charset="0"/>
+              </a:rPr>
+              <a:t>    reliable service availability.​</a:t>
+            </a:r>
+            <a:endParaRPr lang="en-US" altLang="en-US" sz="950" dirty="0">
+              <a:solidFill>
+                <a:srgbClr val="334153"/>
+              </a:solidFill>
+              <a:latin typeface="Raleway Regular" charset="0"/>
+              <a:cs typeface="Raleway Regular" charset="0"/>
+            </a:endParaRPr>
+          </a:p>
+          <a:p>
+            <a:pPr marL="0" indent="0">
+              <a:lnSpc>
+                <a:spcPct val="100000"/>
+              </a:lnSpc>
+              <a:spcBef>
+                <a:spcPts val="95"/>
+              </a:spcBef>
+              <a:buFont typeface="Arial" panose="020B0704020202020204" pitchFamily="34" charset="0"/>
+              <a:buNone/>
+            </a:pPr>
+            <a:r>
+              <a:rPr lang="en-US" altLang="en-US" sz="950" dirty="0">
+                <a:solidFill>
+                  <a:srgbClr val="334153"/>
+                </a:solidFill>
+                <a:latin typeface="Raleway Regular" charset="0"/>
+                <a:cs typeface="Raleway Regular" charset="0"/>
+              </a:rPr>
+              <a:t>    The average response time of 1671ms reflects</a:t>
+            </a:r>
+            <a:endParaRPr lang="en-US" altLang="en-US" sz="950" dirty="0">
+              <a:solidFill>
+                <a:srgbClr val="334153"/>
+              </a:solidFill>
+              <a:latin typeface="Raleway Regular" charset="0"/>
+              <a:cs typeface="Raleway Regular" charset="0"/>
+            </a:endParaRPr>
+          </a:p>
+          <a:p>
+            <a:pPr marL="0" indent="0">
+              <a:lnSpc>
+                <a:spcPct val="100000"/>
+              </a:lnSpc>
+              <a:spcBef>
+                <a:spcPts val="95"/>
+              </a:spcBef>
+              <a:buFont typeface="Arial" panose="020B0704020202020204" pitchFamily="34" charset="0"/>
+              <a:buNone/>
+            </a:pPr>
+            <a:r>
+              <a:rPr lang="en-US" altLang="en-US" sz="950" dirty="0">
+                <a:solidFill>
+                  <a:srgbClr val="334153"/>
+                </a:solidFill>
+                <a:latin typeface="Raleway Regular" charset="0"/>
+                <a:cs typeface="Raleway Regular" charset="0"/>
+              </a:rPr>
+              <a:t>    acceptable performance, though there is an opportunity</a:t>
+            </a:r>
+            <a:endParaRPr lang="en-US" altLang="en-US" sz="950" dirty="0">
+              <a:solidFill>
+                <a:srgbClr val="334153"/>
+              </a:solidFill>
+              <a:latin typeface="Raleway Regular" charset="0"/>
+              <a:cs typeface="Raleway Regular" charset="0"/>
+            </a:endParaRPr>
+          </a:p>
+          <a:p>
+            <a:pPr marL="0" indent="0">
+              <a:lnSpc>
+                <a:spcPct val="100000"/>
+              </a:lnSpc>
+              <a:spcBef>
+                <a:spcPts val="95"/>
+              </a:spcBef>
+              <a:buFont typeface="Arial" panose="020B0704020202020204" pitchFamily="34" charset="0"/>
+              <a:buNone/>
+            </a:pPr>
+            <a:r>
+              <a:rPr lang="en-US" altLang="en-US" sz="950" dirty="0">
+                <a:solidFill>
+                  <a:srgbClr val="334153"/>
+                </a:solidFill>
+                <a:latin typeface="Raleway Regular" charset="0"/>
+                <a:cs typeface="Raleway Regular" charset="0"/>
+              </a:rPr>
+              <a:t>    to further optimize speed for an improved user</a:t>
+            </a:r>
+            <a:endParaRPr lang="en-US" altLang="en-US" sz="950" dirty="0">
+              <a:solidFill>
+                <a:srgbClr val="334153"/>
+              </a:solidFill>
+              <a:latin typeface="Raleway Regular" charset="0"/>
+              <a:cs typeface="Raleway Regular" charset="0"/>
+            </a:endParaRPr>
+          </a:p>
+          <a:p>
+            <a:pPr marL="0" indent="0">
+              <a:lnSpc>
+                <a:spcPct val="100000"/>
+              </a:lnSpc>
+              <a:spcBef>
+                <a:spcPts val="95"/>
+              </a:spcBef>
+              <a:buFont typeface="Arial" panose="020B0704020202020204" pitchFamily="34" charset="0"/>
+              <a:buNone/>
+            </a:pPr>
+            <a:r>
+              <a:rPr lang="en-US" altLang="en-US" sz="950" dirty="0">
+                <a:solidFill>
+                  <a:srgbClr val="334153"/>
+                </a:solidFill>
+                <a:latin typeface="Raleway Regular" charset="0"/>
+                <a:cs typeface="Raleway Regular" charset="0"/>
+              </a:rPr>
+              <a:t>    experience.​   ​</a:t>
+            </a:r>
+            <a:endParaRPr lang="en-US" altLang="en-US" sz="950" dirty="0">
+              <a:solidFill>
+                <a:srgbClr val="334153"/>
+              </a:solidFill>
+              <a:latin typeface="Raleway Regular" charset="0"/>
+              <a:cs typeface="Raleway Regular" charset="0"/>
+            </a:endParaRPr>
+          </a:p>
+          <a:p>
+            <a:pPr marL="0" indent="0">
+              <a:lnSpc>
+                <a:spcPct val="100000"/>
+              </a:lnSpc>
+              <a:spcBef>
+                <a:spcPts val="95"/>
+              </a:spcBef>
+              <a:buFont typeface="Arial" panose="020B0704020202020204" pitchFamily="34" charset="0"/>
+              <a:buNone/>
+            </a:pPr>
+            <a:r>
+              <a:rPr lang="en-US" altLang="en-US" sz="950" dirty="0">
+                <a:solidFill>
+                  <a:srgbClr val="334153"/>
+                </a:solidFill>
+                <a:latin typeface="Raleway Regular" charset="0"/>
+                <a:cs typeface="Raleway Regular" charset="0"/>
+              </a:rPr>
+              <a:t>    Overall, the system is stable, reliable, and performing</a:t>
+            </a:r>
+            <a:endParaRPr lang="en-US" altLang="en-US" sz="950" dirty="0">
+              <a:solidFill>
+                <a:srgbClr val="334153"/>
+              </a:solidFill>
+              <a:latin typeface="Raleway Regular" charset="0"/>
+              <a:cs typeface="Raleway Regular" charset="0"/>
+            </a:endParaRPr>
+          </a:p>
+          <a:p>
+            <a:pPr marL="0" indent="0">
+              <a:lnSpc>
+                <a:spcPct val="100000"/>
+              </a:lnSpc>
+              <a:spcBef>
+                <a:spcPts val="95"/>
+              </a:spcBef>
+              <a:buFont typeface="Arial" panose="020B0704020202020204" pitchFamily="34" charset="0"/>
+              <a:buNone/>
+            </a:pPr>
+            <a:r>
+              <a:rPr lang="en-US" altLang="en-US" sz="950" dirty="0">
+                <a:solidFill>
+                  <a:srgbClr val="334153"/>
+                </a:solidFill>
+                <a:latin typeface="Raleway Regular" charset="0"/>
+                <a:cs typeface="Raleway Regular" charset="0"/>
+              </a:rPr>
+              <a:t>    well, with minimal downtime and no active incidents.</a:t>
+            </a:r>
+            <a:endParaRPr lang="en-US" altLang="en-US" sz="950" dirty="0">
+              <a:solidFill>
+                <a:srgbClr val="334153"/>
+              </a:solidFill>
+              <a:latin typeface="Raleway Regular" charset="0"/>
+              <a:cs typeface="Raleway Regular" charset="0"/>
+            </a:endParaRPr>
+          </a:p>
+          <a:p>
+            <a:pPr marL="0" indent="0">
+              <a:lnSpc>
+                <a:spcPct val="100000"/>
+              </a:lnSpc>
+              <a:spcBef>
+                <a:spcPts val="95"/>
+              </a:spcBef>
+              <a:buFont typeface="Arial" panose="020B0704020202020204" pitchFamily="34" charset="0"/>
+              <a:buNone/>
+            </a:pPr>
+            <a:r>
+              <a:rPr lang="en-US" altLang="en-US" sz="950" dirty="0">
+                <a:solidFill>
+                  <a:srgbClr val="334153"/>
+                </a:solidFill>
+                <a:latin typeface="Raleway Regular" charset="0"/>
+                <a:cs typeface="Raleway Regular" charset="0"/>
+              </a:rPr>
+              <a:t>    Continued monitoring and performance optimization</a:t>
+            </a:r>
+            <a:endParaRPr lang="en-US" altLang="en-US" sz="950" dirty="0">
+              <a:solidFill>
+                <a:srgbClr val="334153"/>
+              </a:solidFill>
+              <a:latin typeface="Raleway Regular" charset="0"/>
+              <a:cs typeface="Raleway Regular" charset="0"/>
+            </a:endParaRPr>
+          </a:p>
+          <a:p>
+            <a:pPr marL="0" indent="0">
+              <a:lnSpc>
+                <a:spcPct val="100000"/>
+              </a:lnSpc>
+              <a:spcBef>
+                <a:spcPts val="95"/>
+              </a:spcBef>
+              <a:buFont typeface="Arial" panose="020B0704020202020204" pitchFamily="34" charset="0"/>
+              <a:buNone/>
+            </a:pPr>
+            <a:r>
+              <a:rPr lang="en-US" altLang="en-US" sz="950" dirty="0">
+                <a:solidFill>
+                  <a:srgbClr val="334153"/>
+                </a:solidFill>
+                <a:latin typeface="Raleway Regular" charset="0"/>
+                <a:cs typeface="Raleway Regular" charset="0"/>
+              </a:rPr>
+              <a:t>    will help maintain and further enhance service quality.​</a:t>
+            </a:r>
+            <a:endParaRPr lang="en-US" altLang="en-US" sz="950" dirty="0">
+              <a:solidFill>
+                <a:srgbClr val="334153"/>
+              </a:solidFill>
+              <a:latin typeface="Raleway Regular" charset="0"/>
+              <a:cs typeface="Raleway Regular" charset="0"/>
+            </a:endParaRPr>
+          </a:p>
+        </p:txBody>
+      </p:sp>
+      <p:pic>
+        <p:nvPicPr>
+          <p:cNvPr id="10" name="Picture 9" descr="Screenshot 2026-07-24 at 11.40.43"/>
+          <p:cNvPicPr>
+            <a:picLocks noChangeAspect="1"/>
+          </p:cNvPicPr>
+          <p:nvPr/>
+        </p:nvPicPr>
+        <p:blipFill>
+          <a:blip r:embed="rId1"/>
+          <a:stretch>
+            <a:fillRect/>
+          </a:stretch>
+        </p:blipFill>
+        <p:spPr>
+          <a:xfrm>
+            <a:off x="4495800" y="1774825"/>
+            <a:ext cx="4097020" cy="1537970"/>
+          </a:xfrm>
+          <a:prstGeom prst="rect">
+            <a:avLst/>
+          </a:prstGeom>
+        </p:spPr>
+      </p:pic>
+    </p:spTree>
+  </p:cSld>
+  <p:clrMapOvr>
+    <a:masterClrMapping/>
+  </p:clrMapOvr>
+</p:sld>
+</file>
+
+<file path=ppt/slides/slide12.xml><?xml version="1.0" encoding="utf-8"?>
+<p:sld xmlns:a="http://schemas.openxmlformats.org/drawingml/2006/main" xmlns:r="http://schemas.openxmlformats.org/officeDocument/2006/relationships" xmlns:p="http://schemas.openxmlformats.org/presentationml/2006/main" showMasterSp="0">
+  <p:cSld>
+    <p:spTree>
+      <p:nvGrpSpPr>
+        <p:cNvPr id="1" name=""/>
+        <p:cNvGrpSpPr/>
+        <p:nvPr/>
+      </p:nvGrpSpPr>
+      <p:grpSpPr>
+        <a:xfrm>
+          <a:off x="0" y="0"/>
+          <a:ext cx="0" cy="0"/>
+          <a:chOff x="0" y="0"/>
+          <a:chExt cx="0" cy="0"/>
+        </a:xfrm>
+      </p:grpSpPr>
+      <p:sp>
+        <p:nvSpPr>
+          <p:cNvPr id="2" name="object 2"/>
+          <p:cNvSpPr txBox="1">
+            <a:spLocks noGrp="1"/>
+          </p:cNvSpPr>
+          <p:nvPr>
+            <p:ph type="title"/>
+          </p:nvPr>
+        </p:nvSpPr>
+        <p:spPr>
+          <a:xfrm>
+            <a:off x="401612" y="346709"/>
+            <a:ext cx="2722588" cy="334707"/>
+          </a:xfrm>
+          <a:prstGeom prst="rect">
+            <a:avLst/>
+          </a:prstGeom>
+        </p:spPr>
+        <p:txBody>
+          <a:bodyPr vert="horz" wrap="square" lIns="0" tIns="11430" rIns="0" bIns="0" rtlCol="0">
+            <a:spAutoFit/>
+          </a:bodyPr>
+          <a:lstStyle/>
+          <a:p>
+            <a:pPr marL="12700">
+              <a:lnSpc>
+                <a:spcPct val="100000"/>
+              </a:lnSpc>
+              <a:spcBef>
+                <a:spcPts val="90"/>
+              </a:spcBef>
+            </a:pPr>
+            <a:r>
+              <a:rPr spc="60">
+                <a:latin typeface="Raleway" pitchFamily="2" charset="77"/>
+                <a:cs typeface="Times New Roman" panose="02020603050405020304"/>
+              </a:rPr>
+              <a:t>Recommendations</a:t>
+            </a:r>
+            <a:endParaRPr spc="60">
+              <a:latin typeface="Raleway" pitchFamily="2" charset="77"/>
+              <a:cs typeface="Times New Roman" panose="02020603050405020304"/>
+            </a:endParaRPr>
+          </a:p>
+        </p:txBody>
+      </p:sp>
+      <p:sp>
+        <p:nvSpPr>
+          <p:cNvPr id="3" name="object 3"/>
+          <p:cNvSpPr txBox="1"/>
+          <p:nvPr/>
+        </p:nvSpPr>
+        <p:spPr>
+          <a:xfrm>
+            <a:off x="616660" y="745680"/>
+            <a:ext cx="3817709" cy="212238"/>
+          </a:xfrm>
+          <a:prstGeom prst="rect">
+            <a:avLst/>
+          </a:prstGeom>
+        </p:spPr>
+        <p:txBody>
+          <a:bodyPr vert="horz" wrap="square" lIns="0" tIns="12065" rIns="0" bIns="0" rtlCol="0" anchor="t">
+            <a:spAutoFit/>
+          </a:bodyPr>
+          <a:lstStyle/>
+          <a:p>
+            <a:pPr marL="12700">
+              <a:spcBef>
+                <a:spcPts val="95"/>
+              </a:spcBef>
+            </a:pPr>
+            <a:r>
+              <a:rPr lang="en-GB" sz="1300">
+                <a:solidFill>
+                  <a:srgbClr val="334154"/>
+                </a:solidFill>
+                <a:latin typeface="Raleway" pitchFamily="2" charset="77"/>
+                <a:cs typeface="Times New Roman" panose="02020603050405020304"/>
+              </a:rPr>
+              <a:t>Three Key Initiatives to Enhance Performance</a:t>
+            </a:r>
+            <a:endParaRPr lang="en-GB" sz="1300">
+              <a:solidFill>
+                <a:srgbClr val="334154"/>
+              </a:solidFill>
+              <a:latin typeface="Raleway" pitchFamily="2" charset="77"/>
+              <a:cs typeface="Times New Roman" panose="02020603050405020304"/>
+            </a:endParaRPr>
+          </a:p>
+        </p:txBody>
+      </p:sp>
+      <p:grpSp>
+        <p:nvGrpSpPr>
+          <p:cNvPr id="4" name="object 4"/>
+          <p:cNvGrpSpPr/>
+          <p:nvPr/>
+        </p:nvGrpSpPr>
+        <p:grpSpPr>
+          <a:xfrm>
+            <a:off x="152400" y="1117600"/>
+            <a:ext cx="5112385" cy="3714750"/>
+            <a:chOff x="222076" y="1217269"/>
+            <a:chExt cx="5182282" cy="3469004"/>
+          </a:xfrm>
+        </p:grpSpPr>
+        <p:sp>
+          <p:nvSpPr>
+            <p:cNvPr id="5" name="object 5"/>
+            <p:cNvSpPr/>
+            <p:nvPr/>
+          </p:nvSpPr>
+          <p:spPr>
+            <a:xfrm>
+              <a:off x="429768" y="1217269"/>
+              <a:ext cx="4974590" cy="3469004"/>
+            </a:xfrm>
+            <a:custGeom>
+              <a:avLst/>
+              <a:gdLst/>
+              <a:ahLst/>
+              <a:cxnLst/>
+              <a:rect l="l" t="t" r="r" b="b"/>
+              <a:pathLst>
+                <a:path w="4974590" h="3469004">
+                  <a:moveTo>
+                    <a:pt x="4974335" y="0"/>
+                  </a:moveTo>
+                  <a:lnTo>
+                    <a:pt x="0" y="0"/>
+                  </a:lnTo>
+                  <a:lnTo>
+                    <a:pt x="0" y="3468624"/>
+                  </a:lnTo>
+                  <a:lnTo>
+                    <a:pt x="4974335" y="3468624"/>
+                  </a:lnTo>
+                  <a:lnTo>
+                    <a:pt x="4974335" y="0"/>
+                  </a:lnTo>
+                  <a:close/>
+                </a:path>
+              </a:pathLst>
+            </a:custGeom>
+            <a:solidFill>
+              <a:srgbClr val="F8F9FB"/>
+            </a:solidFill>
+          </p:spPr>
+          <p:txBody>
+            <a:bodyPr wrap="square" lIns="0" tIns="0" rIns="0" bIns="0" rtlCol="0"/>
+            <a:lstStyle/>
+            <a:p>
+              <a:endParaRPr>
+                <a:latin typeface="Raleway" pitchFamily="2" charset="77"/>
+                <a:cs typeface="Times New Roman" panose="02020603050405020304"/>
+              </a:endParaRPr>
+            </a:p>
+          </p:txBody>
+        </p:sp>
+        <p:sp>
+          <p:nvSpPr>
+            <p:cNvPr id="6" name="object 6"/>
+            <p:cNvSpPr/>
+            <p:nvPr/>
+          </p:nvSpPr>
+          <p:spPr>
+            <a:xfrm>
+              <a:off x="222076" y="1217269"/>
+              <a:ext cx="27940" cy="3469004"/>
+            </a:xfrm>
+            <a:custGeom>
+              <a:avLst/>
+              <a:gdLst/>
+              <a:ahLst/>
+              <a:cxnLst/>
+              <a:rect l="l" t="t" r="r" b="b"/>
+              <a:pathLst>
+                <a:path w="27940" h="3469004">
+                  <a:moveTo>
+                    <a:pt x="27431" y="0"/>
+                  </a:moveTo>
+                  <a:lnTo>
+                    <a:pt x="0" y="0"/>
+                  </a:lnTo>
+                  <a:lnTo>
+                    <a:pt x="0" y="3468624"/>
+                  </a:lnTo>
+                  <a:lnTo>
+                    <a:pt x="27431" y="3468624"/>
+                  </a:lnTo>
+                  <a:lnTo>
+                    <a:pt x="27431" y="0"/>
+                  </a:lnTo>
+                  <a:close/>
+                </a:path>
+              </a:pathLst>
+            </a:custGeom>
+            <a:solidFill>
+              <a:srgbClr val="1E3989"/>
+            </a:solidFill>
+          </p:spPr>
+          <p:txBody>
+            <a:bodyPr wrap="square" lIns="0" tIns="0" rIns="0" bIns="0" rtlCol="0"/>
+            <a:lstStyle/>
+            <a:p>
+              <a:endParaRPr>
+                <a:latin typeface="Raleway" pitchFamily="2" charset="77"/>
+                <a:cs typeface="Times New Roman" panose="02020603050405020304"/>
+              </a:endParaRPr>
+            </a:p>
+          </p:txBody>
+        </p:sp>
+      </p:grpSp>
+      <p:sp>
+        <p:nvSpPr>
+          <p:cNvPr id="7" name="object 7"/>
+          <p:cNvSpPr txBox="1"/>
+          <p:nvPr/>
+        </p:nvSpPr>
+        <p:spPr>
+          <a:xfrm>
+            <a:off x="240030" y="1217295"/>
+            <a:ext cx="5195570" cy="152400"/>
+          </a:xfrm>
+          <a:prstGeom prst="rect">
+            <a:avLst/>
+          </a:prstGeom>
+        </p:spPr>
+        <p:txBody>
+          <a:bodyPr vert="horz" wrap="square" lIns="0" tIns="14604" rIns="0" bIns="0" rtlCol="0" anchor="t">
+            <a:spAutoFit/>
+          </a:bodyPr>
+          <a:lstStyle/>
+          <a:p>
+            <a:pPr marL="0" indent="0" algn="l" hangingPunct="0">
+              <a:buNone/>
+              <a:defRPr sz="1800" b="0" i="0" u="none" strike="noStrike" kern="0" cap="none" spc="0" baseline="0">
+                <a:solidFill>
+                  <a:srgbClr val="000000"/>
+                </a:solidFill>
+                <a:uFillTx/>
+              </a:defRPr>
+            </a:pPr>
+            <a:endParaRPr lang="en-US" altLang="en-US" sz="900">
+              <a:solidFill>
+                <a:srgbClr val="000000"/>
+              </a:solidFill>
+              <a:latin typeface="Raleway" pitchFamily="2" charset="77"/>
+              <a:ea typeface="Calibri"/>
+              <a:cs typeface="Calibri"/>
+            </a:endParaRPr>
+          </a:p>
+        </p:txBody>
+      </p:sp>
+      <p:sp>
+        <p:nvSpPr>
+          <p:cNvPr id="8" name="object 8"/>
+          <p:cNvSpPr/>
+          <p:nvPr/>
+        </p:nvSpPr>
+        <p:spPr>
+          <a:xfrm>
+            <a:off x="5486400" y="0"/>
+            <a:ext cx="3657600" cy="5148580"/>
+          </a:xfrm>
+          <a:custGeom>
+            <a:avLst/>
+            <a:gdLst/>
+            <a:ahLst/>
+            <a:cxnLst/>
+            <a:rect l="l" t="t" r="r" b="b"/>
+            <a:pathLst>
+              <a:path w="3657600" h="5148580">
+                <a:moveTo>
+                  <a:pt x="0" y="0"/>
+                </a:moveTo>
+                <a:lnTo>
+                  <a:pt x="0" y="5148071"/>
+                </a:lnTo>
+                <a:lnTo>
+                  <a:pt x="3657600" y="5148071"/>
+                </a:lnTo>
+                <a:lnTo>
+                  <a:pt x="3657600" y="3"/>
+                </a:lnTo>
+                <a:lnTo>
+                  <a:pt x="0" y="0"/>
+                </a:lnTo>
+                <a:close/>
+              </a:path>
+            </a:pathLst>
+          </a:custGeom>
+          <a:solidFill>
+            <a:srgbClr val="1E3989"/>
+          </a:solidFill>
+        </p:spPr>
+        <p:txBody>
+          <a:bodyPr wrap="square" lIns="0" tIns="0" rIns="0" bIns="0" rtlCol="0"/>
+          <a:lstStyle/>
+          <a:p>
+            <a:endParaRPr>
+              <a:latin typeface="Raleway" pitchFamily="2" charset="77"/>
+              <a:cs typeface="Times New Roman" panose="02020603050405020304"/>
+            </a:endParaRPr>
+          </a:p>
+        </p:txBody>
+      </p:sp>
+    </p:spTree>
+  </p:cSld>
+  <p:clrMapOvr>
+    <a:masterClrMapping/>
+  </p:clrMapOvr>
+</p:sld>
+</file>
+
+<file path=ppt/slides/slide13.xml><?xml version="1.0" encoding="utf-8"?>
+<p:sld xmlns:a="http://schemas.openxmlformats.org/drawingml/2006/main" xmlns:r="http://schemas.openxmlformats.org/officeDocument/2006/relationships" xmlns:p="http://schemas.openxmlformats.org/presentationml/2006/main" showMasterSp="0">
+  <p:cSld>
+    <p:spTree>
+      <p:nvGrpSpPr>
+        <p:cNvPr id="1" name=""/>
+        <p:cNvGrpSpPr/>
+        <p:nvPr/>
+      </p:nvGrpSpPr>
+      <p:grpSpPr>
+        <a:xfrm>
+          <a:off x="0" y="0"/>
+          <a:ext cx="0" cy="0"/>
+          <a:chOff x="0" y="0"/>
+          <a:chExt cx="0" cy="0"/>
+        </a:xfrm>
+      </p:grpSpPr>
+      <p:sp>
+        <p:nvSpPr>
+          <p:cNvPr id="2" name="object 2"/>
+          <p:cNvSpPr txBox="1">
+            <a:spLocks noGrp="1"/>
+          </p:cNvSpPr>
+          <p:nvPr>
+            <p:ph type="title"/>
+          </p:nvPr>
+        </p:nvSpPr>
+        <p:spPr>
+          <a:xfrm>
+            <a:off x="2275692" y="1993955"/>
+            <a:ext cx="4592616" cy="845744"/>
+          </a:xfrm>
+          <a:prstGeom prst="rect">
+            <a:avLst/>
+          </a:prstGeom>
+        </p:spPr>
+        <p:txBody>
+          <a:bodyPr vert="horz" wrap="square" lIns="0" tIns="14605" rIns="0" bIns="0" rtlCol="0">
+            <a:spAutoFit/>
+          </a:bodyPr>
+          <a:lstStyle/>
+          <a:p>
+            <a:pPr marL="12700">
+              <a:lnSpc>
+                <a:spcPct val="100000"/>
+              </a:lnSpc>
+              <a:spcBef>
+                <a:spcPts val="115"/>
+              </a:spcBef>
+            </a:pPr>
+            <a:r>
+              <a:rPr sz="5400" spc="250">
+                <a:latin typeface="Raleway" pitchFamily="2" charset="77"/>
+              </a:rPr>
+              <a:t>THANK</a:t>
+            </a:r>
+            <a:r>
+              <a:rPr sz="5400" spc="-335">
+                <a:latin typeface="Raleway" pitchFamily="2" charset="77"/>
+              </a:rPr>
+              <a:t> </a:t>
+            </a:r>
+            <a:r>
+              <a:rPr sz="5400" spc="250">
+                <a:latin typeface="Raleway" pitchFamily="2" charset="77"/>
+              </a:rPr>
+              <a:t>YOU</a:t>
+            </a:r>
+            <a:endParaRPr sz="5400">
+              <a:latin typeface="Raleway" pitchFamily="2" charset="77"/>
+            </a:endParaRPr>
+          </a:p>
+        </p:txBody>
+      </p:sp>
+    </p:spTree>
+  </p:cSld>
+  <p:clrMapOvr>
+    <a:masterClrMapping/>
+  </p:clrMapOvr>
+</p:sld>
+</file>
+
 <file path=ppt/slides/slide2.xml><?xml version="1.0" encoding="utf-8"?>
 <p:sld xmlns:a="http://schemas.openxmlformats.org/drawingml/2006/main" xmlns:r="http://schemas.openxmlformats.org/officeDocument/2006/relationships" xmlns:p="http://schemas.openxmlformats.org/presentationml/2006/main" showMasterSp="0">
+  <p:cSld>
+    <p:spTree>
+      <p:nvGrpSpPr>
+        <p:cNvPr id="1" name=""/>
+        <p:cNvGrpSpPr/>
+        <p:nvPr/>
+      </p:nvGrpSpPr>
+      <p:grpSpPr>
+        <a:xfrm>
+          <a:off x="0" y="0"/>
+          <a:ext cx="0" cy="0"/>
+          <a:chOff x="0" y="0"/>
+          <a:chExt cx="0" cy="0"/>
+        </a:xfrm>
+      </p:grpSpPr>
+      <p:sp>
+        <p:nvSpPr>
+          <p:cNvPr id="21" name="Text Placeholder 20"/>
+          <p:cNvSpPr/>
+          <p:nvPr>
+            <p:ph type="body" idx="1"/>
+          </p:nvPr>
+        </p:nvSpPr>
+        <p:spPr/>
+        <p:txBody>
+          <a:bodyPr/>
+          <a:p>
+            <a:endParaRPr lang="en-US"/>
+          </a:p>
+        </p:txBody>
+      </p:sp>
+      <p:sp>
+        <p:nvSpPr>
+          <p:cNvPr id="22" name="object 2"/>
+          <p:cNvSpPr/>
+          <p:nvPr/>
+        </p:nvSpPr>
+        <p:spPr>
+          <a:xfrm flipH="1">
+            <a:off x="438150" y="428625"/>
+            <a:ext cx="76200" cy="714375"/>
+          </a:xfrm>
+          <a:custGeom>
+            <a:avLst/>
+            <a:gdLst/>
+            <a:ahLst/>
+            <a:cxnLst/>
+            <a:rect l="l" t="t" r="r" b="b"/>
+            <a:pathLst>
+              <a:path w="57150" h="714375">
+                <a:moveTo>
+                  <a:pt x="56756" y="0"/>
+                </a:moveTo>
+                <a:lnTo>
+                  <a:pt x="0" y="0"/>
+                </a:lnTo>
+                <a:lnTo>
+                  <a:pt x="0" y="714311"/>
+                </a:lnTo>
+                <a:lnTo>
+                  <a:pt x="56756" y="714311"/>
+                </a:lnTo>
+                <a:lnTo>
+                  <a:pt x="56756" y="0"/>
+                </a:lnTo>
+                <a:close/>
+              </a:path>
+            </a:pathLst>
+          </a:custGeom>
+          <a:solidFill>
+            <a:srgbClr val="3982F6"/>
+          </a:solidFill>
+        </p:spPr>
+        <p:txBody>
+          <a:bodyPr wrap="square" lIns="0" tIns="0" rIns="0" bIns="0" rtlCol="0"/>
+          <a:lstStyle/>
+          <a:p>
+            <a:endParaRPr>
+              <a:latin typeface="Raleway Regular" charset="0"/>
+              <a:cs typeface="Raleway Regular" charset="0"/>
+            </a:endParaRPr>
+          </a:p>
+        </p:txBody>
+      </p:sp>
+      <p:sp>
+        <p:nvSpPr>
+          <p:cNvPr id="23" name="object 3"/>
+          <p:cNvSpPr txBox="1">
+            <a:spLocks noGrp="1"/>
+          </p:cNvSpPr>
+          <p:nvPr/>
+        </p:nvSpPr>
+        <p:spPr>
+          <a:xfrm>
+            <a:off x="152400" y="368300"/>
+            <a:ext cx="2990215" cy="598805"/>
+          </a:xfrm>
+          <a:prstGeom prst="rect">
+            <a:avLst/>
+          </a:prstGeom>
+        </p:spPr>
+        <p:txBody>
+          <a:bodyPr vert="horz" wrap="square" lIns="0" tIns="276621" rIns="0" bIns="0" rtlCol="0">
+            <a:spAutoFit/>
+          </a:bodyPr>
+          <a:lstStyle>
+            <a:lvl1pPr>
+              <a:defRPr sz="2100" b="1" i="0">
+                <a:solidFill>
+                  <a:srgbClr val="1E3988"/>
+                </a:solidFill>
+                <a:latin typeface="Times New Roman" panose="02020603050405020304"/>
+                <a:ea typeface="+mj-ea"/>
+                <a:cs typeface="Times New Roman" panose="02020603050405020304"/>
+              </a:defRPr>
+            </a:lvl1pPr>
+          </a:lstStyle>
+          <a:p>
+            <a:pPr marL="457200">
+              <a:lnSpc>
+                <a:spcPct val="100000"/>
+              </a:lnSpc>
+              <a:spcBef>
+                <a:spcPts val="105"/>
+              </a:spcBef>
+            </a:pPr>
+            <a:r>
+              <a:rPr lang="en-US" spc="40" dirty="0">
+                <a:latin typeface="Raleway Bold" charset="0"/>
+                <a:cs typeface="Raleway Bold" charset="0"/>
+              </a:rPr>
+              <a:t>Overview</a:t>
+            </a:r>
+            <a:endParaRPr lang="en-US" spc="40" dirty="0">
+              <a:latin typeface="Raleway Bold" charset="0"/>
+              <a:cs typeface="Raleway Bold" charset="0"/>
+            </a:endParaRPr>
+          </a:p>
+        </p:txBody>
+      </p:sp>
+      <p:grpSp>
+        <p:nvGrpSpPr>
+          <p:cNvPr id="24" name="object 5"/>
+          <p:cNvGrpSpPr/>
+          <p:nvPr/>
+        </p:nvGrpSpPr>
+        <p:grpSpPr>
+          <a:xfrm>
+            <a:off x="438150" y="1429385"/>
+            <a:ext cx="7845425" cy="3002280"/>
+            <a:chOff x="438150" y="1429575"/>
+            <a:chExt cx="4638675" cy="3002280"/>
+          </a:xfrm>
+        </p:grpSpPr>
+        <p:sp>
+          <p:nvSpPr>
+            <p:cNvPr id="25" name="object 6"/>
+            <p:cNvSpPr/>
+            <p:nvPr/>
+          </p:nvSpPr>
+          <p:spPr>
+            <a:xfrm>
+              <a:off x="438150" y="1429575"/>
+              <a:ext cx="4638675" cy="3002280"/>
+            </a:xfrm>
+            <a:custGeom>
+              <a:avLst/>
+              <a:gdLst/>
+              <a:ahLst/>
+              <a:cxnLst/>
+              <a:rect l="l" t="t" r="r" b="b"/>
+              <a:pathLst>
+                <a:path w="4638675" h="3002279">
+                  <a:moveTo>
+                    <a:pt x="4638675" y="0"/>
+                  </a:moveTo>
+                  <a:lnTo>
+                    <a:pt x="0" y="0"/>
+                  </a:lnTo>
+                  <a:lnTo>
+                    <a:pt x="0" y="3002280"/>
+                  </a:lnTo>
+                  <a:lnTo>
+                    <a:pt x="4638675" y="3002280"/>
+                  </a:lnTo>
+                  <a:lnTo>
+                    <a:pt x="4638675" y="0"/>
+                  </a:lnTo>
+                  <a:close/>
+                </a:path>
+              </a:pathLst>
+            </a:custGeom>
+            <a:solidFill>
+              <a:srgbClr val="F8F8FA"/>
+            </a:solidFill>
+          </p:spPr>
+          <p:txBody>
+            <a:bodyPr wrap="square" lIns="0" tIns="0" rIns="0" bIns="0" rtlCol="0"/>
+            <a:lstStyle/>
+            <a:p>
+              <a:endParaRPr>
+                <a:latin typeface="Raleway Regular" charset="0"/>
+                <a:cs typeface="Raleway Regular" charset="0"/>
+              </a:endParaRPr>
+            </a:p>
+          </p:txBody>
+        </p:sp>
+        <p:sp>
+          <p:nvSpPr>
+            <p:cNvPr id="26" name="object 7"/>
+            <p:cNvSpPr/>
+            <p:nvPr/>
+          </p:nvSpPr>
+          <p:spPr>
+            <a:xfrm>
+              <a:off x="438150" y="1429575"/>
+              <a:ext cx="28575" cy="3002280"/>
+            </a:xfrm>
+            <a:custGeom>
+              <a:avLst/>
+              <a:gdLst/>
+              <a:ahLst/>
+              <a:cxnLst/>
+              <a:rect l="l" t="t" r="r" b="b"/>
+              <a:pathLst>
+                <a:path w="28575" h="3002279">
+                  <a:moveTo>
+                    <a:pt x="28054" y="0"/>
+                  </a:moveTo>
+                  <a:lnTo>
+                    <a:pt x="0" y="0"/>
+                  </a:lnTo>
+                  <a:lnTo>
+                    <a:pt x="0" y="3002280"/>
+                  </a:lnTo>
+                  <a:lnTo>
+                    <a:pt x="28054" y="3002280"/>
+                  </a:lnTo>
+                  <a:lnTo>
+                    <a:pt x="28054" y="0"/>
+                  </a:lnTo>
+                  <a:close/>
+                </a:path>
+              </a:pathLst>
+            </a:custGeom>
+            <a:solidFill>
+              <a:srgbClr val="1E3988"/>
+            </a:solidFill>
+          </p:spPr>
+          <p:txBody>
+            <a:bodyPr wrap="square" lIns="0" tIns="0" rIns="0" bIns="0" rtlCol="0"/>
+            <a:lstStyle/>
+            <a:p>
+              <a:endParaRPr>
+                <a:latin typeface="Raleway Regular" charset="0"/>
+                <a:cs typeface="Raleway Regular" charset="0"/>
+              </a:endParaRPr>
+            </a:p>
+          </p:txBody>
+        </p:sp>
+      </p:grpSp>
+      <p:sp>
+        <p:nvSpPr>
+          <p:cNvPr id="27" name="object 8"/>
+          <p:cNvSpPr txBox="1">
+            <a:spLocks noGrp="1"/>
+          </p:cNvSpPr>
+          <p:nvPr/>
+        </p:nvSpPr>
+        <p:spPr>
+          <a:xfrm>
+            <a:off x="1497965" y="1819275"/>
+            <a:ext cx="5501640" cy="2223135"/>
+          </a:xfrm>
+          <a:prstGeom prst="rect">
+            <a:avLst/>
+          </a:prstGeom>
+        </p:spPr>
+        <p:txBody>
+          <a:bodyPr vert="horz" wrap="square" lIns="0" tIns="8255" rIns="0" bIns="0" rtlCol="0">
+            <a:noAutofit/>
+          </a:bodyPr>
+          <a:lstStyle>
+            <a:lvl1pPr marL="0">
+              <a:defRPr sz="950" b="0" i="0">
+                <a:solidFill>
+                  <a:srgbClr val="334153"/>
+                </a:solidFill>
+                <a:latin typeface="Times New Roman" panose="02020603050405020304"/>
+                <a:ea typeface="+mn-ea"/>
+                <a:cs typeface="Times New Roman" panose="02020603050405020304"/>
+              </a:defRPr>
+            </a:lvl1pPr>
+            <a:lvl2pPr marL="457200">
+              <a:defRPr>
+                <a:latin typeface="+mn-lt"/>
+                <a:ea typeface="+mn-ea"/>
+                <a:cs typeface="+mn-cs"/>
+              </a:defRPr>
+            </a:lvl2pPr>
+            <a:lvl3pPr marL="914400">
+              <a:defRPr>
+                <a:latin typeface="+mn-lt"/>
+                <a:ea typeface="+mn-ea"/>
+                <a:cs typeface="+mn-cs"/>
+              </a:defRPr>
+            </a:lvl3pPr>
+            <a:lvl4pPr marL="1371600">
+              <a:defRPr>
+                <a:latin typeface="+mn-lt"/>
+                <a:ea typeface="+mn-ea"/>
+                <a:cs typeface="+mn-cs"/>
+              </a:defRPr>
+            </a:lvl4pPr>
+            <a:lvl5pPr marL="1828800">
+              <a:defRPr>
+                <a:latin typeface="+mn-lt"/>
+                <a:ea typeface="+mn-ea"/>
+                <a:cs typeface="+mn-cs"/>
+              </a:defRPr>
+            </a:lvl5pPr>
+            <a:lvl6pPr marL="2286000">
+              <a:defRPr>
+                <a:latin typeface="+mn-lt"/>
+                <a:ea typeface="+mn-ea"/>
+                <a:cs typeface="+mn-cs"/>
+              </a:defRPr>
+            </a:lvl6pPr>
+            <a:lvl7pPr marL="2743200">
+              <a:defRPr>
+                <a:latin typeface="+mn-lt"/>
+                <a:ea typeface="+mn-ea"/>
+                <a:cs typeface="+mn-cs"/>
+              </a:defRPr>
+            </a:lvl7pPr>
+            <a:lvl8pPr marL="3200400">
+              <a:defRPr>
+                <a:latin typeface="+mn-lt"/>
+                <a:ea typeface="+mn-ea"/>
+                <a:cs typeface="+mn-cs"/>
+              </a:defRPr>
+            </a:lvl8pPr>
+            <a:lvl9pPr marL="3657600">
+              <a:defRPr>
+                <a:latin typeface="+mn-lt"/>
+                <a:ea typeface="+mn-ea"/>
+                <a:cs typeface="+mn-cs"/>
+              </a:defRPr>
+            </a:lvl9pPr>
+          </a:lstStyle>
+          <a:p>
+            <a:pPr marL="4445" marR="455295" indent="0" algn="ctr">
+              <a:lnSpc>
+                <a:spcPct val="106000"/>
+              </a:lnSpc>
+              <a:spcBef>
+                <a:spcPts val="65"/>
+              </a:spcBef>
+              <a:buSzPct val="89000"/>
+              <a:buNone/>
+              <a:tabLst>
+                <a:tab pos="54610" algn="l"/>
+              </a:tabLst>
+            </a:pPr>
+            <a:r>
+              <a:rPr lang="en-US" altLang="en-US" sz="1200" spc="-10" dirty="0">
+                <a:latin typeface="Raleway Regular" charset="0"/>
+                <a:cs typeface="Raleway Regular" charset="0"/>
+              </a:rPr>
+              <a:t>This report aims to analyse the website’s performance for </a:t>
+            </a:r>
+            <a:r>
+              <a:rPr lang="en-US" altLang="en-US" sz="1200" b="1" spc="-10" dirty="0">
+                <a:latin typeface="Raleway Bold" charset="0"/>
+                <a:cs typeface="Raleway Bold" charset="0"/>
+              </a:rPr>
+              <a:t>17</a:t>
+            </a:r>
+            <a:r>
+              <a:rPr lang="en-US" altLang="en-US" sz="1200" spc="-10" dirty="0">
+                <a:latin typeface="Raleway Regular" charset="0"/>
+                <a:cs typeface="Raleway Regular" charset="0"/>
+              </a:rPr>
+              <a:t> </a:t>
+            </a:r>
+            <a:r>
+              <a:rPr lang="en-US" altLang="en-US" sz="1200" b="1" spc="-10" dirty="0">
+                <a:latin typeface="Raleway Regular" charset="0"/>
+                <a:cs typeface="Raleway Regular" charset="0"/>
+              </a:rPr>
+              <a:t>July - 23 July </a:t>
+            </a:r>
+            <a:r>
+              <a:rPr lang="en-US" altLang="en-US" sz="1200" b="1" spc="-10" dirty="0">
+                <a:latin typeface="Raleway Regular" charset="0"/>
+                <a:cs typeface="Raleway Regular" charset="0"/>
+              </a:rPr>
+              <a:t>2026</a:t>
+            </a:r>
+            <a:r>
+              <a:rPr lang="en-US" altLang="en-US" sz="1200" spc="-10" dirty="0">
+                <a:latin typeface="Raleway Regular" charset="0"/>
+                <a:cs typeface="Raleway Regular" charset="0"/>
+              </a:rPr>
+              <a:t>, focusing on traffic, user flow, demographics, behaviours and security.​ The wider scope covers the ongoing</a:t>
+            </a:r>
+            <a:r>
+              <a:rPr lang="en-US" altLang="en-US" sz="1200" b="1" spc="-10" dirty="0">
+                <a:latin typeface="Raleway Regular" charset="0"/>
+                <a:cs typeface="Raleway Regular" charset="0"/>
+              </a:rPr>
+              <a:t> management, maintenance and optimisation of the Econet Infraco website</a:t>
+            </a:r>
+            <a:r>
+              <a:rPr lang="en-US" altLang="en-US" sz="1200" spc="-10" dirty="0">
+                <a:latin typeface="Raleway Regular" charset="0"/>
+                <a:cs typeface="Raleway Regular" charset="0"/>
+              </a:rPr>
+              <a:t> to ensure it remains secure, functional, updated and accessible. This includes CMS maintenance, plugin and theme updates, application-level security monitoring, backup oversight, performance and site health optimisation, technical SEO support, limited content and page updates, third-party integration monitoring, incident response, access governance, change management and monthly reporting.​The service is focused on keeping the website stable and professionally managed, while ensuring key updates, risks, fixes and recommended actions are clearly documented.​</a:t>
+            </a:r>
+            <a:endParaRPr lang="en-US" altLang="en-US" sz="1200" spc="-10" dirty="0">
+              <a:latin typeface="Raleway Regular" charset="0"/>
+              <a:cs typeface="Raleway Regular" charset="0"/>
+            </a:endParaRPr>
+          </a:p>
+          <a:p>
+            <a:pPr marL="4445" marR="455295" indent="0" algn="ctr">
+              <a:lnSpc>
+                <a:spcPct val="106000"/>
+              </a:lnSpc>
+              <a:spcBef>
+                <a:spcPts val="65"/>
+              </a:spcBef>
+              <a:buSzPct val="89000"/>
+              <a:buNone/>
+              <a:tabLst>
+                <a:tab pos="54610" algn="l"/>
+              </a:tabLst>
+            </a:pPr>
+            <a:endParaRPr lang="en-US" altLang="en-US" sz="1200" spc="-10" dirty="0">
+              <a:latin typeface="Raleway Regular" charset="0"/>
+              <a:cs typeface="Raleway Regular" charset="0"/>
+            </a:endParaRPr>
+          </a:p>
+          <a:p>
+            <a:pPr marL="4445" marR="455295" indent="0" algn="ctr">
+              <a:lnSpc>
+                <a:spcPct val="106000"/>
+              </a:lnSpc>
+              <a:spcBef>
+                <a:spcPts val="65"/>
+              </a:spcBef>
+              <a:buSzPct val="89000"/>
+              <a:buNone/>
+              <a:tabLst>
+                <a:tab pos="54610" algn="l"/>
+              </a:tabLst>
+            </a:pPr>
+            <a:r>
+              <a:rPr lang="en-US" altLang="en-US" sz="1200" spc="-10" dirty="0">
+                <a:latin typeface="Raleway Regular" charset="0"/>
+                <a:cs typeface="Raleway Regular" charset="0"/>
+              </a:rPr>
+              <a:t>​</a:t>
+            </a:r>
+            <a:endParaRPr lang="en-US" altLang="en-US" sz="1200" spc="-10" dirty="0">
+              <a:latin typeface="Raleway Regular" charset="0"/>
+              <a:cs typeface="Raleway Regular" charset="0"/>
+            </a:endParaRPr>
+          </a:p>
+        </p:txBody>
+      </p:sp>
+    </p:spTree>
+  </p:cSld>
+  <p:clrMapOvr>
+    <a:masterClrMapping/>
+  </p:clrMapOvr>
+</p:sld>
+</file>
+
+<file path=ppt/slides/slide3.xml><?xml version="1.0" encoding="utf-8"?>
+<p:sld xmlns:a="http://schemas.openxmlformats.org/drawingml/2006/main" xmlns:r="http://schemas.openxmlformats.org/officeDocument/2006/relationships" xmlns:p="http://schemas.openxmlformats.org/presentationml/2006/main">
   <p:cSld>
     <p:spTree>
       <p:nvGrpSpPr>
@@ -2476,59 +4225,12 @@
                 <a:latin typeface="Raleway" pitchFamily="2" charset="77"/>
                 <a:cs typeface="Times New Roman" panose="02020603050405020304"/>
               </a:rPr>
-              <a:t>Performance</a:t>
-            </a:r>
-            <a:r>
-              <a:rPr sz="1300" spc="-5">
-                <a:solidFill>
-                  <a:srgbClr val="334154"/>
-                </a:solidFill>
-                <a:latin typeface="Raleway" pitchFamily="2" charset="77"/>
-                <a:cs typeface="Times New Roman" panose="02020603050405020304"/>
-              </a:rPr>
-              <a:t> </a:t>
-            </a:r>
-            <a:r>
-              <a:rPr sz="1300" spc="-20">
-                <a:solidFill>
-                  <a:srgbClr val="334154"/>
-                </a:solidFill>
-                <a:latin typeface="Raleway" pitchFamily="2" charset="77"/>
-                <a:cs typeface="Times New Roman" panose="02020603050405020304"/>
-              </a:rPr>
-              <a:t>Overview:</a:t>
-            </a:r>
-            <a:r>
-              <a:rPr sz="1300" spc="20">
-                <a:solidFill>
-                  <a:srgbClr val="334154"/>
-                </a:solidFill>
-                <a:latin typeface="Raleway" pitchFamily="2" charset="77"/>
-                <a:cs typeface="Times New Roman" panose="02020603050405020304"/>
-              </a:rPr>
-              <a:t> </a:t>
-            </a:r>
-            <a:r>
-              <a:rPr sz="1300">
-                <a:solidFill>
-                  <a:srgbClr val="334154"/>
-                </a:solidFill>
-                <a:latin typeface="Raleway" pitchFamily="2" charset="77"/>
-                <a:cs typeface="Times New Roman" panose="02020603050405020304"/>
-              </a:rPr>
-              <a:t>Strong</a:t>
-            </a:r>
-            <a:r>
-              <a:rPr lang="en-US" sz="1300">
-                <a:solidFill>
-                  <a:srgbClr val="334154"/>
-                </a:solidFill>
-                <a:latin typeface="Raleway" pitchFamily="2" charset="77"/>
-                <a:cs typeface="Times New Roman" panose="02020603050405020304"/>
-              </a:rPr>
-              <a:t> proportion of first-time users</a:t>
+              <a:t>97.3% of users represent first-time visitors.</a:t>
             </a:r>
             <a:endParaRPr sz="1300">
+              <a:solidFill>
+                <a:srgbClr val="334154"/>
+              </a:solidFill>
               <a:latin typeface="Raleway" pitchFamily="2" charset="77"/>
               <a:cs typeface="Times New Roman" panose="02020603050405020304"/>
             </a:endParaRPr>
@@ -2669,7 +4371,7 @@
         <p:spPr>
           <a:xfrm>
             <a:off x="477579" y="1431875"/>
-            <a:ext cx="4122007" cy="3090545"/>
+            <a:ext cx="4122007" cy="1397635"/>
           </a:xfrm>
           <a:prstGeom prst="rect">
             <a:avLst/>
@@ -2686,35 +4388,49 @@
                 <a:latin typeface="Raleway" pitchFamily="2" charset="77"/>
                 <a:cs typeface="Times New Roman" panose="02020603050405020304"/>
               </a:rPr>
-              <a:t>The Econet AI website recorded </a:t>
+              <a:t>The Infraco website achieved strong performance during the review period, drawing </a:t>
             </a:r>
             <a:r>
               <a:rPr lang="en-US" altLang="en-US" b="1" spc="-50">
                 <a:latin typeface="Raleway" pitchFamily="2" charset="77"/>
                 <a:cs typeface="Times New Roman" panose="02020603050405020304"/>
               </a:rPr>
-              <a:t>19K active users</a:t>
+              <a:t>3.7K</a:t>
             </a:r>
             <a:r>
               <a:rPr lang="en-US" altLang="en-US" spc="-50">
                 <a:latin typeface="Raleway" pitchFamily="2" charset="77"/>
                 <a:cs typeface="Times New Roman" panose="02020603050405020304"/>
               </a:rPr>
-              <a:t>, of which </a:t>
+              <a:t> active users, with </a:t>
             </a:r>
             <a:r>
               <a:rPr lang="en-US" altLang="en-US" b="1" spc="-50">
                 <a:latin typeface="Raleway" pitchFamily="2" charset="77"/>
                 <a:cs typeface="Times New Roman" panose="02020603050405020304"/>
               </a:rPr>
-              <a:t>19K (approximately 100%) are new visitors</a:t>
+              <a:t>3.6K</a:t>
             </a:r>
             <a:r>
               <a:rPr lang="en-US" altLang="en-US" spc="-50">
                 <a:latin typeface="Raleway" pitchFamily="2" charset="77"/>
                 <a:cs typeface="Times New Roman" panose="02020603050405020304"/>
               </a:rPr>
-              <a:t>, highlighting very strong audience acquisition and early stage visibility across digital channels.</a:t>
+              <a:t> (</a:t>
+            </a:r>
+            <a:r>
+              <a:rPr lang="en-US" altLang="en-US" b="1" spc="-50">
+                <a:latin typeface="Raleway" pitchFamily="2" charset="77"/>
+                <a:cs typeface="Times New Roman" panose="02020603050405020304"/>
+              </a:rPr>
+              <a:t>97.3%</a:t>
+            </a:r>
+            <a:r>
+              <a:rPr lang="en-US" altLang="en-US" spc="-50">
+                <a:latin typeface="Raleway" pitchFamily="2" charset="77"/>
+                <a:cs typeface="Times New Roman" panose="02020603050405020304"/>
+              </a:rPr>
+              <a:t>) being new visitors. This high proportion demonstrates effective audience acquisition and consistent brand visibility across all digital channels.</a:t>
             </a:r>
             <a:endParaRPr lang="en-US" altLang="en-US" spc="-50">
               <a:latin typeface="Raleway" pitchFamily="2" charset="77"/>
@@ -2733,7 +4449,21 @@
                 <a:latin typeface="Raleway" pitchFamily="2" charset="77"/>
                 <a:cs typeface="Times New Roman" panose="02020603050405020304"/>
               </a:rPr>
-              <a:t>The extremely high proportion of new users suggests that the platform is still in a discovery phase, with most traffic coming from first time visitors rather than returning users.</a:t>
+              <a:t>An average engagement time of </a:t>
+            </a:r>
+            <a:r>
+              <a:rPr lang="en-US" altLang="en-US" b="1" spc="-50">
+                <a:latin typeface="Raleway" pitchFamily="2" charset="77"/>
+                <a:cs typeface="Times New Roman" panose="02020603050405020304"/>
+              </a:rPr>
+              <a:t>28s</a:t>
+            </a:r>
+            <a:r>
+              <a:rPr lang="en-US" altLang="en-US" spc="-50">
+                <a:latin typeface="Raleway" pitchFamily="2" charset="77"/>
+                <a:cs typeface="Times New Roman" panose="02020603050405020304"/>
+              </a:rPr>
+              <a:t> signifies meaningful content interaction. Users are dedicating time to engagement rather than immediate exit, reflecting compelling and relevant content, despite the audience's scale.</a:t>
             </a:r>
             <a:endParaRPr lang="en-US" altLang="en-US" spc="-50">
               <a:latin typeface="Raleway" pitchFamily="2" charset="77"/>
@@ -2741,85 +4471,6 @@
             </a:endParaRPr>
           </a:p>
           <a:p>
-            <a:endParaRPr lang="en-US" altLang="en-US" spc="-50">
-              <a:latin typeface="Raleway" pitchFamily="2" charset="77"/>
-              <a:cs typeface="Times New Roman" panose="02020603050405020304"/>
-            </a:endParaRPr>
-          </a:p>
-          <a:p>
-            <a:r>
-              <a:rPr lang="en-US" altLang="en-US" spc="-50">
-                <a:latin typeface="Raleway" pitchFamily="2" charset="77"/>
-                <a:cs typeface="Times New Roman" panose="02020603050405020304"/>
-              </a:rPr>
-              <a:t>From a search perspective, the platform achieved a </a:t>
-            </a:r>
-            <a:r>
-              <a:rPr lang="en-US" altLang="en-US" b="1" spc="-50">
-                <a:latin typeface="Raleway" pitchFamily="2" charset="77"/>
-                <a:cs typeface="Times New Roman" panose="02020603050405020304"/>
-              </a:rPr>
-              <a:t>8.3% click-through rate (CTR)</a:t>
-            </a:r>
-            <a:r>
-              <a:rPr lang="en-US" altLang="en-US" spc="-50">
-                <a:latin typeface="Raleway" pitchFamily="2" charset="77"/>
-                <a:cs typeface="Times New Roman" panose="02020603050405020304"/>
-              </a:rPr>
-              <a:t>, based on Search Console data, indicating strong effectiveness of search listings in converting impressions into visits.</a:t>
-            </a:r>
-            <a:endParaRPr lang="en-US" altLang="en-US" spc="-50">
-              <a:latin typeface="Raleway" pitchFamily="2" charset="77"/>
-              <a:cs typeface="Times New Roman" panose="02020603050405020304"/>
-            </a:endParaRPr>
-          </a:p>
-          <a:p>
-            <a:endParaRPr lang="en-US" altLang="en-US" spc="-50">
-              <a:latin typeface="Raleway" pitchFamily="2" charset="77"/>
-              <a:cs typeface="Times New Roman" panose="02020603050405020304"/>
-            </a:endParaRPr>
-          </a:p>
-          <a:p>
-            <a:r>
-              <a:rPr lang="en-US" altLang="en-US" spc="-50">
-                <a:latin typeface="Raleway" pitchFamily="2" charset="77"/>
-                <a:cs typeface="Times New Roman" panose="02020603050405020304"/>
-              </a:rPr>
-              <a:t>The average engagement time of </a:t>
-            </a:r>
-            <a:r>
-              <a:rPr lang="en-US" altLang="en-US" b="1" spc="-50">
-                <a:latin typeface="Raleway" pitchFamily="2" charset="77"/>
-                <a:cs typeface="Times New Roman" panose="02020603050405020304"/>
-              </a:rPr>
-              <a:t>11 seconds</a:t>
-            </a:r>
-            <a:r>
-              <a:rPr lang="en-US" altLang="en-US" spc="-50">
-                <a:latin typeface="Raleway" pitchFamily="2" charset="77"/>
-                <a:cs typeface="Times New Roman" panose="02020603050405020304"/>
-              </a:rPr>
-              <a:t> indicates low interaction levels, suggesting that while users are successfully reaching the platform, they are not spending significant time engaging with the content.</a:t>
-            </a:r>
-            <a:endParaRPr lang="en-US" altLang="en-US" spc="-50">
-              <a:latin typeface="Raleway" pitchFamily="2" charset="77"/>
-              <a:cs typeface="Times New Roman" panose="02020603050405020304"/>
-            </a:endParaRPr>
-          </a:p>
-          <a:p>
-            <a:endParaRPr lang="en-US" altLang="en-US" spc="-50">
-              <a:latin typeface="Raleway" pitchFamily="2" charset="77"/>
-              <a:cs typeface="Times New Roman" panose="02020603050405020304"/>
-            </a:endParaRPr>
-          </a:p>
-          <a:p>
-            <a:r>
-              <a:rPr lang="en-US" altLang="en-US" spc="-50">
-                <a:latin typeface="Raleway" pitchFamily="2" charset="77"/>
-                <a:cs typeface="Times New Roman" panose="02020603050405020304"/>
-              </a:rPr>
-              <a:t>Overall, the data reflects strong top of funnel performance, with high visibility and successful user acquisition. However, there is a clear opportunity to improve engagement depth and retention by encouraging users to explore more content and return to the platform.</a:t>
-            </a:r>
             <a:endParaRPr lang="en-US" altLang="en-US" spc="-50">
               <a:latin typeface="Raleway" pitchFamily="2" charset="77"/>
               <a:cs typeface="Times New Roman" panose="02020603050405020304"/>
@@ -2867,9 +4518,12 @@
                 <a:latin typeface="Raleway" pitchFamily="2" charset="77"/>
                 <a:cs typeface="Times New Roman" panose="02020603050405020304"/>
               </a:rPr>
-              <a:t>19K</a:t>
-            </a:r>
-            <a:endParaRPr sz="1800">
+              <a:t>3.7K</a:t>
+            </a:r>
+            <a:endParaRPr lang="en-US" altLang="en-GB" b="1" spc="-25">
+              <a:solidFill>
+                <a:srgbClr val="FFFFFF"/>
+              </a:solidFill>
               <a:latin typeface="Raleway" pitchFamily="2" charset="77"/>
               <a:cs typeface="Times New Roman" panose="02020603050405020304"/>
             </a:endParaRPr>
@@ -2960,19 +4614,12 @@
                 <a:latin typeface="Raleway" pitchFamily="2" charset="77"/>
                 <a:cs typeface="Times New Roman" panose="02020603050405020304"/>
               </a:rPr>
-              <a:t>100</a:t>
-            </a:r>
-            <a:r>
-              <a:rPr lang="en-GB" b="1" spc="-10">
-                <a:solidFill>
-                  <a:srgbClr val="FFFFFF"/>
-                </a:solidFill>
-                <a:latin typeface="Raleway" pitchFamily="2" charset="77"/>
-                <a:cs typeface="Times New Roman" panose="02020603050405020304"/>
-              </a:rPr>
-              <a:t>%</a:t>
-            </a:r>
-            <a:endParaRPr sz="1800">
+              <a:t>97.3%</a:t>
+            </a:r>
+            <a:endParaRPr lang="en-US" altLang="en-GB" b="1" spc="-10">
+              <a:solidFill>
+                <a:srgbClr val="FFFFFF"/>
+              </a:solidFill>
               <a:latin typeface="Raleway" pitchFamily="2" charset="77"/>
               <a:cs typeface="Times New Roman" panose="02020603050405020304"/>
             </a:endParaRPr>
@@ -3056,26 +4703,19 @@
               </a:spcBef>
             </a:pPr>
             <a:r>
-              <a:rPr lang="en-US" altLang="" sz="1800" b="1" spc="-20">
+              <a:rPr lang="en-US" altLang="en-US" sz="1800" b="1" spc="-20">
                 <a:solidFill>
                   <a:srgbClr val="FFFFFF"/>
                 </a:solidFill>
                 <a:latin typeface="Raleway" pitchFamily="2" charset="77"/>
                 <a:cs typeface="Times New Roman" panose="02020603050405020304"/>
               </a:rPr>
-              <a:t>8.3</a:t>
-            </a:r>
-            <a:r>
-              <a:rPr sz="1800" b="1" spc="-20">
-                <a:solidFill>
-                  <a:srgbClr val="FFFFFF"/>
-                </a:solidFill>
-                <a:latin typeface="Raleway" pitchFamily="2" charset="77"/>
-                <a:cs typeface="Times New Roman" panose="02020603050405020304"/>
-              </a:rPr>
-              <a:t>%</a:t>
-            </a:r>
-            <a:endParaRPr sz="1800">
+              <a:t>8%</a:t>
+            </a:r>
+            <a:endParaRPr lang="en-US" altLang="en-US" sz="1800" b="1" spc="-20">
+              <a:solidFill>
+                <a:srgbClr val="FFFFFF"/>
+              </a:solidFill>
               <a:latin typeface="Raleway" pitchFamily="2" charset="77"/>
               <a:cs typeface="Times New Roman" panose="02020603050405020304"/>
             </a:endParaRPr>
@@ -3114,7 +4754,7 @@
 </p:sld>
 </file>
 
-<file path=ppt/slides/slide3.xml><?xml version="1.0" encoding="utf-8"?>
+<file path=ppt/slides/slide4.xml><?xml version="1.0" encoding="utf-8"?>
 <p:sld xmlns:a="http://schemas.openxmlformats.org/drawingml/2006/main" xmlns:r="http://schemas.openxmlformats.org/officeDocument/2006/relationships" xmlns:p="http://schemas.openxmlformats.org/presentationml/2006/main" showMasterSp="0">
   <p:cSld>
     <p:spTree>
@@ -3203,109 +4843,12 @@
                 <a:latin typeface="Raleway" pitchFamily="2" charset="77"/>
                 <a:cs typeface="Times New Roman" panose="02020603050405020304"/>
               </a:rPr>
-              <a:t>User</a:t>
-            </a:r>
-            <a:r>
-              <a:rPr sz="1300" b="0" spc="20">
-                <a:solidFill>
-                  <a:srgbClr val="334154"/>
-                </a:solidFill>
-                <a:latin typeface="Raleway" pitchFamily="2" charset="77"/>
-                <a:cs typeface="Times New Roman" panose="02020603050405020304"/>
-              </a:rPr>
-              <a:t> </a:t>
-            </a:r>
-            <a:r>
-              <a:rPr sz="1300" b="0" spc="45">
-                <a:solidFill>
-                  <a:srgbClr val="334154"/>
-                </a:solidFill>
-                <a:latin typeface="Raleway" pitchFamily="2" charset="77"/>
-                <a:cs typeface="Times New Roman" panose="02020603050405020304"/>
-              </a:rPr>
-              <a:t>Engagement</a:t>
-            </a:r>
-            <a:r>
-              <a:rPr sz="1300" b="0" spc="-45">
-                <a:solidFill>
-                  <a:srgbClr val="334154"/>
-                </a:solidFill>
-                <a:latin typeface="Raleway" pitchFamily="2" charset="77"/>
-                <a:cs typeface="Times New Roman" panose="02020603050405020304"/>
-              </a:rPr>
-              <a:t> </a:t>
-            </a:r>
-            <a:r>
-              <a:rPr sz="1300" b="0" spc="-20">
-                <a:solidFill>
-                  <a:srgbClr val="334154"/>
-                </a:solidFill>
-                <a:latin typeface="Raleway" pitchFamily="2" charset="77"/>
-                <a:cs typeface="Times New Roman" panose="02020603050405020304"/>
-              </a:rPr>
-              <a:t>Metrics:</a:t>
-            </a:r>
-            <a:r>
-              <a:rPr lang="en-GB" sz="1300" b="0" spc="15">
-                <a:solidFill>
-                  <a:srgbClr val="334154"/>
-                </a:solidFill>
-                <a:latin typeface="Raleway" pitchFamily="2" charset="77"/>
-                <a:cs typeface="Times New Roman" panose="02020603050405020304"/>
-              </a:rPr>
-              <a:t> </a:t>
-            </a:r>
-            <a:r>
-              <a:rPr lang="en-US" altLang="en-GB" sz="1300" b="0" spc="15">
-                <a:solidFill>
-                  <a:srgbClr val="334154"/>
-                </a:solidFill>
-                <a:latin typeface="Raleway" pitchFamily="2" charset="77"/>
-                <a:cs typeface="Times New Roman" panose="02020603050405020304"/>
-              </a:rPr>
-              <a:t>19K</a:t>
-            </a:r>
-            <a:r>
-              <a:rPr sz="1300" b="0">
-                <a:solidFill>
-                  <a:srgbClr val="334154"/>
-                </a:solidFill>
-                <a:latin typeface="Raleway" pitchFamily="2" charset="77"/>
-                <a:cs typeface="Times New Roman" panose="02020603050405020304"/>
-              </a:rPr>
-              <a:t> </a:t>
-            </a:r>
-            <a:r>
-              <a:rPr lang="en-GB" sz="1300" b="0">
-                <a:solidFill>
-                  <a:srgbClr val="334154"/>
-                </a:solidFill>
-                <a:latin typeface="Raleway" pitchFamily="2" charset="77"/>
-                <a:cs typeface="Times New Roman" panose="02020603050405020304"/>
-              </a:rPr>
-              <a:t>Active User</a:t>
-            </a:r>
-            <a:r>
-              <a:rPr lang="en-GB" sz="1300" b="0" spc="40">
-                <a:solidFill>
-                  <a:srgbClr val="334154"/>
-                </a:solidFill>
-                <a:latin typeface="Raleway" pitchFamily="2" charset="77"/>
-                <a:cs typeface="Times New Roman" panose="02020603050405020304"/>
-              </a:rPr>
-              <a:t> </a:t>
-            </a:r>
-            <a:r>
-              <a:rPr sz="1300" b="0" spc="-10">
-                <a:solidFill>
-                  <a:srgbClr val="334154"/>
-                </a:solidFill>
-                <a:latin typeface="Raleway" pitchFamily="2" charset="77"/>
-                <a:cs typeface="Times New Roman" panose="02020603050405020304"/>
-              </a:rPr>
-              <a:t>Baseline</a:t>
-            </a:r>
-            <a:endParaRPr sz="1300">
+              <a:t>User Engagement Metrics indicate a 3.7K active user baseline.</a:t>
+            </a:r>
+            <a:endParaRPr sz="1300" b="0">
+              <a:solidFill>
+                <a:srgbClr val="334154"/>
+              </a:solidFill>
               <a:latin typeface="Raleway" pitchFamily="2" charset="77"/>
               <a:cs typeface="Times New Roman" panose="02020603050405020304"/>
             </a:endParaRPr>
@@ -3470,9 +5013,12 @@
                 <a:latin typeface="Raleway" pitchFamily="2" charset="77"/>
                 <a:cs typeface="Times New Roman" panose="02020603050405020304"/>
               </a:rPr>
-              <a:t>19K</a:t>
-            </a:r>
-            <a:endParaRPr sz="2450">
+              <a:t>3.7K</a:t>
+            </a:r>
+            <a:endParaRPr lang="en-US" altLang="en-GB" sz="2450" b="1" spc="-10">
+              <a:solidFill>
+                <a:srgbClr val="1E3989"/>
+              </a:solidFill>
               <a:latin typeface="Raleway" pitchFamily="2" charset="77"/>
               <a:cs typeface="Times New Roman" panose="02020603050405020304"/>
             </a:endParaRPr>
@@ -3701,9 +5247,12 @@
                 <a:latin typeface="Raleway" pitchFamily="2" charset="77"/>
                 <a:cs typeface="Times New Roman" panose="02020603050405020304"/>
               </a:rPr>
-              <a:t>19K</a:t>
-            </a:r>
-            <a:endParaRPr sz="2450">
+              <a:t>3.6K</a:t>
+            </a:r>
+            <a:endParaRPr lang="en-US" altLang="en-GB" sz="2450" b="1" spc="-10">
+              <a:solidFill>
+                <a:srgbClr val="1E3989"/>
+              </a:solidFill>
               <a:latin typeface="Raleway" pitchFamily="2" charset="77"/>
               <a:cs typeface="Times New Roman" panose="02020603050405020304"/>
             </a:endParaRPr>
@@ -3725,69 +5274,12 @@
                 <a:latin typeface="Raleway" pitchFamily="2" charset="77"/>
                 <a:cs typeface="Times New Roman" panose="02020603050405020304"/>
               </a:rPr>
-              <a:t>New</a:t>
-            </a:r>
-            <a:r>
-              <a:rPr sz="800" b="1" spc="40">
-                <a:solidFill>
-                  <a:srgbClr val="63748A"/>
-                </a:solidFill>
-                <a:latin typeface="Raleway" pitchFamily="2" charset="77"/>
-                <a:cs typeface="Times New Roman" panose="02020603050405020304"/>
-              </a:rPr>
-              <a:t> </a:t>
-            </a:r>
-            <a:r>
-              <a:rPr sz="800" b="1">
-                <a:solidFill>
-                  <a:srgbClr val="63748A"/>
-                </a:solidFill>
-                <a:latin typeface="Raleway" pitchFamily="2" charset="77"/>
-                <a:cs typeface="Times New Roman" panose="02020603050405020304"/>
-              </a:rPr>
-              <a:t>Users</a:t>
-            </a:r>
-            <a:r>
-              <a:rPr sz="800" b="1" spc="20">
-                <a:solidFill>
-                  <a:srgbClr val="63748A"/>
-                </a:solidFill>
-                <a:latin typeface="Raleway" pitchFamily="2" charset="77"/>
-                <a:cs typeface="Times New Roman" panose="02020603050405020304"/>
-              </a:rPr>
-              <a:t> </a:t>
-            </a:r>
-            <a:r>
-              <a:rPr sz="800" b="1" spc="-10">
-                <a:solidFill>
-                  <a:srgbClr val="63748A"/>
-                </a:solidFill>
-                <a:latin typeface="Raleway" pitchFamily="2" charset="77"/>
-                <a:cs typeface="Times New Roman" panose="02020603050405020304"/>
-              </a:rPr>
-              <a:t>(</a:t>
-            </a:r>
-            <a:r>
-              <a:rPr lang="en-US" altLang="" sz="800" b="1" spc="-10">
-                <a:solidFill>
-                  <a:srgbClr val="63748A"/>
-                </a:solidFill>
-                <a:latin typeface="Raleway" pitchFamily="2" charset="77"/>
-                <a:cs typeface="Times New Roman" panose="02020603050405020304"/>
-              </a:rPr>
-              <a:t>100</a:t>
-            </a:r>
-            <a:r>
-              <a:rPr sz="800" b="1" spc="-10">
-                <a:solidFill>
-                  <a:srgbClr val="63748A"/>
-                </a:solidFill>
-                <a:latin typeface="Raleway" pitchFamily="2" charset="77"/>
-                <a:cs typeface="Times New Roman" panose="02020603050405020304"/>
-              </a:rPr>
-              <a:t>%)</a:t>
-            </a:r>
-            <a:endParaRPr sz="800">
+              <a:t>New Users (97.3%)</a:t>
+            </a:r>
+            <a:endParaRPr sz="800" b="1">
+              <a:solidFill>
+                <a:srgbClr val="63748A"/>
+              </a:solidFill>
               <a:latin typeface="Raleway" pitchFamily="2" charset="77"/>
               <a:cs typeface="Times New Roman" panose="02020603050405020304"/>
             </a:endParaRPr>
@@ -3949,19 +5441,12 @@
                 <a:latin typeface="Raleway" pitchFamily="2" charset="77"/>
                 <a:cs typeface="Times New Roman" panose="02020603050405020304"/>
               </a:rPr>
-              <a:t>11 </a:t>
-            </a:r>
-            <a:r>
-              <a:rPr lang="en-GB" sz="2450" b="1" spc="-25">
-                <a:solidFill>
-                  <a:srgbClr val="1E3989"/>
-                </a:solidFill>
-                <a:latin typeface="Raleway" pitchFamily="2" charset="77"/>
-                <a:cs typeface="Times New Roman" panose="02020603050405020304"/>
-              </a:rPr>
-              <a:t>seconds</a:t>
-            </a:r>
-            <a:endParaRPr sz="2450">
+              <a:t>28s</a:t>
+            </a:r>
+            <a:endParaRPr lang="en-US" altLang="en-GB" sz="2450" b="1" spc="-25">
+              <a:solidFill>
+                <a:srgbClr val="1E3989"/>
+              </a:solidFill>
               <a:latin typeface="Raleway" pitchFamily="2" charset="77"/>
               <a:cs typeface="Times New Roman" panose="02020603050405020304"/>
             </a:endParaRPr>
@@ -4041,7 +5526,7 @@
         <p:spPr>
           <a:xfrm>
             <a:off x="434340" y="2127897"/>
-            <a:ext cx="3816733" cy="2830195"/>
+            <a:ext cx="3816733" cy="1445260"/>
           </a:xfrm>
           <a:prstGeom prst="rect">
             <a:avLst/>
@@ -4066,7 +5551,7 @@
                 <a:latin typeface="Raleway" pitchFamily="2" charset="77"/>
                 <a:cs typeface="Times New Roman" panose="02020603050405020304"/>
               </a:rPr>
-              <a:t>March 2026 reflects solid and encouraging performance for the </a:t>
+              <a:t>The Infraco website demonstrated strong performance this period, registering </a:t>
             </a:r>
             <a:r>
               <a:rPr lang="en-US" altLang="en-US" sz="1000" b="1" spc="-10">
@@ -4076,7 +5561,7 @@
                 <a:latin typeface="Raleway" pitchFamily="2" charset="77"/>
                 <a:cs typeface="Times New Roman" panose="02020603050405020304"/>
               </a:rPr>
-              <a:t>Econet AI website</a:t>
+              <a:t>3.7K</a:t>
             </a:r>
             <a:r>
               <a:rPr lang="en-US" altLang="en-US" sz="1000" spc="-10">
@@ -4086,7 +5571,7 @@
                 <a:latin typeface="Raleway" pitchFamily="2" charset="77"/>
                 <a:cs typeface="Times New Roman" panose="02020603050405020304"/>
               </a:rPr>
-              <a:t>, with a total of </a:t>
+              <a:t> active users. Notably, </a:t>
             </a:r>
             <a:r>
               <a:rPr lang="en-US" altLang="en-US" sz="1000" b="1" spc="-10">
@@ -4096,7 +5581,7 @@
                 <a:latin typeface="Raleway" pitchFamily="2" charset="77"/>
                 <a:cs typeface="Times New Roman" panose="02020603050405020304"/>
               </a:rPr>
-              <a:t>19K active users</a:t>
+              <a:t>3.6K</a:t>
             </a:r>
             <a:r>
               <a:rPr lang="en-US" altLang="en-US" sz="1000" spc="-10">
@@ -4106,7 +5591,7 @@
                 <a:latin typeface="Raleway" pitchFamily="2" charset="77"/>
                 <a:cs typeface="Times New Roman" panose="02020603050405020304"/>
               </a:rPr>
-              <a:t> recorded during the period. Of these, 1</a:t>
+              <a:t> users (</a:t>
             </a:r>
             <a:r>
               <a:rPr lang="en-US" altLang="en-US" sz="1000" b="1" spc="-10">
@@ -4116,7 +5601,7 @@
                 <a:latin typeface="Raleway" pitchFamily="2" charset="77"/>
                 <a:cs typeface="Times New Roman" panose="02020603050405020304"/>
               </a:rPr>
-              <a:t>9K users (approximately 100%) were new visitors</a:t>
+              <a:t>97.3%</a:t>
             </a:r>
             <a:r>
               <a:rPr lang="en-US" altLang="en-US" sz="1000" spc="-10">
@@ -4126,7 +5611,7 @@
                 <a:latin typeface="Raleway" pitchFamily="2" charset="77"/>
                 <a:cs typeface="Times New Roman" panose="02020603050405020304"/>
               </a:rPr>
-              <a:t>, highlighting continued strong brand discovery and early stage awareness.</a:t>
+              <a:t>) were new visitors, underscoring robust brand discovery and the efficacy of current reach and awareness initiatives.</a:t>
             </a:r>
             <a:endParaRPr lang="en-US" altLang="en-US" sz="1000" spc="-10">
               <a:solidFill>
@@ -4154,26 +5639,18 @@
                 <a:latin typeface="Raleway" pitchFamily="2" charset="77"/>
                 <a:cs typeface="Times New Roman" panose="02020603050405020304"/>
               </a:rPr>
-              <a:t>The consistently high proportion of new users suggests that marketing efforts, search visibility, and broader brand exposure are successfully attracting first time audiences to the platform. This level of new user acquisition indicates that the website is still in a growth and discovery phase.</a:t>
-            </a:r>
-            <a:endParaRPr lang="en-US" altLang="en-US" sz="1000" spc="-10">
-              <a:solidFill>
-                <a:srgbClr val="334154"/>
-              </a:solidFill>
-              <a:latin typeface="Raleway" pitchFamily="2" charset="77"/>
-              <a:cs typeface="Times New Roman" panose="02020603050405020304"/>
-            </a:endParaRPr>
-          </a:p>
-          <a:p>
-            <a:endParaRPr lang="en-US" altLang="en-US" sz="1000" spc="-10">
-              <a:solidFill>
-                <a:srgbClr val="334154"/>
-              </a:solidFill>
-              <a:latin typeface="Raleway" pitchFamily="2" charset="77"/>
-              <a:cs typeface="Times New Roman" panose="02020603050405020304"/>
-            </a:endParaRPr>
-          </a:p>
-          <a:p>
+              <a:t>An average engagement time of </a:t>
+            </a:r>
+            <a:r>
+              <a:rPr lang="en-US" altLang="en-US" sz="1000" b="1" spc="-10">
+                <a:solidFill>
+                  <a:srgbClr val="334154"/>
+                </a:solidFill>
+                <a:latin typeface="Raleway" pitchFamily="2" charset="77"/>
+                <a:cs typeface="Times New Roman" panose="02020603050405020304"/>
+              </a:rPr>
+              <a:t>28s</a:t>
+            </a:r>
             <a:r>
               <a:rPr lang="en-US" altLang="en-US" sz="1000" spc="-10">
                 <a:solidFill>
@@ -4182,27 +5659,7 @@
                 <a:latin typeface="Raleway" pitchFamily="2" charset="77"/>
                 <a:cs typeface="Times New Roman" panose="02020603050405020304"/>
               </a:rPr>
-              <a:t>The average engagement time of </a:t>
-            </a:r>
-            <a:r>
-              <a:rPr lang="en-US" altLang="en-US" sz="1000" b="1" spc="-10">
-                <a:solidFill>
-                  <a:srgbClr val="334154"/>
-                </a:solidFill>
-                <a:latin typeface="Raleway" pitchFamily="2" charset="77"/>
-                <a:cs typeface="Times New Roman" panose="02020603050405020304"/>
-              </a:rPr>
-              <a:t>11 seconds</a:t>
-            </a:r>
-            <a:r>
-              <a:rPr lang="en-US" altLang="en-US" sz="1000" spc="-10">
-                <a:solidFill>
-                  <a:srgbClr val="334154"/>
-                </a:solidFill>
-                <a:latin typeface="Raleway" pitchFamily="2" charset="77"/>
-                <a:cs typeface="Times New Roman" panose="02020603050405020304"/>
-              </a:rPr>
-              <a:t> indicates low interaction levels. While users are successfully reaching the platform, this suggests that many are not spending enough time engaging deeply with the content, pointing to opportunities for improving user experience and content relevance.</a:t>
+              <a:t> indicates moderate yet significant user interaction. Although slightly under longer-form corporate engagement benchmarks, this duration confirms users review key information instead of immediate departure.</a:t>
             </a:r>
             <a:endParaRPr lang="en-US" altLang="en-US" sz="1000" spc="-10">
               <a:solidFill>
@@ -4339,7 +5796,7 @@
       </p:grpSp>
       <p:pic>
         <p:nvPicPr>
-          <p:cNvPr id="20" name="Picture 19" descr="Screenshot 2026-03-30 at 12.45.53"/>
+          <p:cNvPr id="19" name="Picture 18" descr="snapshot_card.png"/>
           <p:cNvPicPr>
             <a:picLocks noChangeAspect="1"/>
           </p:cNvPicPr>
@@ -4355,749 +5812,6 @@
           <a:xfrm>
             <a:off x="4419600" y="2335530"/>
             <a:ext cx="4320540" cy="2477135"/>
-          </a:xfrm>
-          <a:prstGeom prst="rect">
-            <a:avLst/>
-          </a:prstGeom>
-        </p:spPr>
-      </p:pic>
-    </p:spTree>
-  </p:cSld>
-  <p:clrMapOvr>
-    <a:masterClrMapping/>
-  </p:clrMapOvr>
-</p:sld>
-</file>
-
-<file path=ppt/slides/slide4.xml><?xml version="1.0" encoding="utf-8"?>
-<p:sld xmlns:a="http://schemas.openxmlformats.org/drawingml/2006/main" xmlns:r="http://schemas.openxmlformats.org/officeDocument/2006/relationships" xmlns:p="http://schemas.openxmlformats.org/presentationml/2006/main" showMasterSp="0">
-  <p:cSld>
-    <p:spTree>
-      <p:nvGrpSpPr>
-        <p:cNvPr id="1" name=""/>
-        <p:cNvGrpSpPr/>
-        <p:nvPr/>
-      </p:nvGrpSpPr>
-      <p:grpSpPr>
-        <a:xfrm>
-          <a:off x="0" y="0"/>
-          <a:ext cx="0" cy="0"/>
-          <a:chOff x="0" y="0"/>
-          <a:chExt cx="0" cy="0"/>
-        </a:xfrm>
-      </p:grpSpPr>
-      <p:sp>
-        <p:nvSpPr>
-          <p:cNvPr id="2" name="object 2"/>
-          <p:cNvSpPr txBox="1">
-            <a:spLocks noGrp="1"/>
-          </p:cNvSpPr>
-          <p:nvPr>
-            <p:ph type="title"/>
-          </p:nvPr>
-        </p:nvSpPr>
-        <p:spPr>
-          <a:prstGeom prst="rect">
-            <a:avLst/>
-          </a:prstGeom>
-        </p:spPr>
-        <p:txBody>
-          <a:bodyPr vert="horz" wrap="square" lIns="0" tIns="70485" rIns="0" bIns="0" rtlCol="0" anchor="t">
-            <a:spAutoFit/>
-          </a:bodyPr>
-          <a:lstStyle/>
-          <a:p>
-            <a:pPr marL="26670">
-              <a:lnSpc>
-                <a:spcPct val="100000"/>
-              </a:lnSpc>
-              <a:spcBef>
-                <a:spcPts val="555"/>
-              </a:spcBef>
-            </a:pPr>
-            <a:r>
-              <a:rPr spc="65">
-                <a:latin typeface="Raleway" pitchFamily="2" charset="77"/>
-                <a:cs typeface="Times New Roman" panose="02020603050405020304"/>
-              </a:rPr>
-              <a:t>Geographic</a:t>
-            </a:r>
-            <a:r>
-              <a:rPr spc="-50">
-                <a:latin typeface="Raleway" pitchFamily="2" charset="77"/>
-                <a:cs typeface="Times New Roman" panose="02020603050405020304"/>
-              </a:rPr>
-              <a:t> </a:t>
-            </a:r>
-            <a:r>
-              <a:rPr spc="-10">
-                <a:latin typeface="Raleway" pitchFamily="2" charset="77"/>
-                <a:cs typeface="Times New Roman" panose="02020603050405020304"/>
-              </a:rPr>
-              <a:t>Performance</a:t>
-            </a:r>
-            <a:endParaRPr lang="en-US" spc="-10">
-              <a:latin typeface="Raleway" pitchFamily="2" charset="77"/>
-              <a:cs typeface="Times New Roman" panose="02020603050405020304"/>
-            </a:endParaRPr>
-          </a:p>
-          <a:p>
-            <a:pPr marL="26670">
-              <a:lnSpc>
-                <a:spcPct val="100000"/>
-              </a:lnSpc>
-              <a:spcBef>
-                <a:spcPts val="285"/>
-              </a:spcBef>
-            </a:pPr>
-            <a:r>
-              <a:rPr sz="1300" b="0">
-                <a:solidFill>
-                  <a:srgbClr val="334154"/>
-                </a:solidFill>
-                <a:latin typeface="Raleway" pitchFamily="2" charset="77"/>
-                <a:cs typeface="Times New Roman" panose="02020603050405020304"/>
-              </a:rPr>
-              <a:t>Zimbabwe</a:t>
-            </a:r>
-            <a:r>
-              <a:rPr sz="1300" b="0" spc="70">
-                <a:solidFill>
-                  <a:srgbClr val="334154"/>
-                </a:solidFill>
-                <a:latin typeface="Raleway" pitchFamily="2" charset="77"/>
-                <a:cs typeface="Times New Roman" panose="02020603050405020304"/>
-              </a:rPr>
-              <a:t> </a:t>
-            </a:r>
-            <a:r>
-              <a:rPr sz="1300" b="0">
-                <a:solidFill>
-                  <a:srgbClr val="334154"/>
-                </a:solidFill>
-                <a:latin typeface="Raleway" pitchFamily="2" charset="77"/>
-                <a:cs typeface="Times New Roman" panose="02020603050405020304"/>
-              </a:rPr>
-              <a:t>Dominance</a:t>
-            </a:r>
-            <a:r>
-              <a:rPr sz="1300" b="0" spc="70">
-                <a:solidFill>
-                  <a:srgbClr val="334154"/>
-                </a:solidFill>
-                <a:latin typeface="Raleway" pitchFamily="2" charset="77"/>
-                <a:cs typeface="Times New Roman" panose="02020603050405020304"/>
-              </a:rPr>
-              <a:t> </a:t>
-            </a:r>
-            <a:r>
-              <a:rPr sz="1300" b="0" spc="-30">
-                <a:solidFill>
-                  <a:srgbClr val="334154"/>
-                </a:solidFill>
-                <a:latin typeface="Raleway" pitchFamily="2" charset="77"/>
-                <a:cs typeface="Times New Roman" panose="02020603050405020304"/>
-              </a:rPr>
-              <a:t>with</a:t>
-            </a:r>
-            <a:r>
-              <a:rPr sz="1300" b="0" spc="-25">
-                <a:solidFill>
-                  <a:srgbClr val="334154"/>
-                </a:solidFill>
-                <a:latin typeface="Raleway" pitchFamily="2" charset="77"/>
-                <a:cs typeface="Times New Roman" panose="02020603050405020304"/>
-              </a:rPr>
-              <a:t> International</a:t>
-            </a:r>
-            <a:r>
-              <a:rPr sz="1300" b="0" spc="145">
-                <a:solidFill>
-                  <a:srgbClr val="334154"/>
-                </a:solidFill>
-                <a:latin typeface="Raleway" pitchFamily="2" charset="77"/>
-                <a:cs typeface="Times New Roman" panose="02020603050405020304"/>
-              </a:rPr>
-              <a:t> </a:t>
-            </a:r>
-            <a:r>
-              <a:rPr sz="1300" b="0" spc="-10">
-                <a:solidFill>
-                  <a:srgbClr val="334154"/>
-                </a:solidFill>
-                <a:latin typeface="Raleway" pitchFamily="2" charset="77"/>
-                <a:cs typeface="Times New Roman" panose="02020603050405020304"/>
-              </a:rPr>
-              <a:t>Opportunity</a:t>
-            </a:r>
-            <a:endParaRPr sz="1300">
-              <a:latin typeface="Raleway" pitchFamily="2" charset="77"/>
-              <a:cs typeface="Times New Roman" panose="02020603050405020304"/>
-            </a:endParaRPr>
-          </a:p>
-        </p:txBody>
-      </p:sp>
-      <p:grpSp>
-        <p:nvGrpSpPr>
-          <p:cNvPr id="3" name="object 3"/>
-          <p:cNvGrpSpPr/>
-          <p:nvPr/>
-        </p:nvGrpSpPr>
-        <p:grpSpPr>
-          <a:xfrm>
-            <a:off x="183515" y="984885"/>
-            <a:ext cx="3987165" cy="4080510"/>
-            <a:chOff x="228600" y="988466"/>
-            <a:chExt cx="3987165" cy="3752850"/>
-          </a:xfrm>
-        </p:grpSpPr>
-        <p:sp>
-          <p:nvSpPr>
-            <p:cNvPr id="4" name="object 4"/>
-            <p:cNvSpPr/>
-            <p:nvPr/>
-          </p:nvSpPr>
-          <p:spPr>
-            <a:xfrm>
-              <a:off x="228600" y="988466"/>
-              <a:ext cx="3987165" cy="3752850"/>
-            </a:xfrm>
-            <a:custGeom>
-              <a:avLst/>
-              <a:gdLst/>
-              <a:ahLst/>
-              <a:cxnLst/>
-              <a:rect l="l" t="t" r="r" b="b"/>
-              <a:pathLst>
-                <a:path w="3987165" h="3752850">
-                  <a:moveTo>
-                    <a:pt x="3986784" y="0"/>
-                  </a:moveTo>
-                  <a:lnTo>
-                    <a:pt x="0" y="0"/>
-                  </a:lnTo>
-                  <a:lnTo>
-                    <a:pt x="0" y="3752341"/>
-                  </a:lnTo>
-                  <a:lnTo>
-                    <a:pt x="3986784" y="3752341"/>
-                  </a:lnTo>
-                  <a:lnTo>
-                    <a:pt x="3986784" y="0"/>
-                  </a:lnTo>
-                  <a:close/>
-                </a:path>
-              </a:pathLst>
-            </a:custGeom>
-            <a:solidFill>
-              <a:srgbClr val="F8F9FB"/>
-            </a:solidFill>
-          </p:spPr>
-          <p:txBody>
-            <a:bodyPr wrap="square" lIns="0" tIns="0" rIns="0" bIns="0" rtlCol="0"/>
-            <a:lstStyle/>
-            <a:p>
-              <a:endParaRPr>
-                <a:latin typeface="Raleway" pitchFamily="2" charset="77"/>
-              </a:endParaRPr>
-            </a:p>
-          </p:txBody>
-        </p:sp>
-        <p:sp>
-          <p:nvSpPr>
-            <p:cNvPr id="5" name="object 5"/>
-            <p:cNvSpPr/>
-            <p:nvPr/>
-          </p:nvSpPr>
-          <p:spPr>
-            <a:xfrm>
-              <a:off x="228600" y="988466"/>
-              <a:ext cx="45720" cy="3752850"/>
-            </a:xfrm>
-            <a:custGeom>
-              <a:avLst/>
-              <a:gdLst/>
-              <a:ahLst/>
-              <a:cxnLst/>
-              <a:rect l="l" t="t" r="r" b="b"/>
-              <a:pathLst>
-                <a:path w="45720" h="3752850">
-                  <a:moveTo>
-                    <a:pt x="45720" y="0"/>
-                  </a:moveTo>
-                  <a:lnTo>
-                    <a:pt x="0" y="0"/>
-                  </a:lnTo>
-                  <a:lnTo>
-                    <a:pt x="0" y="3752341"/>
-                  </a:lnTo>
-                  <a:lnTo>
-                    <a:pt x="45720" y="3752341"/>
-                  </a:lnTo>
-                  <a:lnTo>
-                    <a:pt x="45720" y="0"/>
-                  </a:lnTo>
-                  <a:close/>
-                </a:path>
-              </a:pathLst>
-            </a:custGeom>
-            <a:solidFill>
-              <a:srgbClr val="1E3989"/>
-            </a:solidFill>
-          </p:spPr>
-          <p:txBody>
-            <a:bodyPr wrap="square" lIns="0" tIns="0" rIns="0" bIns="0" rtlCol="0"/>
-            <a:lstStyle/>
-            <a:p>
-              <a:endParaRPr>
-                <a:latin typeface="Raleway" pitchFamily="2" charset="77"/>
-              </a:endParaRPr>
-            </a:p>
-          </p:txBody>
-        </p:sp>
-      </p:grpSp>
-      <p:sp>
-        <p:nvSpPr>
-          <p:cNvPr id="6" name="object 6"/>
-          <p:cNvSpPr txBox="1"/>
-          <p:nvPr/>
-        </p:nvSpPr>
-        <p:spPr>
-          <a:xfrm>
-            <a:off x="304800" y="974725"/>
-            <a:ext cx="3888105" cy="4166235"/>
-          </a:xfrm>
-          <a:prstGeom prst="rect">
-            <a:avLst/>
-          </a:prstGeom>
-        </p:spPr>
-        <p:txBody>
-          <a:bodyPr vert="horz" wrap="square" lIns="0" tIns="11430" rIns="0" bIns="0" rtlCol="0" anchor="t">
-            <a:spAutoFit/>
-          </a:bodyPr>
-          <a:lstStyle/>
-          <a:p>
-            <a:r>
-              <a:rPr lang="en-US" altLang="en-US" sz="1000" spc="-10">
-                <a:solidFill>
-                  <a:srgbClr val="334154"/>
-                </a:solidFill>
-                <a:latin typeface="Raleway" pitchFamily="2" charset="77"/>
-                <a:cs typeface="Times New Roman" panose="02020603050405020304"/>
-              </a:rPr>
-              <a:t>Geographic performance highlights </a:t>
-            </a:r>
-            <a:r>
-              <a:rPr lang="en-US" altLang="en-US" sz="1000" b="1" spc="-10">
-                <a:solidFill>
-                  <a:srgbClr val="334154"/>
-                </a:solidFill>
-                <a:latin typeface="Raleway" pitchFamily="2" charset="77"/>
-                <a:cs typeface="Times New Roman" panose="02020603050405020304"/>
-              </a:rPr>
-              <a:t>Zimbabwe</a:t>
-            </a:r>
-            <a:r>
-              <a:rPr lang="en-US" altLang="en-US" sz="1000" spc="-10">
-                <a:solidFill>
-                  <a:srgbClr val="334154"/>
-                </a:solidFill>
-                <a:latin typeface="Raleway" pitchFamily="2" charset="77"/>
-                <a:cs typeface="Times New Roman" panose="02020603050405020304"/>
-              </a:rPr>
-              <a:t> as the dominant market, contributing </a:t>
-            </a:r>
-            <a:r>
-              <a:rPr lang="en-US" altLang="en-US" sz="1000" b="1" spc="-10">
-                <a:solidFill>
-                  <a:srgbClr val="334154"/>
-                </a:solidFill>
-                <a:latin typeface="Raleway" pitchFamily="2" charset="77"/>
-                <a:cs typeface="Times New Roman" panose="02020603050405020304"/>
-              </a:rPr>
-              <a:t>16,817 users (86.98% of total traffic) with a 17.12% engagement rate and 0.26 engaged sessions per user</a:t>
-            </a:r>
-            <a:r>
-              <a:rPr lang="en-US" altLang="en-US" sz="1000" spc="-10">
-                <a:solidFill>
-                  <a:srgbClr val="334154"/>
-                </a:solidFill>
-                <a:latin typeface="Raleway" pitchFamily="2" charset="77"/>
-                <a:cs typeface="Times New Roman" panose="02020603050405020304"/>
-              </a:rPr>
-              <a:t>, delivering strong volume alongside moderate interaction levels.</a:t>
-            </a:r>
-            <a:endParaRPr lang="en-US" altLang="en-US" sz="1000" spc="-10">
-              <a:solidFill>
-                <a:srgbClr val="334154"/>
-              </a:solidFill>
-              <a:latin typeface="Raleway" pitchFamily="2" charset="77"/>
-              <a:cs typeface="Times New Roman" panose="02020603050405020304"/>
-            </a:endParaRPr>
-          </a:p>
-          <a:p>
-            <a:endParaRPr lang="en-US" altLang="en-US" sz="1000" spc="-10">
-              <a:solidFill>
-                <a:srgbClr val="334154"/>
-              </a:solidFill>
-              <a:latin typeface="Raleway" pitchFamily="2" charset="77"/>
-              <a:cs typeface="Times New Roman" panose="02020603050405020304"/>
-            </a:endParaRPr>
-          </a:p>
-          <a:p>
-            <a:r>
-              <a:rPr lang="en-US" altLang="en-US" sz="1000" spc="-10">
-                <a:solidFill>
-                  <a:srgbClr val="334154"/>
-                </a:solidFill>
-                <a:latin typeface="Raleway" pitchFamily="2" charset="77"/>
-                <a:cs typeface="Times New Roman" panose="02020603050405020304"/>
-              </a:rPr>
-              <a:t>The</a:t>
-            </a:r>
-            <a:r>
-              <a:rPr lang="en-US" altLang="en-US" sz="1000" b="1" spc="-10">
-                <a:solidFill>
-                  <a:srgbClr val="334154"/>
-                </a:solidFill>
-                <a:latin typeface="Raleway" pitchFamily="2" charset="77"/>
-                <a:cs typeface="Times New Roman" panose="02020603050405020304"/>
-              </a:rPr>
-              <a:t> United States (992 users)</a:t>
-            </a:r>
-            <a:r>
-              <a:rPr lang="en-US" altLang="en-US" sz="1000" spc="-10">
-                <a:solidFill>
-                  <a:srgbClr val="334154"/>
-                </a:solidFill>
-                <a:latin typeface="Raleway" pitchFamily="2" charset="77"/>
-                <a:cs typeface="Times New Roman" panose="02020603050405020304"/>
-              </a:rPr>
-              <a:t> ranks as the second largest traffic source; however, its </a:t>
-            </a:r>
-            <a:r>
-              <a:rPr lang="en-US" altLang="en-US" sz="1000" b="1" spc="-10">
-                <a:solidFill>
-                  <a:srgbClr val="334154"/>
-                </a:solidFill>
-                <a:latin typeface="Raleway" pitchFamily="2" charset="77"/>
-                <a:cs typeface="Times New Roman" panose="02020603050405020304"/>
-              </a:rPr>
-              <a:t>9.91% engagement rate </a:t>
-            </a:r>
-            <a:r>
-              <a:rPr lang="en-US" altLang="en-US" sz="1000" spc="-10">
-                <a:solidFill>
-                  <a:srgbClr val="334154"/>
-                </a:solidFill>
-                <a:latin typeface="Raleway" pitchFamily="2" charset="77"/>
-                <a:cs typeface="Times New Roman" panose="02020603050405020304"/>
-              </a:rPr>
-              <a:t>indicates relatively low interaction compared to Zimbabwe.</a:t>
-            </a:r>
-            <a:endParaRPr lang="en-US" altLang="en-US" sz="1000" spc="-10">
-              <a:solidFill>
-                <a:srgbClr val="334154"/>
-              </a:solidFill>
-              <a:latin typeface="Raleway" pitchFamily="2" charset="77"/>
-              <a:cs typeface="Times New Roman" panose="02020603050405020304"/>
-            </a:endParaRPr>
-          </a:p>
-          <a:p>
-            <a:endParaRPr lang="en-US" altLang="en-US" sz="1000" spc="-10">
-              <a:solidFill>
-                <a:srgbClr val="334154"/>
-              </a:solidFill>
-              <a:latin typeface="Raleway" pitchFamily="2" charset="77"/>
-              <a:cs typeface="Times New Roman" panose="02020603050405020304"/>
-            </a:endParaRPr>
-          </a:p>
-          <a:p>
-            <a:r>
-              <a:rPr lang="en-US" altLang="en-US" sz="1000" b="1" spc="-10">
-                <a:solidFill>
-                  <a:srgbClr val="334154"/>
-                </a:solidFill>
-                <a:latin typeface="Raleway" pitchFamily="2" charset="77"/>
-                <a:cs typeface="Times New Roman" panose="02020603050405020304"/>
-              </a:rPr>
-              <a:t>South Africa (411 users)</a:t>
-            </a:r>
-            <a:r>
-              <a:rPr lang="en-US" altLang="en-US" sz="1000" spc="-10">
-                <a:solidFill>
-                  <a:srgbClr val="334154"/>
-                </a:solidFill>
-                <a:latin typeface="Raleway" pitchFamily="2" charset="77"/>
-                <a:cs typeface="Times New Roman" panose="02020603050405020304"/>
-              </a:rPr>
-              <a:t> appears as the third largest market by volume, recording a </a:t>
-            </a:r>
-            <a:r>
-              <a:rPr lang="en-US" altLang="en-US" sz="1000" b="1" spc="-10">
-                <a:solidFill>
-                  <a:srgbClr val="334154"/>
-                </a:solidFill>
-                <a:latin typeface="Raleway" pitchFamily="2" charset="77"/>
-                <a:cs typeface="Times New Roman" panose="02020603050405020304"/>
-              </a:rPr>
-              <a:t>22.8% engagement rate</a:t>
-            </a:r>
-            <a:r>
-              <a:rPr lang="en-US" altLang="en-US" sz="1000" spc="-10">
-                <a:solidFill>
-                  <a:srgbClr val="334154"/>
-                </a:solidFill>
-                <a:latin typeface="Raleway" pitchFamily="2" charset="77"/>
-                <a:cs typeface="Times New Roman" panose="02020603050405020304"/>
-              </a:rPr>
-              <a:t>, suggesting stronger interaction quality compared to other high volume markets.</a:t>
-            </a:r>
-            <a:endParaRPr lang="en-US" altLang="en-US" sz="1000" spc="-10">
-              <a:solidFill>
-                <a:srgbClr val="334154"/>
-              </a:solidFill>
-              <a:latin typeface="Raleway" pitchFamily="2" charset="77"/>
-              <a:cs typeface="Times New Roman" panose="02020603050405020304"/>
-            </a:endParaRPr>
-          </a:p>
-          <a:p>
-            <a:endParaRPr lang="en-US" altLang="en-US" sz="1000" spc="-10">
-              <a:solidFill>
-                <a:srgbClr val="334154"/>
-              </a:solidFill>
-              <a:latin typeface="Raleway" pitchFamily="2" charset="77"/>
-              <a:cs typeface="Times New Roman" panose="02020603050405020304"/>
-            </a:endParaRPr>
-          </a:p>
-          <a:p>
-            <a:r>
-              <a:rPr lang="en-US" altLang="en-US" sz="1000" spc="-10">
-                <a:solidFill>
-                  <a:srgbClr val="334154"/>
-                </a:solidFill>
-                <a:latin typeface="Raleway" pitchFamily="2" charset="77"/>
-                <a:cs typeface="Times New Roman" panose="02020603050405020304"/>
-              </a:rPr>
-              <a:t>Notably, smaller markets such as the </a:t>
-            </a:r>
-            <a:r>
-              <a:rPr lang="en-US" altLang="en-US" sz="1000" b="1" spc="-10">
-                <a:solidFill>
-                  <a:srgbClr val="334154"/>
-                </a:solidFill>
-                <a:latin typeface="Raleway" pitchFamily="2" charset="77"/>
-                <a:cs typeface="Times New Roman" panose="02020603050405020304"/>
-              </a:rPr>
-              <a:t>United Kingdom (34.22%), Ireland (36%), Canada (28.26%), and the Netherlands (24.37%)</a:t>
-            </a:r>
-            <a:r>
-              <a:rPr lang="en-US" altLang="en-US" sz="1000" spc="-10">
-                <a:solidFill>
-                  <a:srgbClr val="334154"/>
-                </a:solidFill>
-                <a:latin typeface="Raleway" pitchFamily="2" charset="77"/>
-                <a:cs typeface="Times New Roman" panose="02020603050405020304"/>
-              </a:rPr>
-              <a:t> demonstrate stronger engagement efficiency, indicating higher intent audiences despite lower traffic volumes. In contrast, markets like</a:t>
-            </a:r>
-            <a:r>
-              <a:rPr lang="en-US" altLang="en-US" sz="1000" b="1" spc="-10">
-                <a:solidFill>
-                  <a:srgbClr val="334154"/>
-                </a:solidFill>
-                <a:latin typeface="Raleway" pitchFamily="2" charset="77"/>
-                <a:cs typeface="Times New Roman" panose="02020603050405020304"/>
-              </a:rPr>
-              <a:t> India (13.46%) and Hong Kong (14.29%) </a:t>
-            </a:r>
-            <a:r>
-              <a:rPr lang="en-US" altLang="en-US" sz="1000" spc="-10">
-                <a:solidFill>
-                  <a:srgbClr val="334154"/>
-                </a:solidFill>
-                <a:latin typeface="Raleway" pitchFamily="2" charset="77"/>
-                <a:cs typeface="Times New Roman" panose="02020603050405020304"/>
-              </a:rPr>
-              <a:t>reflect lower engagement levels, suggesting weaker interaction quality.</a:t>
-            </a:r>
-            <a:endParaRPr lang="en-US" altLang="en-US" sz="1000" spc="-10">
-              <a:solidFill>
-                <a:srgbClr val="334154"/>
-              </a:solidFill>
-              <a:latin typeface="Raleway" pitchFamily="2" charset="77"/>
-              <a:cs typeface="Times New Roman" panose="02020603050405020304"/>
-            </a:endParaRPr>
-          </a:p>
-          <a:p>
-            <a:endParaRPr lang="en-US" altLang="en-US" sz="1000" spc="-10">
-              <a:solidFill>
-                <a:srgbClr val="334154"/>
-              </a:solidFill>
-              <a:latin typeface="Raleway" pitchFamily="2" charset="77"/>
-              <a:cs typeface="Times New Roman" panose="02020603050405020304"/>
-            </a:endParaRPr>
-          </a:p>
-          <a:p>
-            <a:r>
-              <a:rPr lang="en-US" altLang="en-US" sz="1000" spc="-10">
-                <a:solidFill>
-                  <a:srgbClr val="334154"/>
-                </a:solidFill>
-                <a:latin typeface="Raleway" pitchFamily="2" charset="77"/>
-                <a:cs typeface="Times New Roman" panose="02020603050405020304"/>
-              </a:rPr>
-              <a:t>Overall, Zimbabwe drives the majority of traffic, while select international markets such as the United Kingdom and Ireland show stronger engagement depth, highlighting opportunities to grow high intent audiences alongside overall volume.</a:t>
-            </a:r>
-            <a:endParaRPr lang="en-US" altLang="en-US" sz="1000" spc="-10">
-              <a:solidFill>
-                <a:srgbClr val="334154"/>
-              </a:solidFill>
-              <a:latin typeface="Raleway" pitchFamily="2" charset="77"/>
-              <a:cs typeface="Times New Roman" panose="02020603050405020304"/>
-            </a:endParaRPr>
-          </a:p>
-        </p:txBody>
-      </p:sp>
-      <p:grpSp>
-        <p:nvGrpSpPr>
-          <p:cNvPr id="7" name="object 7"/>
-          <p:cNvGrpSpPr/>
-          <p:nvPr/>
-        </p:nvGrpSpPr>
-        <p:grpSpPr>
-          <a:xfrm>
-            <a:off x="4206550" y="1061384"/>
-            <a:ext cx="4552546" cy="3760704"/>
-            <a:chOff x="4402835" y="985184"/>
-            <a:chExt cx="4552546" cy="3760704"/>
-          </a:xfrm>
-        </p:grpSpPr>
-        <p:sp>
-          <p:nvSpPr>
-            <p:cNvPr id="8" name="object 8"/>
-            <p:cNvSpPr/>
-            <p:nvPr/>
-          </p:nvSpPr>
-          <p:spPr>
-            <a:xfrm>
-              <a:off x="4410686" y="985184"/>
-              <a:ext cx="4544695" cy="3752850"/>
-            </a:xfrm>
-            <a:custGeom>
-              <a:avLst/>
-              <a:gdLst/>
-              <a:ahLst/>
-              <a:cxnLst/>
-              <a:rect l="l" t="t" r="r" b="b"/>
-              <a:pathLst>
-                <a:path w="4544695" h="3752850">
-                  <a:moveTo>
-                    <a:pt x="4544568" y="0"/>
-                  </a:moveTo>
-                  <a:lnTo>
-                    <a:pt x="0" y="0"/>
-                  </a:lnTo>
-                  <a:lnTo>
-                    <a:pt x="0" y="3752342"/>
-                  </a:lnTo>
-                  <a:lnTo>
-                    <a:pt x="4544568" y="3752342"/>
-                  </a:lnTo>
-                  <a:lnTo>
-                    <a:pt x="4544568" y="0"/>
-                  </a:lnTo>
-                  <a:close/>
-                </a:path>
-              </a:pathLst>
-            </a:custGeom>
-            <a:solidFill>
-              <a:srgbClr val="F0F5F8"/>
-            </a:solidFill>
-          </p:spPr>
-          <p:txBody>
-            <a:bodyPr wrap="square" lIns="0" tIns="0" rIns="0" bIns="0" rtlCol="0"/>
-            <a:lstStyle/>
-            <a:p>
-              <a:endParaRPr>
-                <a:latin typeface="Raleway" pitchFamily="2" charset="77"/>
-              </a:endParaRPr>
-            </a:p>
-          </p:txBody>
-        </p:sp>
-        <p:sp>
-          <p:nvSpPr>
-            <p:cNvPr id="9" name="object 9"/>
-            <p:cNvSpPr/>
-            <p:nvPr/>
-          </p:nvSpPr>
-          <p:spPr>
-            <a:xfrm>
-              <a:off x="4402835" y="993038"/>
-              <a:ext cx="4544695" cy="3752850"/>
-            </a:xfrm>
-            <a:custGeom>
-              <a:avLst/>
-              <a:gdLst/>
-              <a:ahLst/>
-              <a:cxnLst/>
-              <a:rect l="l" t="t" r="r" b="b"/>
-              <a:pathLst>
-                <a:path w="4544695" h="3752850">
-                  <a:moveTo>
-                    <a:pt x="0" y="3752342"/>
-                  </a:moveTo>
-                  <a:lnTo>
-                    <a:pt x="4544568" y="3752342"/>
-                  </a:lnTo>
-                  <a:lnTo>
-                    <a:pt x="4544568" y="0"/>
-                  </a:lnTo>
-                  <a:lnTo>
-                    <a:pt x="0" y="0"/>
-                  </a:lnTo>
-                  <a:lnTo>
-                    <a:pt x="0" y="3752342"/>
-                  </a:lnTo>
-                  <a:close/>
-                </a:path>
-              </a:pathLst>
-            </a:custGeom>
-            <a:ln w="9152">
-              <a:solidFill>
-                <a:srgbClr val="E1E8EF"/>
-              </a:solidFill>
-            </a:ln>
-          </p:spPr>
-          <p:txBody>
-            <a:bodyPr wrap="square" lIns="0" tIns="0" rIns="0" bIns="0" rtlCol="0"/>
-            <a:lstStyle/>
-            <a:p>
-              <a:endParaRPr>
-                <a:latin typeface="Raleway" pitchFamily="2" charset="77"/>
-              </a:endParaRPr>
-            </a:p>
-          </p:txBody>
-        </p:sp>
-      </p:grpSp>
-      <p:pic>
-        <p:nvPicPr>
-          <p:cNvPr id="10" name="Picture 9" descr="Screenshot 2026-03-30 at 12.46.34"/>
-          <p:cNvPicPr>
-            <a:picLocks noChangeAspect="1"/>
-          </p:cNvPicPr>
-          <p:nvPr/>
-        </p:nvPicPr>
-        <p:blipFill>
-          <a:blip r:embed="rId1"/>
-          <a:stretch>
-            <a:fillRect/>
-          </a:stretch>
-        </p:blipFill>
-        <p:spPr>
-          <a:xfrm>
-            <a:off x="4329430" y="1736725"/>
-            <a:ext cx="4298950" cy="2571115"/>
           </a:xfrm>
           <a:prstGeom prst="rect">
             <a:avLst/>
@@ -5140,6 +5854,842 @@
           </p:nvPr>
         </p:nvSpPr>
         <p:spPr>
+          <a:prstGeom prst="rect">
+            <a:avLst/>
+          </a:prstGeom>
+        </p:spPr>
+        <p:txBody>
+          <a:bodyPr vert="horz" wrap="square" lIns="0" tIns="70485" rIns="0" bIns="0" rtlCol="0" anchor="t">
+            <a:spAutoFit/>
+          </a:bodyPr>
+          <a:lstStyle/>
+          <a:p>
+            <a:pPr marL="26670">
+              <a:lnSpc>
+                <a:spcPct val="100000"/>
+              </a:lnSpc>
+              <a:spcBef>
+                <a:spcPts val="555"/>
+              </a:spcBef>
+            </a:pPr>
+            <a:r>
+              <a:rPr spc="65">
+                <a:latin typeface="Raleway" pitchFamily="2" charset="77"/>
+                <a:cs typeface="Times New Roman" panose="02020603050405020304"/>
+              </a:rPr>
+              <a:t>Geographic</a:t>
+            </a:r>
+            <a:r>
+              <a:rPr spc="-50">
+                <a:latin typeface="Raleway" pitchFamily="2" charset="77"/>
+                <a:cs typeface="Times New Roman" panose="02020603050405020304"/>
+              </a:rPr>
+              <a:t> </a:t>
+            </a:r>
+            <a:r>
+              <a:rPr spc="-10">
+                <a:latin typeface="Raleway" pitchFamily="2" charset="77"/>
+                <a:cs typeface="Times New Roman" panose="02020603050405020304"/>
+              </a:rPr>
+              <a:t>Performance</a:t>
+            </a:r>
+            <a:endParaRPr lang="en-US" spc="-10">
+              <a:latin typeface="Raleway" pitchFamily="2" charset="77"/>
+              <a:cs typeface="Times New Roman" panose="02020603050405020304"/>
+            </a:endParaRPr>
+          </a:p>
+          <a:p>
+            <a:pPr marL="26670">
+              <a:lnSpc>
+                <a:spcPct val="100000"/>
+              </a:lnSpc>
+              <a:spcBef>
+                <a:spcPts val="285"/>
+              </a:spcBef>
+            </a:pPr>
+            <a:r>
+              <a:rPr sz="1300" b="0">
+                <a:solidFill>
+                  <a:srgbClr val="334154"/>
+                </a:solidFill>
+                <a:latin typeface="Raleway" pitchFamily="2" charset="77"/>
+                <a:cs typeface="Times New Roman" panose="02020603050405020304"/>
+              </a:rPr>
+              <a:t>Zimbabwe's Market Dominance and International Opportunities.</a:t>
+            </a:r>
+            <a:endParaRPr sz="1300" b="0">
+              <a:solidFill>
+                <a:srgbClr val="334154"/>
+              </a:solidFill>
+              <a:latin typeface="Raleway" pitchFamily="2" charset="77"/>
+              <a:cs typeface="Times New Roman" panose="02020603050405020304"/>
+            </a:endParaRPr>
+          </a:p>
+        </p:txBody>
+      </p:sp>
+      <p:grpSp>
+        <p:nvGrpSpPr>
+          <p:cNvPr id="3" name="object 3"/>
+          <p:cNvGrpSpPr/>
+          <p:nvPr/>
+        </p:nvGrpSpPr>
+        <p:grpSpPr>
+          <a:xfrm>
+            <a:off x="183515" y="984885"/>
+            <a:ext cx="3987165" cy="4080510"/>
+            <a:chOff x="228600" y="988466"/>
+            <a:chExt cx="3987165" cy="3752850"/>
+          </a:xfrm>
+        </p:grpSpPr>
+        <p:sp>
+          <p:nvSpPr>
+            <p:cNvPr id="4" name="object 4"/>
+            <p:cNvSpPr/>
+            <p:nvPr/>
+          </p:nvSpPr>
+          <p:spPr>
+            <a:xfrm>
+              <a:off x="228600" y="988466"/>
+              <a:ext cx="3987165" cy="3752850"/>
+            </a:xfrm>
+            <a:custGeom>
+              <a:avLst/>
+              <a:gdLst/>
+              <a:ahLst/>
+              <a:cxnLst/>
+              <a:rect l="l" t="t" r="r" b="b"/>
+              <a:pathLst>
+                <a:path w="3987165" h="3752850">
+                  <a:moveTo>
+                    <a:pt x="3986784" y="0"/>
+                  </a:moveTo>
+                  <a:lnTo>
+                    <a:pt x="0" y="0"/>
+                  </a:lnTo>
+                  <a:lnTo>
+                    <a:pt x="0" y="3752341"/>
+                  </a:lnTo>
+                  <a:lnTo>
+                    <a:pt x="3986784" y="3752341"/>
+                  </a:lnTo>
+                  <a:lnTo>
+                    <a:pt x="3986784" y="0"/>
+                  </a:lnTo>
+                  <a:close/>
+                </a:path>
+              </a:pathLst>
+            </a:custGeom>
+            <a:solidFill>
+              <a:srgbClr val="F8F9FB"/>
+            </a:solidFill>
+          </p:spPr>
+          <p:txBody>
+            <a:bodyPr wrap="square" lIns="0" tIns="0" rIns="0" bIns="0" rtlCol="0"/>
+            <a:lstStyle/>
+            <a:p>
+              <a:endParaRPr>
+                <a:latin typeface="Raleway" pitchFamily="2" charset="77"/>
+              </a:endParaRPr>
+            </a:p>
+          </p:txBody>
+        </p:sp>
+        <p:sp>
+          <p:nvSpPr>
+            <p:cNvPr id="5" name="object 5"/>
+            <p:cNvSpPr/>
+            <p:nvPr/>
+          </p:nvSpPr>
+          <p:spPr>
+            <a:xfrm>
+              <a:off x="228600" y="988466"/>
+              <a:ext cx="45720" cy="3752850"/>
+            </a:xfrm>
+            <a:custGeom>
+              <a:avLst/>
+              <a:gdLst/>
+              <a:ahLst/>
+              <a:cxnLst/>
+              <a:rect l="l" t="t" r="r" b="b"/>
+              <a:pathLst>
+                <a:path w="45720" h="3752850">
+                  <a:moveTo>
+                    <a:pt x="45720" y="0"/>
+                  </a:moveTo>
+                  <a:lnTo>
+                    <a:pt x="0" y="0"/>
+                  </a:lnTo>
+                  <a:lnTo>
+                    <a:pt x="0" y="3752341"/>
+                  </a:lnTo>
+                  <a:lnTo>
+                    <a:pt x="45720" y="3752341"/>
+                  </a:lnTo>
+                  <a:lnTo>
+                    <a:pt x="45720" y="0"/>
+                  </a:lnTo>
+                  <a:close/>
+                </a:path>
+              </a:pathLst>
+            </a:custGeom>
+            <a:solidFill>
+              <a:srgbClr val="1E3989"/>
+            </a:solidFill>
+          </p:spPr>
+          <p:txBody>
+            <a:bodyPr wrap="square" lIns="0" tIns="0" rIns="0" bIns="0" rtlCol="0"/>
+            <a:lstStyle/>
+            <a:p>
+              <a:endParaRPr>
+                <a:latin typeface="Raleway" pitchFamily="2" charset="77"/>
+              </a:endParaRPr>
+            </a:p>
+          </p:txBody>
+        </p:sp>
+      </p:grpSp>
+      <p:sp>
+        <p:nvSpPr>
+          <p:cNvPr id="6" name="object 6"/>
+          <p:cNvSpPr txBox="1"/>
+          <p:nvPr/>
+        </p:nvSpPr>
+        <p:spPr>
+          <a:xfrm>
+            <a:off x="304800" y="974725"/>
+            <a:ext cx="3888105" cy="4166235"/>
+          </a:xfrm>
+          <a:prstGeom prst="rect">
+            <a:avLst/>
+          </a:prstGeom>
+        </p:spPr>
+        <p:txBody>
+          <a:bodyPr vert="horz" wrap="square" lIns="0" tIns="11430" rIns="0" bIns="0" rtlCol="0" anchor="t">
+            <a:spAutoFit/>
+          </a:bodyPr>
+          <a:lstStyle/>
+          <a:p>
+            <a:r>
+              <a:rPr lang="en-US" altLang="en-US" sz="1000" spc="-10">
+                <a:solidFill>
+                  <a:srgbClr val="334154"/>
+                </a:solidFill>
+                <a:latin typeface="Raleway" pitchFamily="2" charset="77"/>
+                <a:cs typeface="Times New Roman" panose="02020603050405020304"/>
+              </a:rPr>
+              <a:t>Geographic performance indicates </a:t>
+            </a:r>
+            <a:r>
+              <a:rPr lang="en-US" altLang="en-US" sz="1000" b="1" spc="-10">
+                <a:solidFill>
+                  <a:srgbClr val="334154"/>
+                </a:solidFill>
+                <a:latin typeface="Raleway" pitchFamily="2" charset="77"/>
+                <a:cs typeface="Times New Roman" panose="02020603050405020304"/>
+              </a:rPr>
+              <a:t>Zimbabwe</a:t>
+            </a:r>
+            <a:r>
+              <a:rPr lang="en-US" altLang="en-US" sz="1000" spc="-10">
+                <a:solidFill>
+                  <a:srgbClr val="334154"/>
+                </a:solidFill>
+                <a:latin typeface="Raleway" pitchFamily="2" charset="77"/>
+                <a:cs typeface="Times New Roman" panose="02020603050405020304"/>
+              </a:rPr>
+              <a:t> is the dominant market, contributing </a:t>
+            </a:r>
+            <a:r>
+              <a:rPr lang="en-US" altLang="en-US" sz="1000" b="1" spc="-10">
+                <a:solidFill>
+                  <a:srgbClr val="334154"/>
+                </a:solidFill>
+                <a:latin typeface="Raleway" pitchFamily="2" charset="77"/>
+                <a:cs typeface="Times New Roman" panose="02020603050405020304"/>
+              </a:rPr>
+              <a:t>2,878</a:t>
+            </a:r>
+            <a:r>
+              <a:rPr lang="en-US" altLang="en-US" sz="1000" spc="-10">
+                <a:solidFill>
+                  <a:srgbClr val="334154"/>
+                </a:solidFill>
+                <a:latin typeface="Raleway" pitchFamily="2" charset="77"/>
+                <a:cs typeface="Times New Roman" panose="02020603050405020304"/>
+              </a:rPr>
+              <a:t> users (</a:t>
+            </a:r>
+            <a:r>
+              <a:rPr lang="en-US" altLang="en-US" sz="1000" b="1" spc="-10">
+                <a:solidFill>
+                  <a:srgbClr val="334154"/>
+                </a:solidFill>
+                <a:latin typeface="Raleway" pitchFamily="2" charset="77"/>
+                <a:cs typeface="Times New Roman" panose="02020603050405020304"/>
+              </a:rPr>
+              <a:t>80.32%</a:t>
+            </a:r>
+            <a:r>
+              <a:rPr lang="en-US" altLang="en-US" sz="1000" spc="-10">
+                <a:solidFill>
+                  <a:srgbClr val="334154"/>
+                </a:solidFill>
+                <a:latin typeface="Raleway" pitchFamily="2" charset="77"/>
+                <a:cs typeface="Times New Roman" panose="02020603050405020304"/>
+              </a:rPr>
+              <a:t> of total traffic) with a </a:t>
+            </a:r>
+            <a:r>
+              <a:rPr lang="en-US" altLang="en-US" sz="1000" b="1" spc="-10">
+                <a:solidFill>
+                  <a:srgbClr val="334154"/>
+                </a:solidFill>
+                <a:latin typeface="Raleway" pitchFamily="2" charset="77"/>
+                <a:cs typeface="Times New Roman" panose="02020603050405020304"/>
+              </a:rPr>
+              <a:t>29.49%</a:t>
+            </a:r>
+            <a:r>
+              <a:rPr lang="en-US" altLang="en-US" sz="1000" spc="-10">
+                <a:solidFill>
+                  <a:srgbClr val="334154"/>
+                </a:solidFill>
+                <a:latin typeface="Raleway" pitchFamily="2" charset="77"/>
+                <a:cs typeface="Times New Roman" panose="02020603050405020304"/>
+              </a:rPr>
+              <a:t> engagement rate and </a:t>
+            </a:r>
+            <a:r>
+              <a:rPr lang="en-US" altLang="en-US" sz="1000" b="1" spc="-10">
+                <a:solidFill>
+                  <a:srgbClr val="334154"/>
+                </a:solidFill>
+                <a:latin typeface="Raleway" pitchFamily="2" charset="77"/>
+                <a:cs typeface="Times New Roman" panose="02020603050405020304"/>
+              </a:rPr>
+              <a:t>0.34</a:t>
+            </a:r>
+            <a:r>
+              <a:rPr lang="en-US" altLang="en-US" sz="1000" spc="-10">
+                <a:solidFill>
+                  <a:srgbClr val="334154"/>
+                </a:solidFill>
+                <a:latin typeface="Raleway" pitchFamily="2" charset="77"/>
+                <a:cs typeface="Times New Roman" panose="02020603050405020304"/>
+              </a:rPr>
+              <a:t> engaged sessions per user, demonstrating strong volume and steady interaction.</a:t>
+            </a:r>
+            <a:endParaRPr lang="en-US" altLang="en-US" sz="1000" spc="-10">
+              <a:solidFill>
+                <a:srgbClr val="334154"/>
+              </a:solidFill>
+              <a:latin typeface="Raleway" pitchFamily="2" charset="77"/>
+              <a:cs typeface="Times New Roman" panose="02020603050405020304"/>
+            </a:endParaRPr>
+          </a:p>
+          <a:p>
+            <a:endParaRPr lang="en-US" altLang="en-US" sz="1000" spc="-10">
+              <a:solidFill>
+                <a:srgbClr val="334154"/>
+              </a:solidFill>
+              <a:latin typeface="Raleway" pitchFamily="2" charset="77"/>
+              <a:cs typeface="Times New Roman" panose="02020603050405020304"/>
+            </a:endParaRPr>
+          </a:p>
+          <a:p>
+            <a:r>
+              <a:rPr lang="en-US" altLang="en-US" sz="1000" spc="-10">
+                <a:solidFill>
+                  <a:srgbClr val="334154"/>
+                </a:solidFill>
+                <a:latin typeface="Raleway" pitchFamily="2" charset="77"/>
+                <a:cs typeface="Times New Roman" panose="02020603050405020304"/>
+              </a:rPr>
+              <a:t>The </a:t>
+            </a:r>
+            <a:r>
+              <a:rPr lang="en-US" altLang="en-US" sz="1000" b="1" spc="-10">
+                <a:solidFill>
+                  <a:srgbClr val="334154"/>
+                </a:solidFill>
+                <a:latin typeface="Raleway" pitchFamily="2" charset="77"/>
+                <a:cs typeface="Times New Roman" panose="02020603050405020304"/>
+              </a:rPr>
+              <a:t>United States</a:t>
+            </a:r>
+            <a:r>
+              <a:rPr lang="en-US" altLang="en-US" sz="1000" spc="-10">
+                <a:solidFill>
+                  <a:srgbClr val="334154"/>
+                </a:solidFill>
+                <a:latin typeface="Raleway" pitchFamily="2" charset="77"/>
+                <a:cs typeface="Times New Roman" panose="02020603050405020304"/>
+              </a:rPr>
+              <a:t> (</a:t>
+            </a:r>
+            <a:r>
+              <a:rPr lang="en-US" altLang="en-US" sz="1000" b="1" spc="-10">
+                <a:solidFill>
+                  <a:srgbClr val="334154"/>
+                </a:solidFill>
+                <a:latin typeface="Raleway" pitchFamily="2" charset="77"/>
+                <a:cs typeface="Times New Roman" panose="02020603050405020304"/>
+              </a:rPr>
+              <a:t>486</a:t>
+            </a:r>
+            <a:r>
+              <a:rPr lang="en-US" altLang="en-US" sz="1000" spc="-10">
+                <a:solidFill>
+                  <a:srgbClr val="334154"/>
+                </a:solidFill>
+                <a:latin typeface="Raleway" pitchFamily="2" charset="77"/>
+                <a:cs typeface="Times New Roman" panose="02020603050405020304"/>
+              </a:rPr>
+              <a:t> users) records a </a:t>
+            </a:r>
+            <a:r>
+              <a:rPr lang="en-US" altLang="en-US" sz="1000" b="1" spc="-10">
+                <a:solidFill>
+                  <a:srgbClr val="334154"/>
+                </a:solidFill>
+                <a:latin typeface="Raleway" pitchFamily="2" charset="77"/>
+                <a:cs typeface="Times New Roman" panose="02020603050405020304"/>
+              </a:rPr>
+              <a:t>48.58%</a:t>
+            </a:r>
+            <a:r>
+              <a:rPr lang="en-US" altLang="en-US" sz="1000" spc="-10">
+                <a:solidFill>
+                  <a:srgbClr val="334154"/>
+                </a:solidFill>
+                <a:latin typeface="Raleway" pitchFamily="2" charset="77"/>
+                <a:cs typeface="Times New Roman" panose="02020603050405020304"/>
+              </a:rPr>
+              <a:t> engagement rate, while </a:t>
+            </a:r>
+            <a:r>
+              <a:rPr lang="en-US" altLang="en-US" sz="1000" b="1" spc="-10">
+                <a:solidFill>
+                  <a:srgbClr val="334154"/>
+                </a:solidFill>
+                <a:latin typeface="Raleway" pitchFamily="2" charset="77"/>
+                <a:cs typeface="Times New Roman" panose="02020603050405020304"/>
+              </a:rPr>
+              <a:t>South Africa</a:t>
+            </a:r>
+            <a:r>
+              <a:rPr lang="en-US" altLang="en-US" sz="1000" spc="-10">
+                <a:solidFill>
+                  <a:srgbClr val="334154"/>
+                </a:solidFill>
+                <a:latin typeface="Raleway" pitchFamily="2" charset="77"/>
+                <a:cs typeface="Times New Roman" panose="02020603050405020304"/>
+              </a:rPr>
+              <a:t> (</a:t>
+            </a:r>
+            <a:r>
+              <a:rPr lang="en-US" altLang="en-US" sz="1000" b="1" spc="-10">
+                <a:solidFill>
+                  <a:srgbClr val="334154"/>
+                </a:solidFill>
+                <a:latin typeface="Raleway" pitchFamily="2" charset="77"/>
+                <a:cs typeface="Times New Roman" panose="02020603050405020304"/>
+              </a:rPr>
+              <a:t>62</a:t>
+            </a:r>
+            <a:r>
+              <a:rPr lang="en-US" altLang="en-US" sz="1000" spc="-10">
+                <a:solidFill>
+                  <a:srgbClr val="334154"/>
+                </a:solidFill>
+                <a:latin typeface="Raleway" pitchFamily="2" charset="77"/>
+                <a:cs typeface="Times New Roman" panose="02020603050405020304"/>
+              </a:rPr>
+              <a:t> users) records a </a:t>
+            </a:r>
+            <a:r>
+              <a:rPr lang="en-US" altLang="en-US" sz="1000" b="1" spc="-10">
+                <a:solidFill>
+                  <a:srgbClr val="334154"/>
+                </a:solidFill>
+                <a:latin typeface="Raleway" pitchFamily="2" charset="77"/>
+                <a:cs typeface="Times New Roman" panose="02020603050405020304"/>
+              </a:rPr>
+              <a:t>28.09%</a:t>
+            </a:r>
+            <a:r>
+              <a:rPr lang="en-US" altLang="en-US" sz="1000" spc="-10">
+                <a:solidFill>
+                  <a:srgbClr val="334154"/>
+                </a:solidFill>
+                <a:latin typeface="Raleway" pitchFamily="2" charset="77"/>
+                <a:cs typeface="Times New Roman" panose="02020603050405020304"/>
+              </a:rPr>
+              <a:t> engagement rate, suggesting superior visit quality despite lower traffic volumes.</a:t>
+            </a:r>
+            <a:endParaRPr lang="en-US" altLang="en-US" sz="1000" spc="-10">
+              <a:solidFill>
+                <a:srgbClr val="334154"/>
+              </a:solidFill>
+              <a:latin typeface="Raleway" pitchFamily="2" charset="77"/>
+              <a:cs typeface="Times New Roman" panose="02020603050405020304"/>
+            </a:endParaRPr>
+          </a:p>
+          <a:p>
+            <a:endParaRPr lang="en-US" altLang="en-US" sz="1000" spc="-10">
+              <a:solidFill>
+                <a:srgbClr val="334154"/>
+              </a:solidFill>
+              <a:latin typeface="Raleway" pitchFamily="2" charset="77"/>
+              <a:cs typeface="Times New Roman" panose="02020603050405020304"/>
+            </a:endParaRPr>
+          </a:p>
+          <a:p>
+            <a:r>
+              <a:rPr lang="en-US" altLang="en-US" sz="1000" spc="-10">
+                <a:solidFill>
+                  <a:srgbClr val="334154"/>
+                </a:solidFill>
+                <a:latin typeface="Raleway" pitchFamily="2" charset="77"/>
+                <a:cs typeface="Times New Roman" panose="02020603050405020304"/>
+              </a:rPr>
+              <a:t>Smaller markets, notably </a:t>
+            </a:r>
+            <a:r>
+              <a:rPr lang="en-US" altLang="en-US" sz="1000" b="1" spc="-10">
+                <a:solidFill>
+                  <a:srgbClr val="334154"/>
+                </a:solidFill>
+                <a:latin typeface="Raleway" pitchFamily="2" charset="77"/>
+                <a:cs typeface="Times New Roman" panose="02020603050405020304"/>
+              </a:rPr>
+              <a:t>Netherlands</a:t>
+            </a:r>
+            <a:r>
+              <a:rPr lang="en-US" altLang="en-US" sz="1000" spc="-10">
+                <a:solidFill>
+                  <a:srgbClr val="334154"/>
+                </a:solidFill>
+                <a:latin typeface="Raleway" pitchFamily="2" charset="77"/>
+                <a:cs typeface="Times New Roman" panose="02020603050405020304"/>
+              </a:rPr>
+              <a:t> (</a:t>
+            </a:r>
+            <a:r>
+              <a:rPr lang="en-US" altLang="en-US" sz="1000" b="1" spc="-10">
+                <a:solidFill>
+                  <a:srgbClr val="334154"/>
+                </a:solidFill>
+                <a:latin typeface="Raleway" pitchFamily="2" charset="77"/>
+                <a:cs typeface="Times New Roman" panose="02020603050405020304"/>
+              </a:rPr>
+              <a:t>70.97%</a:t>
+            </a:r>
+            <a:r>
+              <a:rPr lang="en-US" altLang="en-US" sz="1000" spc="-10">
+                <a:solidFill>
+                  <a:srgbClr val="334154"/>
+                </a:solidFill>
+                <a:latin typeface="Raleway" pitchFamily="2" charset="77"/>
+                <a:cs typeface="Times New Roman" panose="02020603050405020304"/>
+              </a:rPr>
+              <a:t>) and </a:t>
+            </a:r>
+            <a:r>
+              <a:rPr lang="en-US" altLang="en-US" sz="1000" b="1" spc="-10">
+                <a:solidFill>
+                  <a:srgbClr val="334154"/>
+                </a:solidFill>
+                <a:latin typeface="Raleway" pitchFamily="2" charset="77"/>
+                <a:cs typeface="Times New Roman" panose="02020603050405020304"/>
+              </a:rPr>
+              <a:t>Ireland</a:t>
+            </a:r>
+            <a:r>
+              <a:rPr lang="en-US" altLang="en-US" sz="1000" spc="-10">
+                <a:solidFill>
+                  <a:srgbClr val="334154"/>
+                </a:solidFill>
+                <a:latin typeface="Raleway" pitchFamily="2" charset="77"/>
+                <a:cs typeface="Times New Roman" panose="02020603050405020304"/>
+              </a:rPr>
+              <a:t> (</a:t>
+            </a:r>
+            <a:r>
+              <a:rPr lang="en-US" altLang="en-US" sz="1000" b="1" spc="-10">
+                <a:solidFill>
+                  <a:srgbClr val="334154"/>
+                </a:solidFill>
+                <a:latin typeface="Raleway" pitchFamily="2" charset="77"/>
+                <a:cs typeface="Times New Roman" panose="02020603050405020304"/>
+              </a:rPr>
+              <a:t>87.5%</a:t>
+            </a:r>
+            <a:r>
+              <a:rPr lang="en-US" altLang="en-US" sz="1000" spc="-10">
+                <a:solidFill>
+                  <a:srgbClr val="334154"/>
+                </a:solidFill>
+                <a:latin typeface="Raleway" pitchFamily="2" charset="77"/>
+                <a:cs typeface="Times New Roman" panose="02020603050405020304"/>
+              </a:rPr>
+              <a:t>), demonstrate superior engagement efficiency, suggesting high-intent audiences.</a:t>
+            </a:r>
+            <a:endParaRPr lang="en-US" altLang="en-US" sz="1000" spc="-10">
+              <a:solidFill>
+                <a:srgbClr val="334154"/>
+              </a:solidFill>
+              <a:latin typeface="Raleway" pitchFamily="2" charset="77"/>
+              <a:cs typeface="Times New Roman" panose="02020603050405020304"/>
+            </a:endParaRPr>
+          </a:p>
+          <a:p>
+            <a:endParaRPr lang="en-US" altLang="en-US" sz="1000" spc="-10">
+              <a:solidFill>
+                <a:srgbClr val="334154"/>
+              </a:solidFill>
+              <a:latin typeface="Raleway" pitchFamily="2" charset="77"/>
+              <a:cs typeface="Times New Roman" panose="02020603050405020304"/>
+            </a:endParaRPr>
+          </a:p>
+          <a:p>
+            <a:r>
+              <a:rPr lang="en-US" altLang="en-US" sz="1000" spc="-10">
+                <a:solidFill>
+                  <a:srgbClr val="334154"/>
+                </a:solidFill>
+                <a:latin typeface="Raleway" pitchFamily="2" charset="77"/>
+                <a:cs typeface="Times New Roman" panose="02020603050405020304"/>
+              </a:rPr>
+              <a:t>Overall, </a:t>
+            </a:r>
+            <a:r>
+              <a:rPr lang="en-US" altLang="en-US" sz="1000" b="1" spc="-10">
+                <a:solidFill>
+                  <a:srgbClr val="334154"/>
+                </a:solidFill>
+                <a:latin typeface="Raleway" pitchFamily="2" charset="77"/>
+                <a:cs typeface="Times New Roman" panose="02020603050405020304"/>
+              </a:rPr>
+              <a:t>Zimbabwe</a:t>
+            </a:r>
+            <a:r>
+              <a:rPr lang="en-US" altLang="en-US" sz="1000" spc="-10">
+                <a:solidFill>
+                  <a:srgbClr val="334154"/>
+                </a:solidFill>
+                <a:latin typeface="Raleway" pitchFamily="2" charset="77"/>
+                <a:cs typeface="Times New Roman" panose="02020603050405020304"/>
+              </a:rPr>
+              <a:t> generates scale, while select international markets exhibit robust engagement depth and potential conversion value.</a:t>
+            </a:r>
+            <a:endParaRPr lang="en-US" altLang="en-US" sz="1000" spc="-10">
+              <a:solidFill>
+                <a:srgbClr val="334154"/>
+              </a:solidFill>
+              <a:latin typeface="Raleway" pitchFamily="2" charset="77"/>
+              <a:cs typeface="Times New Roman" panose="02020603050405020304"/>
+            </a:endParaRPr>
+          </a:p>
+          <a:p>
+            <a:endParaRPr lang="en-US" altLang="en-US" sz="1000" spc="-10">
+              <a:solidFill>
+                <a:srgbClr val="334154"/>
+              </a:solidFill>
+              <a:latin typeface="Raleway" pitchFamily="2" charset="77"/>
+              <a:cs typeface="Times New Roman" panose="02020603050405020304"/>
+            </a:endParaRPr>
+          </a:p>
+          <a:p>
+            <a:endParaRPr lang="en-US" altLang="en-US" sz="1000" spc="-10">
+              <a:solidFill>
+                <a:srgbClr val="334154"/>
+              </a:solidFill>
+              <a:latin typeface="Raleway" pitchFamily="2" charset="77"/>
+              <a:cs typeface="Times New Roman" panose="02020603050405020304"/>
+            </a:endParaRPr>
+          </a:p>
+        </p:txBody>
+      </p:sp>
+      <p:grpSp>
+        <p:nvGrpSpPr>
+          <p:cNvPr id="7" name="object 7"/>
+          <p:cNvGrpSpPr/>
+          <p:nvPr/>
+        </p:nvGrpSpPr>
+        <p:grpSpPr>
+          <a:xfrm>
+            <a:off x="4206550" y="1061384"/>
+            <a:ext cx="4552546" cy="3760704"/>
+            <a:chOff x="4402835" y="985184"/>
+            <a:chExt cx="4552546" cy="3760704"/>
+          </a:xfrm>
+        </p:grpSpPr>
+        <p:sp>
+          <p:nvSpPr>
+            <p:cNvPr id="8" name="object 8"/>
+            <p:cNvSpPr/>
+            <p:nvPr/>
+          </p:nvSpPr>
+          <p:spPr>
+            <a:xfrm>
+              <a:off x="4410686" y="985184"/>
+              <a:ext cx="4544695" cy="3752850"/>
+            </a:xfrm>
+            <a:custGeom>
+              <a:avLst/>
+              <a:gdLst/>
+              <a:ahLst/>
+              <a:cxnLst/>
+              <a:rect l="l" t="t" r="r" b="b"/>
+              <a:pathLst>
+                <a:path w="4544695" h="3752850">
+                  <a:moveTo>
+                    <a:pt x="4544568" y="0"/>
+                  </a:moveTo>
+                  <a:lnTo>
+                    <a:pt x="0" y="0"/>
+                  </a:lnTo>
+                  <a:lnTo>
+                    <a:pt x="0" y="3752342"/>
+                  </a:lnTo>
+                  <a:lnTo>
+                    <a:pt x="4544568" y="3752342"/>
+                  </a:lnTo>
+                  <a:lnTo>
+                    <a:pt x="4544568" y="0"/>
+                  </a:lnTo>
+                  <a:close/>
+                </a:path>
+              </a:pathLst>
+            </a:custGeom>
+            <a:solidFill>
+              <a:srgbClr val="F0F5F8"/>
+            </a:solidFill>
+          </p:spPr>
+          <p:txBody>
+            <a:bodyPr wrap="square" lIns="0" tIns="0" rIns="0" bIns="0" rtlCol="0"/>
+            <a:lstStyle/>
+            <a:p>
+              <a:endParaRPr>
+                <a:latin typeface="Raleway" pitchFamily="2" charset="77"/>
+              </a:endParaRPr>
+            </a:p>
+          </p:txBody>
+        </p:sp>
+        <p:sp>
+          <p:nvSpPr>
+            <p:cNvPr id="9" name="object 9"/>
+            <p:cNvSpPr/>
+            <p:nvPr/>
+          </p:nvSpPr>
+          <p:spPr>
+            <a:xfrm>
+              <a:off x="4402835" y="993038"/>
+              <a:ext cx="4544695" cy="3752850"/>
+            </a:xfrm>
+            <a:custGeom>
+              <a:avLst/>
+              <a:gdLst/>
+              <a:ahLst/>
+              <a:cxnLst/>
+              <a:rect l="l" t="t" r="r" b="b"/>
+              <a:pathLst>
+                <a:path w="4544695" h="3752850">
+                  <a:moveTo>
+                    <a:pt x="0" y="3752342"/>
+                  </a:moveTo>
+                  <a:lnTo>
+                    <a:pt x="4544568" y="3752342"/>
+                  </a:lnTo>
+                  <a:lnTo>
+                    <a:pt x="4544568" y="0"/>
+                  </a:lnTo>
+                  <a:lnTo>
+                    <a:pt x="0" y="0"/>
+                  </a:lnTo>
+                  <a:lnTo>
+                    <a:pt x="0" y="3752342"/>
+                  </a:lnTo>
+                  <a:close/>
+                </a:path>
+              </a:pathLst>
+            </a:custGeom>
+            <a:ln w="9152">
+              <a:solidFill>
+                <a:srgbClr val="E1E8EF"/>
+              </a:solidFill>
+            </a:ln>
+          </p:spPr>
+          <p:txBody>
+            <a:bodyPr wrap="square" lIns="0" tIns="0" rIns="0" bIns="0" rtlCol="0"/>
+            <a:lstStyle/>
+            <a:p>
+              <a:endParaRPr>
+                <a:latin typeface="Raleway" pitchFamily="2" charset="77"/>
+              </a:endParaRPr>
+            </a:p>
+          </p:txBody>
+        </p:sp>
+      </p:grpSp>
+      <p:pic>
+        <p:nvPicPr>
+          <p:cNvPr id="10" name="Picture 9" descr="countries_table.png"/>
+          <p:cNvPicPr>
+            <a:picLocks noChangeAspect="1"/>
+          </p:cNvPicPr>
+          <p:nvPr/>
+        </p:nvPicPr>
+        <p:blipFill>
+          <a:blip r:embed="rId1"/>
+          <a:stretch>
+            <a:fillRect/>
+          </a:stretch>
+        </p:blipFill>
+        <p:spPr>
+          <a:xfrm>
+            <a:off x="4329430" y="1736725"/>
+            <a:ext cx="4298950" cy="2571115"/>
+          </a:xfrm>
+          <a:prstGeom prst="rect">
+            <a:avLst/>
+          </a:prstGeom>
+        </p:spPr>
+      </p:pic>
+    </p:spTree>
+  </p:cSld>
+  <p:clrMapOvr>
+    <a:masterClrMapping/>
+  </p:clrMapOvr>
+</p:sld>
+</file>
+
+<file path=ppt/slides/slide6.xml><?xml version="1.0" encoding="utf-8"?>
+<p:sld xmlns:a="http://schemas.openxmlformats.org/drawingml/2006/main" xmlns:r="http://schemas.openxmlformats.org/officeDocument/2006/relationships" xmlns:p="http://schemas.openxmlformats.org/presentationml/2006/main" showMasterSp="0">
+  <p:cSld>
+    <p:spTree>
+      <p:nvGrpSpPr>
+        <p:cNvPr id="1" name=""/>
+        <p:cNvGrpSpPr/>
+        <p:nvPr/>
+      </p:nvGrpSpPr>
+      <p:grpSpPr>
+        <a:xfrm>
+          <a:off x="0" y="0"/>
+          <a:ext cx="0" cy="0"/>
+          <a:chOff x="0" y="0"/>
+          <a:chExt cx="0" cy="0"/>
+        </a:xfrm>
+      </p:grpSpPr>
+      <p:sp>
+        <p:nvSpPr>
+          <p:cNvPr id="2" name="object 2"/>
+          <p:cNvSpPr txBox="1">
+            <a:spLocks noGrp="1"/>
+          </p:cNvSpPr>
+          <p:nvPr>
+            <p:ph type="title"/>
+          </p:nvPr>
+        </p:nvSpPr>
+        <p:spPr>
           <a:xfrm>
             <a:off x="401612" y="165009"/>
             <a:ext cx="4932464" cy="589867"/>
@@ -5220,51 +6770,11 @@
                 <a:latin typeface="Raleway" pitchFamily="2" charset="77"/>
                 <a:cs typeface="Times New Roman" panose="02020603050405020304"/>
               </a:rPr>
-              <a:t>The </a:t>
-            </a:r>
-            <a:r>
-              <a:rPr lang="en-GB" sz="1000" b="1" spc="-10">
-                <a:solidFill>
-                  <a:srgbClr val="334154"/>
-                </a:solidFill>
-                <a:latin typeface="Raleway" pitchFamily="2" charset="77"/>
-                <a:cs typeface="Times New Roman" panose="02020603050405020304"/>
-              </a:rPr>
-              <a:t>Homepage and </a:t>
-            </a:r>
-            <a:r>
-              <a:rPr lang="en-US" altLang="en-GB" sz="1000" b="1" spc="-10">
-                <a:solidFill>
-                  <a:srgbClr val="334154"/>
-                </a:solidFill>
-                <a:latin typeface="Raleway" pitchFamily="2" charset="77"/>
-                <a:cs typeface="Times New Roman" panose="02020603050405020304"/>
-              </a:rPr>
-              <a:t>About </a:t>
-            </a:r>
-            <a:r>
-              <a:rPr lang="en-GB" sz="1000" b="1" spc="-10">
-                <a:solidFill>
-                  <a:srgbClr val="334154"/>
-                </a:solidFill>
-                <a:latin typeface="Raleway" pitchFamily="2" charset="77"/>
-                <a:cs typeface="Times New Roman" panose="02020603050405020304"/>
-              </a:rPr>
-              <a:t>pages drive meaningful engagement</a:t>
-            </a:r>
-            <a:r>
-              <a:rPr lang="en-GB" sz="1000" spc="-10">
-                <a:solidFill>
-                  <a:srgbClr val="334154"/>
-                </a:solidFill>
-                <a:latin typeface="Raleway" pitchFamily="2" charset="77"/>
-                <a:cs typeface="Times New Roman" panose="02020603050405020304"/>
-              </a:rPr>
-              <a:t>.</a:t>
+              <a:t>The Homepage and Econets Dpa Targets 50mw Solar pages drive the most meaningful engagement.</a:t>
             </a:r>
             <a:endParaRPr lang="en-GB" sz="1000" spc="-10">
               <a:solidFill>
-                <a:srgbClr val="000000"/>
+                <a:srgbClr val="334154"/>
               </a:solidFill>
               <a:latin typeface="Raleway" pitchFamily="2" charset="77"/>
               <a:cs typeface="Times New Roman" panose="02020603050405020304"/>
@@ -5417,7 +6927,7 @@
         <p:spPr>
           <a:xfrm>
             <a:off x="429895" y="1501140"/>
-            <a:ext cx="3610610" cy="3490595"/>
+            <a:ext cx="3610610" cy="2660015"/>
           </a:xfrm>
           <a:prstGeom prst="rect">
             <a:avLst/>
@@ -5446,14 +6956,26 @@
             </a:endParaRPr>
           </a:p>
           <a:p>
-            <a:br>
-              <a:rPr lang="en-US" sz="900">
+            <a:r>
+              <a:rPr lang="en-US" altLang="en-US" sz="900" spc="-10">
                 <a:solidFill>
                   <a:schemeClr val="tx1"/>
                 </a:solidFill>
-                <a:latin typeface="Raleway"/>
-              </a:rPr>
-            </a:br>
+                <a:latin typeface="Raleway" pitchFamily="2" charset="77"/>
+                <a:cs typeface="Times New Roman" panose="02020603050405020304"/>
+              </a:rPr>
+              <a:t>The </a:t>
+            </a:r>
+            <a:r>
+              <a:rPr lang="en-US" altLang="en-US" sz="900" b="1" spc="-10">
+                <a:solidFill>
+                  <a:schemeClr val="tx1"/>
+                </a:solidFill>
+                <a:latin typeface="Raleway" pitchFamily="2" charset="77"/>
+                <a:cs typeface="Times New Roman" panose="02020603050405020304"/>
+              </a:rPr>
+              <a:t>Homepage</a:t>
+            </a:r>
             <a:r>
               <a:rPr lang="en-US" altLang="en-US" sz="900" spc="-10">
                 <a:solidFill>
@@ -5462,7 +6984,7 @@
                 <a:latin typeface="Raleway" pitchFamily="2" charset="77"/>
                 <a:cs typeface="Times New Roman" panose="02020603050405020304"/>
               </a:rPr>
-              <a:t>The </a:t>
+              <a:t> drives the highest traffic, accounting for </a:t>
             </a:r>
             <a:r>
               <a:rPr lang="en-US" altLang="en-US" sz="900" b="1" spc="-10">
@@ -5472,7 +6994,7 @@
                 <a:latin typeface="Raleway" pitchFamily="2" charset="77"/>
                 <a:cs typeface="Times New Roman" panose="02020603050405020304"/>
               </a:rPr>
-              <a:t>Home Page </a:t>
+              <a:t>84.95%</a:t>
             </a:r>
             <a:r>
               <a:rPr lang="en-US" altLang="en-US" sz="900" spc="-10">
@@ -5482,7 +7004,7 @@
                 <a:latin typeface="Raleway" pitchFamily="2" charset="77"/>
                 <a:cs typeface="Times New Roman" panose="02020603050405020304"/>
               </a:rPr>
-              <a:t>accounts for the largest share of traffic </a:t>
+              <a:t> of total views (</a:t>
             </a:r>
             <a:r>
               <a:rPr lang="en-US" altLang="en-US" sz="900" b="1" spc="-10">
@@ -5492,7 +7014,7 @@
                 <a:latin typeface="Raleway" pitchFamily="2" charset="77"/>
                 <a:cs typeface="Times New Roman" panose="02020603050405020304"/>
               </a:rPr>
-              <a:t>(93.74% of total views)</a:t>
+              <a:t>4,488</a:t>
             </a:r>
             <a:r>
               <a:rPr lang="en-US" altLang="en-US" sz="900" spc="-10">
@@ -5502,7 +7024,47 @@
                 <a:latin typeface="Raleway" pitchFamily="2" charset="77"/>
                 <a:cs typeface="Times New Roman" panose="02020603050405020304"/>
               </a:rPr>
-              <a:t>, making it the primary entry point and overwhelmingly dominant driver of user activity on the platform.</a:t>
+              <a:t> views), with </a:t>
+            </a:r>
+            <a:r>
+              <a:rPr lang="en-US" altLang="en-US" sz="900" b="1" spc="-10">
+                <a:solidFill>
+                  <a:schemeClr val="tx1"/>
+                </a:solidFill>
+                <a:latin typeface="Raleway" pitchFamily="2" charset="77"/>
+                <a:cs typeface="Times New Roman" panose="02020603050405020304"/>
+              </a:rPr>
+              <a:t>1.34</a:t>
+            </a:r>
+            <a:r>
+              <a:rPr lang="en-US" altLang="en-US" sz="900" spc="-10">
+                <a:solidFill>
+                  <a:schemeClr val="tx1"/>
+                </a:solidFill>
+                <a:latin typeface="Raleway" pitchFamily="2" charset="77"/>
+                <a:cs typeface="Times New Roman" panose="02020603050405020304"/>
+              </a:rPr>
+              <a:t> views per active user and an average engagement duration of </a:t>
+            </a:r>
+            <a:r>
+              <a:rPr lang="en-US" altLang="en-US" sz="900" b="1" spc="-10">
+                <a:solidFill>
+                  <a:schemeClr val="tx1"/>
+                </a:solidFill>
+                <a:latin typeface="Raleway" pitchFamily="2" charset="77"/>
+                <a:cs typeface="Times New Roman" panose="02020603050405020304"/>
+              </a:rPr>
+              <a:t>23s</a:t>
+            </a:r>
+            <a:r>
+              <a:rPr lang="en-US" altLang="en-US" sz="900" spc="-10">
+                <a:solidFill>
+                  <a:schemeClr val="tx1"/>
+                </a:solidFill>
+                <a:latin typeface="Raleway" pitchFamily="2" charset="77"/>
+                <a:cs typeface="Times New Roman" panose="02020603050405020304"/>
+              </a:rPr>
+              <a:t>. This substantial volume indicates strong content discoverability and user interest.</a:t>
             </a:r>
             <a:endParaRPr lang="en-US" altLang="en-US" sz="900" spc="-10">
               <a:solidFill>
@@ -5530,7 +7092,7 @@
                 <a:latin typeface="Raleway" pitchFamily="2" charset="77"/>
                 <a:cs typeface="Times New Roman" panose="02020603050405020304"/>
               </a:rPr>
-              <a:t>Other pages such a</a:t>
+              <a:t>Secondary pages such as </a:t>
             </a:r>
             <a:r>
               <a:rPr lang="en-US" altLang="en-US" sz="900" b="1" spc="-10">
@@ -5540,7 +7102,7 @@
                 <a:latin typeface="Raleway" pitchFamily="2" charset="77"/>
                 <a:cs typeface="Times New Roman" panose="02020603050405020304"/>
               </a:rPr>
-              <a:t>s About (2.06%), Investors (1.12%), and Properties (1.07%) </a:t>
+              <a:t>Econets Dpa Targets 50mw Solar</a:t>
             </a:r>
             <a:r>
               <a:rPr lang="en-US" altLang="en-US" sz="900" spc="-10">
@@ -5550,7 +7112,27 @@
                 <a:latin typeface="Raleway" pitchFamily="2" charset="77"/>
                 <a:cs typeface="Times New Roman" panose="02020603050405020304"/>
               </a:rPr>
-              <a:t>contribute significantly smaller portions of traffic, indicating limited exploration beyond the main landing page.</a:t>
+              <a:t> and </a:t>
+            </a:r>
+            <a:r>
+              <a:rPr lang="en-US" altLang="en-US" sz="900" b="1" spc="-10">
+                <a:solidFill>
+                  <a:schemeClr val="tx1"/>
+                </a:solidFill>
+                <a:latin typeface="Raleway" pitchFamily="2" charset="77"/>
+                <a:cs typeface="Times New Roman" panose="02020603050405020304"/>
+              </a:rPr>
+              <a:t>About Us</a:t>
+            </a:r>
+            <a:r>
+              <a:rPr lang="en-US" altLang="en-US" sz="900" spc="-10">
+                <a:solidFill>
+                  <a:schemeClr val="tx1"/>
+                </a:solidFill>
+                <a:latin typeface="Raleway" pitchFamily="2" charset="77"/>
+                <a:cs typeface="Times New Roman" panose="02020603050405020304"/>
+              </a:rPr>
+              <a:t> contribute meaningful traffic, but with more limited evidence of deep exploratory browsing.</a:t>
             </a:r>
             <a:endParaRPr lang="en-US" altLang="en-US" sz="900" spc="-10">
               <a:solidFill>
@@ -5578,7 +7160,7 @@
                 <a:latin typeface="Raleway" pitchFamily="2" charset="77"/>
                 <a:cs typeface="Times New Roman" panose="02020603050405020304"/>
               </a:rPr>
-              <a:t>Informational and support related pages like </a:t>
+              <a:t>Pages with the deepest browsing engagement include </a:t>
             </a:r>
             <a:r>
               <a:rPr lang="en-US" altLang="en-US" sz="900" b="1" spc="-10">
@@ -5588,7 +7170,7 @@
                 <a:latin typeface="Raleway" pitchFamily="2" charset="77"/>
                 <a:cs typeface="Times New Roman" panose="02020603050405020304"/>
               </a:rPr>
-              <a:t>Distributed Power (0.69%) and Contact Us (0.29%)</a:t>
+              <a:t>Investors</a:t>
             </a:r>
             <a:r>
               <a:rPr lang="en-US" altLang="en-US" sz="900" spc="-10">
@@ -5598,7 +7180,107 @@
                 <a:latin typeface="Raleway" pitchFamily="2" charset="77"/>
                 <a:cs typeface="Times New Roman" panose="02020603050405020304"/>
               </a:rPr>
-              <a:t> attract minimal traffic, suggesting low user progression toward deeper service information or engagement points.</a:t>
+              <a:t> (</a:t>
+            </a:r>
+            <a:r>
+              <a:rPr lang="en-US" altLang="en-US" sz="900" b="1" spc="-10">
+                <a:solidFill>
+                  <a:schemeClr val="tx1"/>
+                </a:solidFill>
+                <a:latin typeface="Raleway" pitchFamily="2" charset="77"/>
+                <a:cs typeface="Times New Roman" panose="02020603050405020304"/>
+              </a:rPr>
+              <a:t>1.76</a:t>
+            </a:r>
+            <a:r>
+              <a:rPr lang="en-US" altLang="en-US" sz="900" spc="-10">
+                <a:solidFill>
+                  <a:schemeClr val="tx1"/>
+                </a:solidFill>
+                <a:latin typeface="Raleway" pitchFamily="2" charset="77"/>
+                <a:cs typeface="Times New Roman" panose="02020603050405020304"/>
+              </a:rPr>
+              <a:t> views per user), </a:t>
+            </a:r>
+            <a:r>
+              <a:rPr lang="en-US" altLang="en-US" sz="900" b="1" spc="-10">
+                <a:solidFill>
+                  <a:schemeClr val="tx1"/>
+                </a:solidFill>
+                <a:latin typeface="Raleway" pitchFamily="2" charset="77"/>
+                <a:cs typeface="Times New Roman" panose="02020603050405020304"/>
+              </a:rPr>
+              <a:t>Contact Us</a:t>
+            </a:r>
+            <a:r>
+              <a:rPr lang="en-US" altLang="en-US" sz="900" spc="-10">
+                <a:solidFill>
+                  <a:schemeClr val="tx1"/>
+                </a:solidFill>
+                <a:latin typeface="Raleway" pitchFamily="2" charset="77"/>
+                <a:cs typeface="Times New Roman" panose="02020603050405020304"/>
+              </a:rPr>
+              <a:t> (</a:t>
+            </a:r>
+            <a:r>
+              <a:rPr lang="en-US" altLang="en-US" sz="900" b="1" spc="-10">
+                <a:solidFill>
+                  <a:schemeClr val="tx1"/>
+                </a:solidFill>
+                <a:latin typeface="Raleway" pitchFamily="2" charset="77"/>
+                <a:cs typeface="Times New Roman" panose="02020603050405020304"/>
+              </a:rPr>
+              <a:t>1.68</a:t>
+            </a:r>
+            <a:r>
+              <a:rPr lang="en-US" altLang="en-US" sz="900" spc="-10">
+                <a:solidFill>
+                  <a:schemeClr val="tx1"/>
+                </a:solidFill>
+                <a:latin typeface="Raleway" pitchFamily="2" charset="77"/>
+                <a:cs typeface="Times New Roman" panose="02020603050405020304"/>
+              </a:rPr>
+              <a:t> views per user), </a:t>
+            </a:r>
+            <a:r>
+              <a:rPr lang="en-US" altLang="en-US" sz="900" b="1" spc="-10">
+                <a:solidFill>
+                  <a:schemeClr val="tx1"/>
+                </a:solidFill>
+                <a:latin typeface="Raleway" pitchFamily="2" charset="77"/>
+                <a:cs typeface="Times New Roman" panose="02020603050405020304"/>
+              </a:rPr>
+              <a:t>About Us</a:t>
+            </a:r>
+            <a:r>
+              <a:rPr lang="en-US" altLang="en-US" sz="900" spc="-10">
+                <a:solidFill>
+                  <a:schemeClr val="tx1"/>
+                </a:solidFill>
+                <a:latin typeface="Raleway" pitchFamily="2" charset="77"/>
+                <a:cs typeface="Times New Roman" panose="02020603050405020304"/>
+              </a:rPr>
+              <a:t> (</a:t>
+            </a:r>
+            <a:r>
+              <a:rPr lang="en-US" altLang="en-US" sz="900" b="1" spc="-10">
+                <a:solidFill>
+                  <a:schemeClr val="tx1"/>
+                </a:solidFill>
+                <a:latin typeface="Raleway" pitchFamily="2" charset="77"/>
+                <a:cs typeface="Times New Roman" panose="02020603050405020304"/>
+              </a:rPr>
+              <a:t>1.49</a:t>
+            </a:r>
+            <a:r>
+              <a:rPr lang="en-US" altLang="en-US" sz="900" spc="-10">
+                <a:solidFill>
+                  <a:schemeClr val="tx1"/>
+                </a:solidFill>
+                <a:latin typeface="Raleway" pitchFamily="2" charset="77"/>
+                <a:cs typeface="Times New Roman" panose="02020603050405020304"/>
+              </a:rPr>
+              <a:t> views per user), indicating stronger exploration intent and higher content value for those visitors.</a:t>
             </a:r>
             <a:endParaRPr lang="en-US" altLang="en-US" sz="900" spc="-10">
               <a:solidFill>
@@ -5626,7 +7308,7 @@
                 <a:latin typeface="Raleway" pitchFamily="2" charset="77"/>
                 <a:cs typeface="Times New Roman" panose="02020603050405020304"/>
               </a:rPr>
-              <a:t>Product and service exploration pages such as the A</a:t>
+              <a:t>Overall, with </a:t>
             </a:r>
             <a:r>
               <a:rPr lang="en-US" altLang="en-US" sz="900" b="1" spc="-10">
@@ -5636,7 +7318,7 @@
                 <a:latin typeface="Raleway" pitchFamily="2" charset="77"/>
                 <a:cs typeface="Times New Roman" panose="02020603050405020304"/>
               </a:rPr>
-              <a:t>bout page (1.68 views per user, highest engagement) and Contact Us (1.46)</a:t>
+              <a:t>5,283</a:t>
             </a:r>
             <a:r>
               <a:rPr lang="en-US" altLang="en-US" sz="900" spc="-10">
@@ -5646,35 +7328,7 @@
                 <a:latin typeface="Raleway" pitchFamily="2" charset="77"/>
                 <a:cs typeface="Times New Roman" panose="02020603050405020304"/>
               </a:rPr>
-              <a:t> show relatively stronger interaction levels, indicating that users who reach these pages demonstrate higher browsing intent.</a:t>
-            </a:r>
-            <a:endParaRPr lang="en-US" altLang="en-US" sz="900" spc="-10">
-              <a:solidFill>
-                <a:schemeClr val="tx1"/>
-              </a:solidFill>
-              <a:latin typeface="Raleway" pitchFamily="2" charset="77"/>
-              <a:cs typeface="Times New Roman" panose="02020603050405020304"/>
-            </a:endParaRPr>
-          </a:p>
-          <a:p>
-            <a:endParaRPr lang="en-US" altLang="en-US" sz="900" spc="-10">
-              <a:solidFill>
-                <a:schemeClr val="tx1"/>
-              </a:solidFill>
-              <a:latin typeface="Raleway" pitchFamily="2" charset="77"/>
-              <a:cs typeface="Times New Roman" panose="02020603050405020304"/>
-            </a:endParaRPr>
-          </a:p>
-          <a:p>
-            <a:r>
-              <a:rPr lang="en-US" altLang="en-US" sz="900" spc="-10">
-                <a:solidFill>
-                  <a:schemeClr val="tx1"/>
-                </a:solidFill>
-                <a:latin typeface="Raleway" pitchFamily="2" charset="77"/>
-                <a:cs typeface="Times New Roman" panose="02020603050405020304"/>
-              </a:rPr>
-              <a:t>Overall, traffic is heavily concentrated on the Home Page, with strong top of funnel acquisition but limited depth of navigation, highlighting a clear opportunity to improve internal navigation and guide users more effectively toward key content and conversion focused pages.</a:t>
+              <a:t> total views across all pages, traffic is largely driven by core solution pages with strong top-of-funnel acquisition, while opportunities remain to improve engagement depth and guide users more effectively through key conversion journeys.</a:t>
             </a:r>
             <a:endParaRPr lang="en-US" altLang="en-US" sz="900" spc="-10">
               <a:solidFill>
@@ -5809,7 +7463,7 @@
       </p:grpSp>
       <p:pic>
         <p:nvPicPr>
-          <p:cNvPr id="11" name="Picture 10" descr="Screenshot 2026-03-30 at 12.50.47"/>
+          <p:cNvPr id="11" name="Picture 10" descr="pages_table.png"/>
           <p:cNvPicPr>
             <a:picLocks noChangeAspect="1"/>
           </p:cNvPicPr>
@@ -5824,7 +7478,7 @@
         <p:spPr>
           <a:xfrm>
             <a:off x="4419600" y="1424940"/>
-            <a:ext cx="4422140" cy="3535680"/>
+            <a:ext cx="4422140" cy="2957195"/>
           </a:xfrm>
           <a:prstGeom prst="rect">
             <a:avLst/>
@@ -5839,7 +7493,1004 @@
 </p:sld>
 </file>
 
-<file path=ppt/slides/slide6.xml><?xml version="1.0" encoding="utf-8"?>
+<file path=ppt/slides/slide7.xml><?xml version="1.0" encoding="utf-8"?>
+<p:sld xmlns:a="http://schemas.openxmlformats.org/drawingml/2006/main" xmlns:r="http://schemas.openxmlformats.org/officeDocument/2006/relationships" xmlns:p="http://schemas.openxmlformats.org/presentationml/2006/main">
+  <p:cSld>
+    <p:spTree>
+      <p:nvGrpSpPr>
+        <p:cNvPr id="1" name=""/>
+        <p:cNvGrpSpPr/>
+        <p:nvPr/>
+      </p:nvGrpSpPr>
+      <p:grpSpPr>
+        <a:xfrm>
+          <a:off x="0" y="0"/>
+          <a:ext cx="0" cy="0"/>
+          <a:chOff x="0" y="0"/>
+          <a:chExt cx="0" cy="0"/>
+        </a:xfrm>
+      </p:grpSpPr>
+      <p:sp>
+        <p:nvSpPr>
+          <p:cNvPr id="13" name="object 2"/>
+          <p:cNvSpPr txBox="1">
+            <a:spLocks noGrp="1"/>
+          </p:cNvSpPr>
+          <p:nvPr>
+            <p:ph type="title"/>
+          </p:nvPr>
+        </p:nvSpPr>
+        <p:spPr>
+          <a:xfrm>
+            <a:off x="401612" y="165009"/>
+            <a:ext cx="4932464" cy="586105"/>
+          </a:xfrm>
+          <a:prstGeom prst="rect">
+            <a:avLst/>
+          </a:prstGeom>
+        </p:spPr>
+        <p:txBody>
+          <a:bodyPr vert="horz" wrap="square" lIns="0" tIns="264122" rIns="0" bIns="0" rtlCol="0" anchor="t">
+            <a:spAutoFit/>
+          </a:bodyPr>
+          <a:lstStyle/>
+          <a:p>
+            <a:pPr marL="27305">
+              <a:lnSpc>
+                <a:spcPct val="100000"/>
+              </a:lnSpc>
+              <a:spcBef>
+                <a:spcPts val="90"/>
+              </a:spcBef>
+            </a:pPr>
+            <a:r>
+              <a:rPr lang="en-US" spc="35">
+                <a:latin typeface="Raleway" pitchFamily="2" charset="77"/>
+                <a:cs typeface="Times New Roman" panose="02020603050405020304"/>
+              </a:rPr>
+              <a:t>Traffic Acquisition</a:t>
+            </a:r>
+            <a:endParaRPr lang="en-US" spc="35">
+              <a:latin typeface="Raleway" pitchFamily="2" charset="77"/>
+              <a:cs typeface="Times New Roman" panose="02020603050405020304"/>
+            </a:endParaRPr>
+          </a:p>
+        </p:txBody>
+      </p:sp>
+      <p:sp>
+        <p:nvSpPr>
+          <p:cNvPr id="14" name="object 3"/>
+          <p:cNvSpPr txBox="1"/>
+          <p:nvPr/>
+        </p:nvSpPr>
+        <p:spPr>
+          <a:xfrm>
+            <a:off x="428381" y="900929"/>
+            <a:ext cx="4219641" cy="319405"/>
+          </a:xfrm>
+          <a:prstGeom prst="rect">
+            <a:avLst/>
+          </a:prstGeom>
+        </p:spPr>
+        <p:txBody>
+          <a:bodyPr vert="horz" wrap="square" lIns="0" tIns="12065" rIns="0" bIns="0" rtlCol="0" anchor="t">
+            <a:spAutoFit/>
+          </a:bodyPr>
+          <a:lstStyle/>
+          <a:p>
+            <a:pPr marL="12700">
+              <a:lnSpc>
+                <a:spcPct val="100000"/>
+              </a:lnSpc>
+              <a:spcBef>
+                <a:spcPts val="95"/>
+              </a:spcBef>
+            </a:pPr>
+            <a:r>
+              <a:rPr lang="en-US" altLang="en-GB" sz="1000" spc="-10">
+                <a:solidFill>
+                  <a:srgbClr val="334154"/>
+                </a:solidFill>
+                <a:latin typeface="Raleway" pitchFamily="2" charset="77"/>
+                <a:cs typeface="Times New Roman" panose="02020603050405020304"/>
+              </a:rPr>
+              <a:t>An/paid and Fb/paid lead Traffic Acquisition engagement with 50.99% and 11.59% respectively</a:t>
+            </a:r>
+            <a:endParaRPr lang="en-US" altLang="en-GB" sz="1300" spc="-10">
+              <a:solidFill>
+                <a:srgbClr val="334154"/>
+              </a:solidFill>
+              <a:latin typeface="Raleway" pitchFamily="2" charset="77"/>
+              <a:cs typeface="Times New Roman" panose="02020603050405020304"/>
+            </a:endParaRPr>
+          </a:p>
+        </p:txBody>
+      </p:sp>
+      <p:grpSp>
+        <p:nvGrpSpPr>
+          <p:cNvPr id="15" name="object 4"/>
+          <p:cNvGrpSpPr/>
+          <p:nvPr/>
+        </p:nvGrpSpPr>
+        <p:grpSpPr>
+          <a:xfrm>
+            <a:off x="303792" y="1342200"/>
+            <a:ext cx="3311476" cy="3659820"/>
+            <a:chOff x="429768" y="1090226"/>
+            <a:chExt cx="3438525" cy="3907338"/>
+          </a:xfrm>
+        </p:grpSpPr>
+        <p:sp>
+          <p:nvSpPr>
+            <p:cNvPr id="16" name="object 5"/>
+            <p:cNvSpPr/>
+            <p:nvPr/>
+          </p:nvSpPr>
+          <p:spPr>
+            <a:xfrm>
+              <a:off x="429768" y="1354569"/>
+              <a:ext cx="3438525" cy="3642995"/>
+            </a:xfrm>
+            <a:custGeom>
+              <a:avLst/>
+              <a:gdLst/>
+              <a:ahLst/>
+              <a:cxnLst/>
+              <a:rect l="l" t="t" r="r" b="b"/>
+              <a:pathLst>
+                <a:path w="3438525" h="3642995">
+                  <a:moveTo>
+                    <a:pt x="3438144" y="0"/>
+                  </a:moveTo>
+                  <a:lnTo>
+                    <a:pt x="0" y="0"/>
+                  </a:lnTo>
+                  <a:lnTo>
+                    <a:pt x="0" y="3642487"/>
+                  </a:lnTo>
+                  <a:lnTo>
+                    <a:pt x="3438144" y="3642487"/>
+                  </a:lnTo>
+                  <a:lnTo>
+                    <a:pt x="3438144" y="0"/>
+                  </a:lnTo>
+                  <a:close/>
+                </a:path>
+              </a:pathLst>
+            </a:custGeom>
+            <a:solidFill>
+              <a:srgbClr val="F8F9FB"/>
+            </a:solidFill>
+          </p:spPr>
+          <p:txBody>
+            <a:bodyPr wrap="square" lIns="0" tIns="0" rIns="0" bIns="0" rtlCol="0"/>
+            <a:lstStyle/>
+            <a:p>
+              <a:endParaRPr>
+                <a:latin typeface="Raleway" pitchFamily="2" charset="77"/>
+              </a:endParaRPr>
+            </a:p>
+          </p:txBody>
+        </p:sp>
+        <p:sp>
+          <p:nvSpPr>
+            <p:cNvPr id="17" name="object 6"/>
+            <p:cNvSpPr/>
+            <p:nvPr/>
+          </p:nvSpPr>
+          <p:spPr>
+            <a:xfrm>
+              <a:off x="576072" y="1090226"/>
+              <a:ext cx="3145790" cy="27940"/>
+            </a:xfrm>
+            <a:custGeom>
+              <a:avLst/>
+              <a:gdLst/>
+              <a:ahLst/>
+              <a:cxnLst/>
+              <a:rect l="l" t="t" r="r" b="b"/>
+              <a:pathLst>
+                <a:path w="3145790" h="27940">
+                  <a:moveTo>
+                    <a:pt x="3145536" y="0"/>
+                  </a:moveTo>
+                  <a:lnTo>
+                    <a:pt x="0" y="0"/>
+                  </a:lnTo>
+                  <a:lnTo>
+                    <a:pt x="0" y="27456"/>
+                  </a:lnTo>
+                  <a:lnTo>
+                    <a:pt x="3145536" y="27456"/>
+                  </a:lnTo>
+                  <a:lnTo>
+                    <a:pt x="3145536" y="0"/>
+                  </a:lnTo>
+                  <a:close/>
+                </a:path>
+              </a:pathLst>
+            </a:custGeom>
+            <a:solidFill>
+              <a:srgbClr val="1E3989"/>
+            </a:solidFill>
+          </p:spPr>
+          <p:txBody>
+            <a:bodyPr wrap="square" lIns="0" tIns="0" rIns="0" bIns="0" rtlCol="0"/>
+            <a:lstStyle/>
+            <a:p>
+              <a:endParaRPr>
+                <a:latin typeface="Raleway" pitchFamily="2" charset="77"/>
+              </a:endParaRPr>
+            </a:p>
+          </p:txBody>
+        </p:sp>
+      </p:grpSp>
+      <p:sp>
+        <p:nvSpPr>
+          <p:cNvPr id="18" name="object 7"/>
+          <p:cNvSpPr txBox="1"/>
+          <p:nvPr/>
+        </p:nvSpPr>
+        <p:spPr>
+          <a:xfrm>
+            <a:off x="429895" y="1501140"/>
+            <a:ext cx="3610610" cy="3629660"/>
+          </a:xfrm>
+          <a:prstGeom prst="rect">
+            <a:avLst/>
+          </a:prstGeom>
+        </p:spPr>
+        <p:txBody>
+          <a:bodyPr vert="horz" wrap="square" lIns="0" tIns="29209" rIns="0" bIns="0" rtlCol="0" anchor="t">
+            <a:spAutoFit/>
+          </a:bodyPr>
+          <a:lstStyle/>
+          <a:p>
+            <a:r>
+              <a:rPr lang="en-US" sz="900" b="1">
+                <a:solidFill>
+                  <a:schemeClr val="tx1"/>
+                </a:solidFill>
+                <a:latin typeface="Raleway" pitchFamily="2" charset="77"/>
+              </a:rPr>
+              <a:t>Overall Insight:</a:t>
+            </a:r>
+            <a:endParaRPr lang="en-US" sz="900" b="1">
+              <a:solidFill>
+                <a:schemeClr val="tx1"/>
+              </a:solidFill>
+              <a:latin typeface="Raleway" pitchFamily="2" charset="77"/>
+            </a:endParaRPr>
+          </a:p>
+          <a:p>
+            <a:r>
+              <a:rPr lang="en-US" altLang="en-US" sz="900" b="0">
+                <a:solidFill>
+                  <a:schemeClr val="tx1"/>
+                </a:solidFill>
+                <a:latin typeface="Raleway" charset="0"/>
+                <a:cs typeface="Raleway" charset="0"/>
+              </a:rPr>
+              <a:t>Paid traffic remains the primary source of website activity, with </a:t>
+            </a:r>
+            <a:r>
+              <a:rPr lang="en-US" altLang="en-US" sz="900" b="1">
+                <a:solidFill>
+                  <a:schemeClr val="tx1"/>
+                </a:solidFill>
+                <a:latin typeface="Raleway Bold" charset="0"/>
+                <a:cs typeface="Raleway Bold" charset="0"/>
+              </a:rPr>
+              <a:t>an / paid</a:t>
+            </a:r>
+            <a:r>
+              <a:rPr lang="en-US" altLang="en-US" sz="900" b="0">
+                <a:solidFill>
+                  <a:schemeClr val="tx1"/>
+                </a:solidFill>
+                <a:latin typeface="Raleway" charset="0"/>
+                <a:cs typeface="Raleway" charset="0"/>
+              </a:rPr>
+              <a:t> generating </a:t>
+            </a:r>
+            <a:r>
+              <a:rPr lang="en-US" altLang="en-US" sz="900" b="1">
+                <a:solidFill>
+                  <a:schemeClr val="tx1"/>
+                </a:solidFill>
+                <a:latin typeface="Raleway Bold" charset="0"/>
+                <a:cs typeface="Raleway Bold" charset="0"/>
+              </a:rPr>
+              <a:t>1,967 sessions,</a:t>
+            </a:r>
+            <a:r>
+              <a:rPr lang="en-US" altLang="en-US" sz="900" b="0">
+                <a:solidFill>
+                  <a:schemeClr val="tx1"/>
+                </a:solidFill>
+                <a:latin typeface="Raleway" charset="0"/>
+                <a:cs typeface="Raleway" charset="0"/>
+              </a:rPr>
+              <a:t> accounting for </a:t>
+            </a:r>
+            <a:r>
+              <a:rPr lang="en-US" altLang="en-US" sz="900" b="1">
+                <a:solidFill>
+                  <a:schemeClr val="tx1"/>
+                </a:solidFill>
+                <a:latin typeface="Raleway Bold" charset="0"/>
+                <a:cs typeface="Raleway Bold" charset="0"/>
+              </a:rPr>
+              <a:t>46.7% </a:t>
+            </a:r>
+            <a:r>
+              <a:rPr lang="en-US" altLang="en-US" sz="900" b="0">
+                <a:solidFill>
+                  <a:schemeClr val="tx1"/>
+                </a:solidFill>
+                <a:latin typeface="Raleway" charset="0"/>
+                <a:cs typeface="Raleway" charset="0"/>
+              </a:rPr>
+              <a:t>of total sessions. Its </a:t>
+            </a:r>
+            <a:r>
+              <a:rPr lang="en-US" altLang="en-US" sz="900" b="1">
+                <a:solidFill>
+                  <a:schemeClr val="tx1"/>
+                </a:solidFill>
+                <a:latin typeface="Raleway Bold" charset="0"/>
+                <a:cs typeface="Raleway Bold" charset="0"/>
+              </a:rPr>
+              <a:t>28.67% engagement rate</a:t>
+            </a:r>
+            <a:r>
+              <a:rPr lang="en-US" altLang="en-US" sz="900" b="0">
+                <a:solidFill>
+                  <a:schemeClr val="tx1"/>
+                </a:solidFill>
+                <a:latin typeface="Raleway" charset="0"/>
+                <a:cs typeface="Raleway" charset="0"/>
+              </a:rPr>
+              <a:t> and </a:t>
+            </a:r>
+            <a:r>
+              <a:rPr lang="en-US" altLang="en-US" sz="900" b="1">
+                <a:solidFill>
+                  <a:schemeClr val="tx1"/>
+                </a:solidFill>
+                <a:latin typeface="Raleway Bold" charset="0"/>
+                <a:cs typeface="Raleway Bold" charset="0"/>
+              </a:rPr>
+              <a:t>22-second</a:t>
+            </a:r>
+            <a:r>
+              <a:rPr lang="en-US" altLang="en-US" sz="900" b="0">
+                <a:solidFill>
+                  <a:schemeClr val="tx1"/>
+                </a:solidFill>
+                <a:latin typeface="Raleway" charset="0"/>
+                <a:cs typeface="Raleway" charset="0"/>
+              </a:rPr>
+              <a:t> </a:t>
+            </a:r>
+            <a:r>
+              <a:rPr lang="en-US" altLang="en-US" sz="900" b="1">
+                <a:solidFill>
+                  <a:schemeClr val="tx1"/>
+                </a:solidFill>
+                <a:latin typeface="Raleway Bold" charset="0"/>
+                <a:cs typeface="Raleway Bold" charset="0"/>
+              </a:rPr>
+              <a:t>average engagement time</a:t>
+            </a:r>
+            <a:r>
+              <a:rPr lang="en-US" altLang="en-US" sz="900" b="0">
+                <a:solidFill>
+                  <a:schemeClr val="tx1"/>
+                </a:solidFill>
+                <a:latin typeface="Raleway" charset="0"/>
+                <a:cs typeface="Raleway" charset="0"/>
+              </a:rPr>
+              <a:t> show that it attracts substantial traffic, although user interaction remains moderate.</a:t>
+            </a:r>
+            <a:endParaRPr lang="en-US" altLang="en-US" sz="900" b="0">
+              <a:solidFill>
+                <a:schemeClr val="tx1"/>
+              </a:solidFill>
+              <a:latin typeface="Raleway" charset="0"/>
+              <a:cs typeface="Raleway" charset="0"/>
+            </a:endParaRPr>
+          </a:p>
+          <a:p>
+            <a:endParaRPr lang="en-US" altLang="en-US" sz="900" b="0">
+              <a:solidFill>
+                <a:schemeClr val="tx1"/>
+              </a:solidFill>
+              <a:latin typeface="Raleway" charset="0"/>
+              <a:cs typeface="Raleway" charset="0"/>
+            </a:endParaRPr>
+          </a:p>
+          <a:p>
+            <a:r>
+              <a:rPr lang="en-US" altLang="en-US" sz="900" b="1">
+                <a:solidFill>
+                  <a:schemeClr val="tx1"/>
+                </a:solidFill>
+                <a:latin typeface="Raleway Bold" charset="0"/>
+                <a:cs typeface="Raleway Bold" charset="0"/>
+              </a:rPr>
+              <a:t>fb / paid</a:t>
+            </a:r>
+            <a:r>
+              <a:rPr lang="en-US" altLang="en-US" sz="900" b="0">
+                <a:solidFill>
+                  <a:schemeClr val="tx1"/>
+                </a:solidFill>
+                <a:latin typeface="Raleway" charset="0"/>
+                <a:cs typeface="Raleway" charset="0"/>
+              </a:rPr>
+              <a:t> is the second-largest source with </a:t>
+            </a:r>
+            <a:r>
+              <a:rPr lang="en-US" altLang="en-US" sz="900" b="1">
+                <a:solidFill>
+                  <a:schemeClr val="tx1"/>
+                </a:solidFill>
+                <a:latin typeface="Raleway Bold" charset="0"/>
+                <a:cs typeface="Raleway Bold" charset="0"/>
+              </a:rPr>
+              <a:t>1,138 sessions</a:t>
+            </a:r>
+            <a:r>
+              <a:rPr lang="en-US" altLang="en-US" sz="900" b="0">
+                <a:solidFill>
+                  <a:schemeClr val="tx1"/>
+                </a:solidFill>
+                <a:latin typeface="Raleway" charset="0"/>
+                <a:cs typeface="Raleway" charset="0"/>
+              </a:rPr>
+              <a:t>, but its </a:t>
+            </a:r>
+            <a:r>
+              <a:rPr lang="en-US" altLang="en-US" sz="900" b="1">
+                <a:solidFill>
+                  <a:schemeClr val="tx1"/>
+                </a:solidFill>
+                <a:latin typeface="Raleway Bold" charset="0"/>
+                <a:cs typeface="Raleway Bold" charset="0"/>
+              </a:rPr>
+              <a:t>27.42% engagement rate </a:t>
+            </a:r>
+            <a:r>
+              <a:rPr lang="en-US" altLang="en-US" sz="900" b="0">
+                <a:solidFill>
+                  <a:schemeClr val="tx1"/>
+                </a:solidFill>
+                <a:latin typeface="Raleway" charset="0"/>
+                <a:cs typeface="Raleway" charset="0"/>
+              </a:rPr>
+              <a:t>and</a:t>
+            </a:r>
+            <a:r>
+              <a:rPr lang="en-US" altLang="en-US" sz="900" b="1">
+                <a:solidFill>
+                  <a:schemeClr val="tx1"/>
+                </a:solidFill>
+                <a:latin typeface="Raleway Bold" charset="0"/>
+                <a:cs typeface="Raleway Bold" charset="0"/>
+              </a:rPr>
+              <a:t> 20-second average engagement time </a:t>
+            </a:r>
+            <a:r>
+              <a:rPr lang="en-US" altLang="en-US" sz="900" b="0">
+                <a:solidFill>
+                  <a:schemeClr val="tx1"/>
+                </a:solidFill>
+                <a:latin typeface="Raleway" charset="0"/>
+                <a:cs typeface="Raleway" charset="0"/>
+              </a:rPr>
+              <a:t>indicate limited interaction. Similarly, i</a:t>
+            </a:r>
+            <a:r>
+              <a:rPr lang="en-US" altLang="en-US" sz="900" b="1">
+                <a:solidFill>
+                  <a:schemeClr val="tx1"/>
+                </a:solidFill>
+                <a:latin typeface="Raleway Bold" charset="0"/>
+                <a:cs typeface="Raleway Bold" charset="0"/>
+              </a:rPr>
+              <a:t>g / paid </a:t>
+            </a:r>
+            <a:r>
+              <a:rPr lang="en-US" altLang="en-US" sz="900" b="0">
+                <a:solidFill>
+                  <a:schemeClr val="tx1"/>
+                </a:solidFill>
+                <a:latin typeface="Raleway" charset="0"/>
+                <a:cs typeface="Raleway" charset="0"/>
+              </a:rPr>
+              <a:t>recorded an </a:t>
+            </a:r>
+            <a:r>
+              <a:rPr lang="en-US" altLang="en-US" sz="900" b="1">
+                <a:solidFill>
+                  <a:schemeClr val="tx1"/>
+                </a:solidFill>
+                <a:latin typeface="Raleway Bold" charset="0"/>
+                <a:cs typeface="Raleway Bold" charset="0"/>
+              </a:rPr>
+              <a:t>engagement rate of only 4.08%</a:t>
+            </a:r>
+            <a:r>
+              <a:rPr lang="en-US" altLang="en-US" sz="900" b="0">
+                <a:solidFill>
+                  <a:schemeClr val="tx1"/>
+                </a:solidFill>
+                <a:latin typeface="Raleway" charset="0"/>
+                <a:cs typeface="Raleway" charset="0"/>
+              </a:rPr>
+              <a:t> and an average engagement time of </a:t>
+            </a:r>
+            <a:r>
+              <a:rPr lang="en-US" altLang="en-US" sz="900" b="1">
+                <a:solidFill>
+                  <a:schemeClr val="tx1"/>
+                </a:solidFill>
+                <a:latin typeface="Raleway Bold" charset="0"/>
+                <a:cs typeface="Raleway Bold" charset="0"/>
+              </a:rPr>
+              <a:t>0 seconds</a:t>
+            </a:r>
+            <a:r>
+              <a:rPr lang="en-US" altLang="en-US" sz="900" b="0">
+                <a:solidFill>
+                  <a:schemeClr val="tx1"/>
+                </a:solidFill>
+                <a:latin typeface="Raleway" charset="0"/>
+                <a:cs typeface="Raleway" charset="0"/>
+              </a:rPr>
+              <a:t>, suggesting that Instagram advertising may require better targeting and stronger campaign content.</a:t>
+            </a:r>
+            <a:endParaRPr lang="en-US" altLang="en-US" sz="900" b="0">
+              <a:solidFill>
+                <a:schemeClr val="tx1"/>
+              </a:solidFill>
+              <a:latin typeface="Raleway" charset="0"/>
+              <a:cs typeface="Raleway" charset="0"/>
+            </a:endParaRPr>
+          </a:p>
+          <a:p>
+            <a:endParaRPr lang="en-US" altLang="en-US" sz="900" b="0">
+              <a:solidFill>
+                <a:schemeClr val="tx1"/>
+              </a:solidFill>
+              <a:latin typeface="Raleway" charset="0"/>
+              <a:cs typeface="Raleway" charset="0"/>
+            </a:endParaRPr>
+          </a:p>
+          <a:p>
+            <a:r>
+              <a:rPr lang="en-US" altLang="en-US" sz="900" b="0">
+                <a:solidFill>
+                  <a:schemeClr val="tx1"/>
+                </a:solidFill>
+                <a:latin typeface="Raleway" charset="0"/>
+                <a:cs typeface="Raleway" charset="0"/>
+              </a:rPr>
+              <a:t>Organic search produced the strongest traffic quality. </a:t>
+            </a:r>
+            <a:r>
+              <a:rPr lang="en-US" altLang="en-US" sz="900" b="1">
+                <a:solidFill>
+                  <a:schemeClr val="tx1"/>
+                </a:solidFill>
+                <a:latin typeface="Raleway Bold" charset="0"/>
+                <a:cs typeface="Raleway Bold" charset="0"/>
+              </a:rPr>
+              <a:t>Google organic </a:t>
+            </a:r>
+            <a:r>
+              <a:rPr lang="en-US" altLang="en-US" sz="900" b="0">
+                <a:solidFill>
+                  <a:schemeClr val="tx1"/>
+                </a:solidFill>
+                <a:latin typeface="Raleway" charset="0"/>
+                <a:cs typeface="Raleway" charset="0"/>
+              </a:rPr>
+              <a:t>achieved a </a:t>
+            </a:r>
+            <a:r>
+              <a:rPr lang="en-US" altLang="en-US" sz="900" b="1">
+                <a:solidFill>
+                  <a:schemeClr val="tx1"/>
+                </a:solidFill>
+                <a:latin typeface="Raleway Bold" charset="0"/>
+                <a:cs typeface="Raleway Bold" charset="0"/>
+              </a:rPr>
+              <a:t>65.77% engagement rate</a:t>
+            </a:r>
+            <a:r>
+              <a:rPr lang="en-US" altLang="en-US" sz="900" b="0">
+                <a:solidFill>
+                  <a:schemeClr val="tx1"/>
+                </a:solidFill>
+                <a:latin typeface="Raleway" charset="0"/>
+                <a:cs typeface="Raleway" charset="0"/>
+              </a:rPr>
+              <a:t>, an average engagement time of </a:t>
+            </a:r>
+            <a:r>
+              <a:rPr lang="en-US" altLang="en-US" sz="900" b="1">
+                <a:solidFill>
+                  <a:schemeClr val="tx1"/>
+                </a:solidFill>
+                <a:latin typeface="Raleway Bold" charset="0"/>
+                <a:cs typeface="Raleway Bold" charset="0"/>
+              </a:rPr>
+              <a:t>1 minute 12 seconds, and 5.85 events per session</a:t>
+            </a:r>
+            <a:r>
+              <a:rPr lang="en-US" altLang="en-US" sz="900" b="0">
+                <a:solidFill>
+                  <a:schemeClr val="tx1"/>
+                </a:solidFill>
+                <a:latin typeface="Raleway" charset="0"/>
+                <a:cs typeface="Raleway" charset="0"/>
+              </a:rPr>
+              <a:t>. </a:t>
+            </a:r>
+            <a:r>
+              <a:rPr lang="en-US" altLang="en-US" sz="900" b="1">
+                <a:solidFill>
+                  <a:schemeClr val="tx1"/>
+                </a:solidFill>
+                <a:latin typeface="Raleway Bold" charset="0"/>
+                <a:cs typeface="Raleway Bold" charset="0"/>
+              </a:rPr>
+              <a:t>Bing organic</a:t>
+            </a:r>
+            <a:r>
+              <a:rPr lang="en-US" altLang="en-US" sz="900" b="0">
+                <a:solidFill>
+                  <a:schemeClr val="tx1"/>
+                </a:solidFill>
+                <a:latin typeface="Raleway" charset="0"/>
+                <a:cs typeface="Raleway" charset="0"/>
+              </a:rPr>
+              <a:t> recorded a </a:t>
+            </a:r>
+            <a:r>
+              <a:rPr lang="en-US" altLang="en-US" sz="900" b="1">
+                <a:solidFill>
+                  <a:schemeClr val="tx1"/>
+                </a:solidFill>
+                <a:latin typeface="Raleway Bold" charset="0"/>
+                <a:cs typeface="Raleway Bold" charset="0"/>
+              </a:rPr>
+              <a:t>63.89% engagement rate</a:t>
+            </a:r>
+            <a:r>
+              <a:rPr lang="en-US" altLang="en-US" sz="900" b="0">
+                <a:solidFill>
+                  <a:schemeClr val="tx1"/>
+                </a:solidFill>
+                <a:latin typeface="Raleway" charset="0"/>
+                <a:cs typeface="Raleway" charset="0"/>
+              </a:rPr>
+              <a:t>, while </a:t>
+            </a:r>
+            <a:r>
+              <a:rPr lang="en-US" altLang="en-US" sz="900" b="1">
+                <a:solidFill>
+                  <a:schemeClr val="tx1"/>
+                </a:solidFill>
+                <a:latin typeface="Raleway Bold" charset="0"/>
+                <a:cs typeface="Raleway Bold" charset="0"/>
+              </a:rPr>
+              <a:t>techbytes / display</a:t>
+            </a:r>
+            <a:r>
+              <a:rPr lang="en-US" altLang="en-US" sz="900" b="0">
+                <a:solidFill>
+                  <a:schemeClr val="tx1"/>
+                </a:solidFill>
+                <a:latin typeface="Raleway" charset="0"/>
+                <a:cs typeface="Raleway" charset="0"/>
+              </a:rPr>
+              <a:t> delivered the highest engagement rate at </a:t>
+            </a:r>
+            <a:r>
+              <a:rPr lang="en-US" altLang="en-US" sz="900" b="1">
+                <a:solidFill>
+                  <a:schemeClr val="tx1"/>
+                </a:solidFill>
+                <a:latin typeface="Raleway Bold" charset="0"/>
+                <a:cs typeface="Raleway Bold" charset="0"/>
+              </a:rPr>
+              <a:t>87.5%</a:t>
+            </a:r>
+            <a:r>
+              <a:rPr lang="en-US" altLang="en-US" sz="900" b="0">
+                <a:solidFill>
+                  <a:schemeClr val="tx1"/>
+                </a:solidFill>
+                <a:latin typeface="Raleway" charset="0"/>
+                <a:cs typeface="Raleway" charset="0"/>
+              </a:rPr>
+              <a:t>.</a:t>
+            </a:r>
+            <a:endParaRPr lang="en-US" altLang="en-US" sz="900" b="0">
+              <a:solidFill>
+                <a:schemeClr val="tx1"/>
+              </a:solidFill>
+              <a:latin typeface="Raleway" charset="0"/>
+              <a:cs typeface="Raleway" charset="0"/>
+            </a:endParaRPr>
+          </a:p>
+          <a:p>
+            <a:endParaRPr lang="en-US" altLang="en-US" sz="900" b="0">
+              <a:solidFill>
+                <a:schemeClr val="tx1"/>
+              </a:solidFill>
+              <a:latin typeface="Raleway" charset="0"/>
+              <a:cs typeface="Raleway" charset="0"/>
+            </a:endParaRPr>
+          </a:p>
+          <a:p>
+            <a:r>
+              <a:rPr lang="en-US" altLang="en-US" sz="900" b="0">
+                <a:solidFill>
+                  <a:schemeClr val="tx1"/>
+                </a:solidFill>
+                <a:latin typeface="Raleway" charset="0"/>
+                <a:cs typeface="Raleway" charset="0"/>
+              </a:rPr>
+              <a:t>Overall, the website generated</a:t>
+            </a:r>
+            <a:r>
+              <a:rPr lang="en-US" altLang="en-US" sz="900" b="1">
+                <a:solidFill>
+                  <a:schemeClr val="tx1"/>
+                </a:solidFill>
+                <a:latin typeface="Raleway Bold" charset="0"/>
+                <a:cs typeface="Raleway Bold" charset="0"/>
+              </a:rPr>
+              <a:t> 4,212 sessions </a:t>
+            </a:r>
+            <a:r>
+              <a:rPr lang="en-US" altLang="en-US" sz="900" b="0">
+                <a:solidFill>
+                  <a:schemeClr val="tx1"/>
+                </a:solidFill>
+                <a:latin typeface="Raleway" charset="0"/>
+                <a:cs typeface="Raleway" charset="0"/>
+              </a:rPr>
+              <a:t>and </a:t>
+            </a:r>
+            <a:r>
+              <a:rPr lang="en-US" altLang="en-US" sz="900" b="1">
+                <a:solidFill>
+                  <a:schemeClr val="tx1"/>
+                </a:solidFill>
+                <a:latin typeface="Raleway Bold" charset="0"/>
+                <a:cs typeface="Raleway Bold" charset="0"/>
+              </a:rPr>
+              <a:t>1,345 engaged sessions</a:t>
+            </a:r>
+            <a:r>
+              <a:rPr lang="en-US" altLang="en-US" sz="900" b="0">
+                <a:solidFill>
+                  <a:schemeClr val="tx1"/>
+                </a:solidFill>
+                <a:latin typeface="Raleway" charset="0"/>
+                <a:cs typeface="Raleway" charset="0"/>
+              </a:rPr>
+              <a:t>, with an overall </a:t>
+            </a:r>
+            <a:r>
+              <a:rPr lang="en-US" altLang="en-US" sz="900" b="1">
+                <a:solidFill>
+                  <a:schemeClr val="tx1"/>
+                </a:solidFill>
+                <a:latin typeface="Raleway Bold" charset="0"/>
+                <a:cs typeface="Raleway Bold" charset="0"/>
+              </a:rPr>
+              <a:t>engagement rate </a:t>
+            </a:r>
+            <a:r>
+              <a:rPr lang="en-US" altLang="en-US" sz="900" b="0">
+                <a:solidFill>
+                  <a:schemeClr val="tx1"/>
+                </a:solidFill>
+                <a:latin typeface="Raleway" charset="0"/>
+                <a:cs typeface="Raleway" charset="0"/>
+              </a:rPr>
+              <a:t>of</a:t>
+            </a:r>
+            <a:r>
+              <a:rPr lang="en-US" altLang="en-US" sz="900" b="1">
+                <a:solidFill>
+                  <a:schemeClr val="tx1"/>
+                </a:solidFill>
+                <a:latin typeface="Raleway Bold" charset="0"/>
+                <a:cs typeface="Raleway Bold" charset="0"/>
+              </a:rPr>
+              <a:t> 31.93%</a:t>
+            </a:r>
+            <a:r>
+              <a:rPr lang="en-US" altLang="en-US" sz="900" b="0">
+                <a:solidFill>
+                  <a:schemeClr val="tx1"/>
+                </a:solidFill>
+                <a:latin typeface="Raleway" charset="0"/>
+                <a:cs typeface="Raleway" charset="0"/>
+              </a:rPr>
+              <a:t>. While paid campaigns drive most traffic, organic search and display sources encourage deeper engagement, creating opportunities to strengthen SEO and improve weaker paid social campaigns.</a:t>
+            </a:r>
+            <a:endParaRPr lang="en-US" altLang="en-US" sz="900" b="0">
+              <a:solidFill>
+                <a:schemeClr val="tx1"/>
+              </a:solidFill>
+              <a:latin typeface="Raleway" charset="0"/>
+              <a:cs typeface="Raleway" charset="0"/>
+            </a:endParaRPr>
+          </a:p>
+        </p:txBody>
+      </p:sp>
+      <p:grpSp>
+        <p:nvGrpSpPr>
+          <p:cNvPr id="19" name="object 8"/>
+          <p:cNvGrpSpPr/>
+          <p:nvPr/>
+        </p:nvGrpSpPr>
+        <p:grpSpPr>
+          <a:xfrm>
+            <a:off x="4155947" y="1283380"/>
+            <a:ext cx="4948181" cy="3718640"/>
+            <a:chOff x="4155947" y="1377441"/>
+            <a:chExt cx="4846320" cy="3624579"/>
+          </a:xfrm>
+        </p:grpSpPr>
+        <p:sp>
+          <p:nvSpPr>
+            <p:cNvPr id="20" name="object 9"/>
+            <p:cNvSpPr/>
+            <p:nvPr/>
+          </p:nvSpPr>
+          <p:spPr>
+            <a:xfrm>
+              <a:off x="4155947" y="1377441"/>
+              <a:ext cx="4846320" cy="3624579"/>
+            </a:xfrm>
+            <a:custGeom>
+              <a:avLst/>
+              <a:gdLst/>
+              <a:ahLst/>
+              <a:cxnLst/>
+              <a:rect l="l" t="t" r="r" b="b"/>
+              <a:pathLst>
+                <a:path w="4846320" h="3624579">
+                  <a:moveTo>
+                    <a:pt x="4846320" y="0"/>
+                  </a:moveTo>
+                  <a:lnTo>
+                    <a:pt x="0" y="0"/>
+                  </a:lnTo>
+                  <a:lnTo>
+                    <a:pt x="0" y="3624199"/>
+                  </a:lnTo>
+                  <a:lnTo>
+                    <a:pt x="4846320" y="3624199"/>
+                  </a:lnTo>
+                  <a:lnTo>
+                    <a:pt x="4846320" y="0"/>
+                  </a:lnTo>
+                  <a:close/>
+                </a:path>
+              </a:pathLst>
+            </a:custGeom>
+            <a:solidFill>
+              <a:srgbClr val="F0F5F8"/>
+            </a:solidFill>
+          </p:spPr>
+          <p:txBody>
+            <a:bodyPr wrap="square" lIns="0" tIns="0" rIns="0" bIns="0" rtlCol="0"/>
+            <a:lstStyle/>
+            <a:p>
+              <a:endParaRPr>
+                <a:latin typeface="Raleway" pitchFamily="2" charset="77"/>
+              </a:endParaRPr>
+            </a:p>
+          </p:txBody>
+        </p:sp>
+        <p:sp>
+          <p:nvSpPr>
+            <p:cNvPr id="21" name="object 10"/>
+            <p:cNvSpPr/>
+            <p:nvPr/>
+          </p:nvSpPr>
+          <p:spPr>
+            <a:xfrm>
+              <a:off x="4155947" y="1377441"/>
+              <a:ext cx="4846320" cy="3624579"/>
+            </a:xfrm>
+            <a:custGeom>
+              <a:avLst/>
+              <a:gdLst/>
+              <a:ahLst/>
+              <a:cxnLst/>
+              <a:rect l="l" t="t" r="r" b="b"/>
+              <a:pathLst>
+                <a:path w="4846320" h="3624579">
+                  <a:moveTo>
+                    <a:pt x="0" y="3624199"/>
+                  </a:moveTo>
+                  <a:lnTo>
+                    <a:pt x="4846320" y="3624199"/>
+                  </a:lnTo>
+                  <a:lnTo>
+                    <a:pt x="4846320" y="0"/>
+                  </a:lnTo>
+                  <a:lnTo>
+                    <a:pt x="0" y="0"/>
+                  </a:lnTo>
+                  <a:lnTo>
+                    <a:pt x="0" y="3624199"/>
+                  </a:lnTo>
+                  <a:close/>
+                </a:path>
+              </a:pathLst>
+            </a:custGeom>
+            <a:ln w="9152">
+              <a:solidFill>
+                <a:srgbClr val="E1E8EF"/>
+              </a:solidFill>
+            </a:ln>
+          </p:spPr>
+          <p:txBody>
+            <a:bodyPr wrap="square" lIns="0" tIns="0" rIns="0" bIns="0" rtlCol="0"/>
+            <a:lstStyle/>
+            <a:p>
+              <a:endParaRPr>
+                <a:latin typeface="Raleway" pitchFamily="2" charset="77"/>
+              </a:endParaRPr>
+            </a:p>
+          </p:txBody>
+        </p:sp>
+      </p:grpSp>
+      <p:pic>
+        <p:nvPicPr>
+          <p:cNvPr id="33" name="Picture 32" descr="Screenshot 2026-07-24 at 10.53.03"/>
+          <p:cNvPicPr>
+            <a:picLocks noChangeAspect="1"/>
+          </p:cNvPicPr>
+          <p:nvPr/>
+        </p:nvPicPr>
+        <p:blipFill>
+          <a:blip r:embed="rId1"/>
+          <a:stretch>
+            <a:fillRect/>
+          </a:stretch>
+        </p:blipFill>
+        <p:spPr>
+          <a:xfrm>
+            <a:off x="4258310" y="1501140"/>
+            <a:ext cx="4742815" cy="2962275"/>
+          </a:xfrm>
+          <a:prstGeom prst="rect">
+            <a:avLst/>
+          </a:prstGeom>
+        </p:spPr>
+      </p:pic>
+    </p:spTree>
+  </p:cSld>
+  <p:clrMapOvr>
+    <a:masterClrMapping/>
+  </p:clrMapOvr>
+</p:sld>
+</file>
+
+<file path=ppt/slides/slide8.xml><?xml version="1.0" encoding="utf-8"?>
 <p:sld xmlns:a="http://schemas.openxmlformats.org/drawingml/2006/main" xmlns:r="http://schemas.openxmlformats.org/officeDocument/2006/relationships" xmlns:p="http://schemas.openxmlformats.org/presentationml/2006/main" showMasterSp="0">
   <p:cSld>
     <p:spTree>
@@ -6007,109 +8658,12 @@
                 <a:latin typeface="Raleway" pitchFamily="2" charset="77"/>
                 <a:cs typeface="Times New Roman" panose="02020603050405020304"/>
               </a:rPr>
-              <a:t>Solid</a:t>
-            </a:r>
-            <a:r>
-              <a:rPr sz="1300" spc="-85">
-                <a:solidFill>
-                  <a:srgbClr val="334154"/>
-                </a:solidFill>
-                <a:latin typeface="Raleway" pitchFamily="2" charset="77"/>
-                <a:cs typeface="Times New Roman" panose="02020603050405020304"/>
-              </a:rPr>
-              <a:t> </a:t>
-            </a:r>
-            <a:r>
-              <a:rPr sz="1300">
-                <a:solidFill>
-                  <a:srgbClr val="334154"/>
-                </a:solidFill>
-                <a:latin typeface="Raleway" pitchFamily="2" charset="77"/>
-                <a:cs typeface="Times New Roman" panose="02020603050405020304"/>
-              </a:rPr>
-              <a:t>Foundation</a:t>
-            </a:r>
-            <a:r>
-              <a:rPr sz="1300" spc="-25">
-                <a:solidFill>
-                  <a:srgbClr val="334154"/>
-                </a:solidFill>
-                <a:latin typeface="Raleway" pitchFamily="2" charset="77"/>
-                <a:cs typeface="Times New Roman" panose="02020603050405020304"/>
-              </a:rPr>
-              <a:t> with</a:t>
-            </a:r>
-            <a:r>
-              <a:rPr sz="1300" spc="-30">
-                <a:solidFill>
-                  <a:srgbClr val="334154"/>
-                </a:solidFill>
-                <a:latin typeface="Raleway" pitchFamily="2" charset="77"/>
-                <a:cs typeface="Times New Roman" panose="02020603050405020304"/>
-              </a:rPr>
-              <a:t> </a:t>
-            </a:r>
-            <a:r>
-              <a:rPr sz="1300" spc="60">
-                <a:solidFill>
-                  <a:srgbClr val="334154"/>
-                </a:solidFill>
-                <a:latin typeface="Raleway" pitchFamily="2" charset="77"/>
-                <a:cs typeface="Times New Roman" panose="02020603050405020304"/>
-              </a:rPr>
-              <a:t>Room</a:t>
-            </a:r>
-            <a:r>
-              <a:rPr sz="1300" spc="-20">
-                <a:solidFill>
-                  <a:srgbClr val="334154"/>
-                </a:solidFill>
-                <a:latin typeface="Raleway" pitchFamily="2" charset="77"/>
-                <a:cs typeface="Times New Roman" panose="02020603050405020304"/>
-              </a:rPr>
-              <a:t> for</a:t>
-            </a:r>
-            <a:r>
-              <a:rPr sz="1300" spc="-10">
-                <a:solidFill>
-                  <a:srgbClr val="334154"/>
-                </a:solidFill>
-                <a:latin typeface="Raleway" pitchFamily="2" charset="77"/>
-                <a:cs typeface="Times New Roman" panose="02020603050405020304"/>
-              </a:rPr>
-              <a:t> </a:t>
-            </a:r>
-            <a:r>
-              <a:rPr sz="1300" spc="-30">
-                <a:solidFill>
-                  <a:srgbClr val="334154"/>
-                </a:solidFill>
-                <a:latin typeface="Raleway" pitchFamily="2" charset="77"/>
-                <a:cs typeface="Times New Roman" panose="02020603050405020304"/>
-              </a:rPr>
-              <a:t>Visibility</a:t>
-            </a:r>
-            <a:r>
-              <a:rPr sz="1300" spc="-45">
-                <a:solidFill>
-                  <a:srgbClr val="334154"/>
-                </a:solidFill>
-                <a:latin typeface="Raleway" pitchFamily="2" charset="77"/>
-                <a:cs typeface="Times New Roman" panose="02020603050405020304"/>
-              </a:rPr>
-              <a:t> </a:t>
-            </a:r>
-            <a:r>
-              <a:rPr sz="1300" spc="-10">
-                <a:solidFill>
-                  <a:srgbClr val="334154"/>
-                </a:solidFill>
-                <a:latin typeface="Raleway" pitchFamily="2" charset="77"/>
-                <a:cs typeface="Times New Roman" panose="02020603050405020304"/>
-              </a:rPr>
-              <a:t>Improvement</a:t>
+              <a:t>Robust Search Visibility and an 8% Click-Through Rate.</a:t>
             </a:r>
             <a:endParaRPr sz="1300">
+              <a:solidFill>
+                <a:srgbClr val="334154"/>
+              </a:solidFill>
               <a:latin typeface="Raleway" pitchFamily="2" charset="77"/>
               <a:cs typeface="Times New Roman" panose="02020603050405020304"/>
             </a:endParaRPr>
@@ -6125,7 +8679,7 @@
         <p:spPr>
           <a:xfrm>
             <a:off x="248628" y="1380283"/>
-            <a:ext cx="3595578" cy="3077845"/>
+            <a:ext cx="3595578" cy="2153920"/>
           </a:xfrm>
           <a:prstGeom prst="rect">
             <a:avLst/>
@@ -6153,7 +8707,7 @@
                 <a:latin typeface="Raleway" pitchFamily="2" charset="77"/>
                 <a:cs typeface="Times New Roman" panose="02020603050405020304"/>
               </a:rPr>
-              <a:t>With a total of </a:t>
+              <a:t>The brand achieved </a:t>
             </a:r>
             <a:r>
               <a:rPr lang="en-US" altLang="en-US" sz="1000" b="1" spc="-10">
@@ -6163,7 +8717,7 @@
                 <a:latin typeface="Raleway" pitchFamily="2" charset="77"/>
                 <a:cs typeface="Times New Roman" panose="02020603050405020304"/>
               </a:rPr>
-              <a:t>8.1K impressions</a:t>
+              <a:t>1.43K</a:t>
             </a:r>
             <a:r>
               <a:rPr lang="en-US" altLang="en-US" sz="1000" spc="-10">
@@ -6173,7 +8727,7 @@
                 <a:latin typeface="Raleway" pitchFamily="2" charset="77"/>
                 <a:cs typeface="Times New Roman" panose="02020603050405020304"/>
               </a:rPr>
-              <a:t>, the brand maintains strong visibility in search results, indicating broader keyword coverage and improving discoverability. From this exposure, the site generated </a:t>
+              <a:t> impressions, demonstrating significant presence within search results through robust keyword coverage and consistent discoverability. These impressions resulted in </a:t>
             </a:r>
             <a:r>
               <a:rPr lang="en-US" altLang="en-US" sz="1000" b="1" spc="-10">
@@ -6183,7 +8737,7 @@
                 <a:latin typeface="Raleway" pitchFamily="2" charset="77"/>
                 <a:cs typeface="Times New Roman" panose="02020603050405020304"/>
               </a:rPr>
-              <a:t>674 clicks</a:t>
+              <a:t>114</a:t>
             </a:r>
             <a:r>
               <a:rPr lang="en-US" altLang="en-US" sz="1000" spc="-10">
@@ -6193,7 +8747,7 @@
                 <a:latin typeface="Raleway" pitchFamily="2" charset="77"/>
                 <a:cs typeface="Times New Roman" panose="02020603050405020304"/>
               </a:rPr>
-              <a:t>, reflecting effective traffic acquisition from organic search.</a:t>
+              <a:t> clicks, signifying effective traffic acquisition from search engines.</a:t>
             </a:r>
             <a:endParaRPr lang="en-US" altLang="en-US" sz="1000" spc="-10">
               <a:solidFill>
@@ -6221,7 +8775,7 @@
                 <a:latin typeface="Raleway" pitchFamily="2" charset="77"/>
                 <a:cs typeface="Times New Roman" panose="02020603050405020304"/>
               </a:rPr>
-              <a:t>The </a:t>
+              <a:t>An average position of </a:t>
             </a:r>
             <a:r>
               <a:rPr lang="en-US" altLang="en-US" sz="1000" b="1" spc="-10">
@@ -6231,7 +8785,7 @@
                 <a:latin typeface="Raleway" pitchFamily="2" charset="77"/>
                 <a:cs typeface="Times New Roman" panose="02020603050405020304"/>
               </a:rPr>
-              <a:t>8.3% click-through rate (CTR)</a:t>
+              <a:t>9</a:t>
             </a:r>
             <a:r>
               <a:rPr lang="en-US" altLang="en-US" sz="1000" spc="-10">
@@ -6241,7 +8795,7 @@
                 <a:latin typeface="Raleway" pitchFamily="2" charset="77"/>
                 <a:cs typeface="Times New Roman" panose="02020603050405020304"/>
               </a:rPr>
-              <a:t> demonstrates strong conversion of impressions into clicks, suggesting that search listings are well optimised and aligned with user intent.</a:t>
+              <a:t> is highly encouraging, as it positions the website on the initial page of search results for numerous queries. This validates strong SEO foundations and competitive ranking strength.</a:t>
             </a:r>
             <a:endParaRPr lang="en-US" altLang="en-US" sz="1000" spc="-10">
               <a:solidFill>
@@ -6269,55 +8823,7 @@
                 <a:latin typeface="Raleway" pitchFamily="2" charset="77"/>
                 <a:cs typeface="Times New Roman" panose="02020603050405020304"/>
               </a:rPr>
-              <a:t>An</a:t>
-            </a:r>
-            <a:r>
-              <a:rPr lang="en-US" altLang="en-US" sz="1000" b="1" spc="-10">
-                <a:solidFill>
-                  <a:schemeClr val="tx1"/>
-                </a:solidFill>
-                <a:latin typeface="Raleway" pitchFamily="2" charset="77"/>
-                <a:cs typeface="Times New Roman" panose="02020603050405020304"/>
-              </a:rPr>
-              <a:t> average position of 6.8</a:t>
-            </a:r>
-            <a:r>
-              <a:rPr lang="en-US" altLang="en-US" sz="1000" spc="-10">
-                <a:solidFill>
-                  <a:schemeClr val="tx1"/>
-                </a:solidFill>
-                <a:latin typeface="Raleway" pitchFamily="2" charset="77"/>
-                <a:cs typeface="Times New Roman" panose="02020603050405020304"/>
-              </a:rPr>
-              <a:t> highlights solid ranking performance, with the website appearing consistently on the first page of search results, reinforcing a competitive SEO presence.</a:t>
-            </a:r>
-            <a:endParaRPr lang="en-US" altLang="en-US" sz="1000" spc="-10">
-              <a:solidFill>
-                <a:schemeClr val="tx1"/>
-              </a:solidFill>
-              <a:latin typeface="Raleway" pitchFamily="2" charset="77"/>
-              <a:cs typeface="Times New Roman" panose="02020603050405020304"/>
-            </a:endParaRPr>
-          </a:p>
-          <a:p>
-            <a:endParaRPr lang="en-US" altLang="en-US" sz="1000" spc="-10">
-              <a:solidFill>
-                <a:schemeClr val="tx1"/>
-              </a:solidFill>
-              <a:latin typeface="Raleway" pitchFamily="2" charset="77"/>
-              <a:cs typeface="Times New Roman" panose="02020603050405020304"/>
-            </a:endParaRPr>
-          </a:p>
-          <a:p>
-            <a:r>
-              <a:rPr lang="en-US" altLang="en-US" sz="1000" spc="-10">
-                <a:solidFill>
-                  <a:schemeClr val="tx1"/>
-                </a:solidFill>
-                <a:latin typeface="Raleway" pitchFamily="2" charset="77"/>
-                <a:cs typeface="Times New Roman" panose="02020603050405020304"/>
-              </a:rPr>
-              <a:t>From a trend perspective, performance shows fluctuations throughout the period, with a noticeable spike toward the end of the month, indicating increased visibility and a surge in user interest.</a:t>
+              <a:t>Performance appears consistently stable across the period, with normal fluctuations and an absence of major declines, indicating sustained search demand and visibility.</a:t>
             </a:r>
             <a:endParaRPr lang="en-US" altLang="en-US" sz="1000" spc="-10">
               <a:solidFill>
@@ -6454,7 +8960,7 @@
       </p:grpSp>
       <p:pic>
         <p:nvPicPr>
-          <p:cNvPr id="10" name="Picture 9" descr="Screenshot 2026-03-30 at 12.55.07"/>
+          <p:cNvPr id="9" name="Picture 8" descr="search_console.png"/>
           <p:cNvPicPr>
             <a:picLocks noChangeAspect="1"/>
           </p:cNvPicPr>
@@ -6468,7 +8974,31 @@
         </p:blipFill>
         <p:spPr>
           <a:xfrm>
-            <a:off x="3962400" y="2270125"/>
+            <a:off x="3994150" y="1584325"/>
+            <a:ext cx="4724400" cy="1435735"/>
+          </a:xfrm>
+          <a:prstGeom prst="rect">
+            <a:avLst/>
+          </a:prstGeom>
+        </p:spPr>
+      </p:pic>
+      <p:pic>
+        <p:nvPicPr>
+          <p:cNvPr id="10" name="Picture 9" descr="search_console.png"/>
+          <p:cNvPicPr>
+            <a:picLocks noChangeAspect="1"/>
+          </p:cNvPicPr>
+          <p:nvPr/>
+        </p:nvPicPr>
+        <p:blipFill>
+          <a:blip r:embed="rId1"/>
+          <a:stretch>
+            <a:fillRect/>
+          </a:stretch>
+        </p:blipFill>
+        <p:spPr>
+          <a:xfrm>
+            <a:off x="3962400" y="1584325"/>
             <a:ext cx="4724400" cy="1435735"/>
           </a:xfrm>
           <a:prstGeom prst="rect">
@@ -6484,8 +9014,8 @@
 </p:sld>
 </file>
 
-<file path=ppt/slides/slide7.xml><?xml version="1.0" encoding="utf-8"?>
-<p:sld xmlns:a="http://schemas.openxmlformats.org/drawingml/2006/main" xmlns:r="http://schemas.openxmlformats.org/officeDocument/2006/relationships" xmlns:p="http://schemas.openxmlformats.org/presentationml/2006/main" showMasterSp="0">
+<file path=ppt/slides/slide9.xml><?xml version="1.0" encoding="utf-8"?>
+<p:sld xmlns:a="http://schemas.openxmlformats.org/drawingml/2006/main" xmlns:r="http://schemas.openxmlformats.org/officeDocument/2006/relationships" xmlns:p="http://schemas.openxmlformats.org/presentationml/2006/main">
   <p:cSld>
     <p:spTree>
       <p:nvGrpSpPr>
@@ -6503,7 +9033,60 @@
       </p:grpSpPr>
       <p:sp>
         <p:nvSpPr>
-          <p:cNvPr id="2" name="object 2"/>
+          <p:cNvPr id="12" name="object 2"/>
+          <p:cNvSpPr/>
+          <p:nvPr/>
+        </p:nvSpPr>
+        <p:spPr>
+          <a:xfrm>
+            <a:off x="428625" y="428866"/>
+            <a:ext cx="57150" cy="609600"/>
+          </a:xfrm>
+          <a:custGeom>
+            <a:avLst/>
+            <a:gdLst/>
+            <a:ahLst/>
+            <a:cxnLst/>
+            <a:rect l="l" t="t" r="r" b="b"/>
+            <a:pathLst>
+              <a:path w="57150" h="609600">
+                <a:moveTo>
+                  <a:pt x="56756" y="0"/>
+                </a:moveTo>
+                <a:lnTo>
+                  <a:pt x="0" y="0"/>
+                </a:lnTo>
+                <a:lnTo>
+                  <a:pt x="0" y="609485"/>
+                </a:lnTo>
+                <a:lnTo>
+                  <a:pt x="56756" y="609485"/>
+                </a:lnTo>
+                <a:lnTo>
+                  <a:pt x="56756" y="0"/>
+                </a:lnTo>
+                <a:close/>
+              </a:path>
+            </a:pathLst>
+          </a:custGeom>
+          <a:solidFill>
+            <a:srgbClr val="1E3988"/>
+          </a:solidFill>
+        </p:spPr>
+        <p:txBody>
+          <a:bodyPr wrap="square" lIns="0" tIns="0" rIns="0" bIns="0" rtlCol="0"/>
+          <a:lstStyle/>
+          <a:p>
+            <a:endParaRPr>
+              <a:latin typeface="Raleway Regular" charset="0"/>
+              <a:cs typeface="Raleway Regular" charset="0"/>
+            </a:endParaRPr>
+          </a:p>
+        </p:txBody>
+      </p:sp>
+      <p:sp>
+        <p:nvSpPr>
+          <p:cNvPr id="13" name="object 3"/>
           <p:cNvSpPr txBox="1">
             <a:spLocks noGrp="1"/>
           </p:cNvSpPr>
@@ -6513,15 +9096,15 @@
         </p:nvSpPr>
         <p:spPr>
           <a:xfrm>
-            <a:off x="401612" y="346709"/>
-            <a:ext cx="2722588" cy="334707"/>
+            <a:off x="631190" y="381000"/>
+            <a:ext cx="3439795" cy="335915"/>
           </a:xfrm>
           <a:prstGeom prst="rect">
             <a:avLst/>
           </a:prstGeom>
         </p:spPr>
         <p:txBody>
-          <a:bodyPr vert="horz" wrap="square" lIns="0" tIns="11430" rIns="0" bIns="0" rtlCol="0">
+          <a:bodyPr vert="horz" wrap="square" lIns="0" tIns="13335" rIns="0" bIns="0" rtlCol="0">
             <a:spAutoFit/>
           </a:bodyPr>
           <a:lstStyle/>
@@ -6531,882 +9114,125 @@
                 <a:spcPct val="100000"/>
               </a:lnSpc>
               <a:spcBef>
-                <a:spcPts val="90"/>
+                <a:spcPts val="105"/>
               </a:spcBef>
             </a:pPr>
             <a:r>
-              <a:rPr spc="60">
-                <a:latin typeface="Raleway" pitchFamily="2" charset="77"/>
-                <a:cs typeface="Times New Roman" panose="02020603050405020304"/>
-              </a:rPr>
-              <a:t>Recommendations</a:t>
-            </a:r>
-            <a:endParaRPr spc="60">
-              <a:latin typeface="Raleway" pitchFamily="2" charset="77"/>
-              <a:cs typeface="Times New Roman" panose="02020603050405020304"/>
+              <a:rPr lang="en-US" dirty="0">
+                <a:latin typeface="Raleway Bold" charset="0"/>
+                <a:cs typeface="Raleway Bold" charset="0"/>
+              </a:rPr>
+              <a:t>Top Queries</a:t>
+            </a:r>
+            <a:endParaRPr lang="en-US" spc="-10" dirty="0">
+              <a:latin typeface="Raleway Bold" charset="0"/>
+              <a:cs typeface="Raleway Bold" charset="0"/>
             </a:endParaRPr>
           </a:p>
         </p:txBody>
       </p:sp>
       <p:sp>
         <p:nvSpPr>
-          <p:cNvPr id="3" name="object 3"/>
+          <p:cNvPr id="14" name="object 5"/>
           <p:cNvSpPr txBox="1"/>
           <p:nvPr/>
         </p:nvSpPr>
         <p:spPr>
           <a:xfrm>
-            <a:off x="616660" y="745680"/>
-            <a:ext cx="3817709" cy="212238"/>
+            <a:off x="838200" y="3641725"/>
+            <a:ext cx="6700520" cy="485775"/>
+          </a:xfrm>
+          <a:prstGeom prst="rect">
+            <a:avLst/>
+          </a:prstGeom>
+          <a:solidFill>
+            <a:srgbClr val="F8F8FA"/>
+          </a:solidFill>
+          <a:ln w="9157">
+            <a:solidFill>
+              <a:srgbClr val="E0E8EE"/>
+            </a:solidFill>
+          </a:ln>
+        </p:spPr>
+        <p:txBody>
+          <a:bodyPr vert="horz" wrap="square" lIns="0" tIns="12065" rIns="0" bIns="0" rtlCol="0">
+            <a:spAutoFit/>
+          </a:bodyPr>
+          <a:lstStyle/>
+          <a:p>
+            <a:pPr marL="171450" indent="-171450">
+              <a:lnSpc>
+                <a:spcPct val="100000"/>
+              </a:lnSpc>
+              <a:spcBef>
+                <a:spcPts val="95"/>
+              </a:spcBef>
+              <a:buFont typeface="Arial" panose="020B0704020202020204" pitchFamily="34" charset="0"/>
+              <a:buChar char="•"/>
+            </a:pPr>
+            <a:r>
+              <a:rPr lang="en-US" altLang="en-US" sz="1000" dirty="0">
+                <a:solidFill>
+                  <a:srgbClr val="334153"/>
+                </a:solidFill>
+                <a:latin typeface="Raleway Regular" charset="0"/>
+                <a:cs typeface="Raleway Regular" charset="0"/>
+              </a:rPr>
+              <a:t>Brand-driven searches dominate, with terms like “Econet Infraco” (55 clicks) and “Infraco Econet” (9 clicks) leading performance, indicating strong brand recognition and direct user intent​​</a:t>
+            </a:r>
+            <a:endParaRPr lang="en-US" altLang="en-US" sz="1000" dirty="0">
+              <a:solidFill>
+                <a:srgbClr val="334153"/>
+              </a:solidFill>
+              <a:latin typeface="Raleway Regular" charset="0"/>
+              <a:cs typeface="Raleway Regular" charset="0"/>
+            </a:endParaRPr>
+          </a:p>
+          <a:p>
+            <a:pPr marL="171450" indent="-171450">
+              <a:lnSpc>
+                <a:spcPct val="100000"/>
+              </a:lnSpc>
+              <a:spcBef>
+                <a:spcPts val="95"/>
+              </a:spcBef>
+              <a:buFont typeface="Arial" panose="020B0704020202020204" pitchFamily="34" charset="0"/>
+              <a:buChar char="•"/>
+            </a:pPr>
+            <a:endParaRPr lang="en-US" altLang="en-US" sz="1000" dirty="0">
+              <a:solidFill>
+                <a:srgbClr val="334153"/>
+              </a:solidFill>
+              <a:latin typeface="Raleway Regular" charset="0"/>
+              <a:cs typeface="Raleway Regular" charset="0"/>
+            </a:endParaRPr>
+          </a:p>
+        </p:txBody>
+      </p:sp>
+      <p:pic>
+        <p:nvPicPr>
+          <p:cNvPr id="16" name="Picture 15" descr="Screenshot 2026-07-24 at 10.47.02"/>
+          <p:cNvPicPr>
+            <a:picLocks noChangeAspect="1"/>
+          </p:cNvPicPr>
+          <p:nvPr/>
+        </p:nvPicPr>
+        <p:blipFill>
+          <a:blip r:embed="rId1"/>
+          <a:stretch>
+            <a:fillRect/>
+          </a:stretch>
+        </p:blipFill>
+        <p:spPr>
+          <a:xfrm>
+            <a:off x="685800" y="838200"/>
+            <a:ext cx="7310120" cy="2682240"/>
           </a:xfrm>
           <a:prstGeom prst="rect">
             <a:avLst/>
           </a:prstGeom>
         </p:spPr>
-        <p:txBody>
-          <a:bodyPr vert="horz" wrap="square" lIns="0" tIns="12065" rIns="0" bIns="0" rtlCol="0" anchor="t">
-            <a:spAutoFit/>
-          </a:bodyPr>
-          <a:lstStyle/>
-          <a:p>
-            <a:pPr marL="12700">
-              <a:spcBef>
-                <a:spcPts val="95"/>
-              </a:spcBef>
-            </a:pPr>
-            <a:r>
-              <a:rPr lang="en-GB" sz="1300">
-                <a:solidFill>
-                  <a:srgbClr val="334154"/>
-                </a:solidFill>
-                <a:latin typeface="Raleway" pitchFamily="2" charset="77"/>
-                <a:cs typeface="Times New Roman" panose="02020603050405020304"/>
-              </a:rPr>
-              <a:t>Three Key </a:t>
-            </a:r>
-            <a:r>
-              <a:rPr lang="en-GB" sz="1300" spc="-35">
-                <a:solidFill>
-                  <a:srgbClr val="334154"/>
-                </a:solidFill>
-                <a:latin typeface="Raleway" pitchFamily="2" charset="77"/>
-                <a:cs typeface="Times New Roman" panose="02020603050405020304"/>
-              </a:rPr>
-              <a:t>Initiatives</a:t>
-            </a:r>
-            <a:r>
-              <a:rPr sz="1300" spc="75">
-                <a:solidFill>
-                  <a:srgbClr val="334154"/>
-                </a:solidFill>
-                <a:latin typeface="Raleway" pitchFamily="2" charset="77"/>
-                <a:cs typeface="Times New Roman" panose="02020603050405020304"/>
-              </a:rPr>
-              <a:t> </a:t>
-            </a:r>
-            <a:r>
-              <a:rPr sz="1300" spc="-50">
-                <a:solidFill>
-                  <a:srgbClr val="334154"/>
-                </a:solidFill>
-                <a:latin typeface="Raleway" pitchFamily="2" charset="77"/>
-                <a:cs typeface="Times New Roman" panose="02020603050405020304"/>
-              </a:rPr>
-              <a:t>to</a:t>
-            </a:r>
-            <a:r>
-              <a:rPr sz="1300" spc="-20">
-                <a:solidFill>
-                  <a:srgbClr val="334154"/>
-                </a:solidFill>
-                <a:latin typeface="Raleway" pitchFamily="2" charset="77"/>
-                <a:cs typeface="Times New Roman" panose="02020603050405020304"/>
-              </a:rPr>
-              <a:t> </a:t>
-            </a:r>
-            <a:r>
-              <a:rPr sz="1300">
-                <a:solidFill>
-                  <a:srgbClr val="334154"/>
-                </a:solidFill>
-                <a:latin typeface="Raleway" pitchFamily="2" charset="77"/>
-                <a:cs typeface="Times New Roman" panose="02020603050405020304"/>
-              </a:rPr>
-              <a:t>Enhance </a:t>
-            </a:r>
-            <a:r>
-              <a:rPr sz="1300" spc="-10">
-                <a:solidFill>
-                  <a:srgbClr val="334154"/>
-                </a:solidFill>
-                <a:latin typeface="Raleway" pitchFamily="2" charset="77"/>
-                <a:cs typeface="Times New Roman" panose="02020603050405020304"/>
-              </a:rPr>
-              <a:t>Performance</a:t>
-            </a:r>
-            <a:endParaRPr sz="1300">
-              <a:latin typeface="Raleway" pitchFamily="2" charset="77"/>
-              <a:cs typeface="Times New Roman" panose="02020603050405020304"/>
-            </a:endParaRPr>
-          </a:p>
-        </p:txBody>
-      </p:sp>
-      <p:grpSp>
-        <p:nvGrpSpPr>
-          <p:cNvPr id="4" name="object 4"/>
-          <p:cNvGrpSpPr/>
-          <p:nvPr/>
-        </p:nvGrpSpPr>
-        <p:grpSpPr>
-          <a:xfrm>
-            <a:off x="152400" y="1117600"/>
-            <a:ext cx="5112385" cy="3714750"/>
-            <a:chOff x="222076" y="1217269"/>
-            <a:chExt cx="5182282" cy="3469004"/>
-          </a:xfrm>
-        </p:grpSpPr>
-        <p:sp>
-          <p:nvSpPr>
-            <p:cNvPr id="5" name="object 5"/>
-            <p:cNvSpPr/>
-            <p:nvPr/>
-          </p:nvSpPr>
-          <p:spPr>
-            <a:xfrm>
-              <a:off x="429768" y="1217269"/>
-              <a:ext cx="4974590" cy="3469004"/>
-            </a:xfrm>
-            <a:custGeom>
-              <a:avLst/>
-              <a:gdLst/>
-              <a:ahLst/>
-              <a:cxnLst/>
-              <a:rect l="l" t="t" r="r" b="b"/>
-              <a:pathLst>
-                <a:path w="4974590" h="3469004">
-                  <a:moveTo>
-                    <a:pt x="4974335" y="0"/>
-                  </a:moveTo>
-                  <a:lnTo>
-                    <a:pt x="0" y="0"/>
-                  </a:lnTo>
-                  <a:lnTo>
-                    <a:pt x="0" y="3468624"/>
-                  </a:lnTo>
-                  <a:lnTo>
-                    <a:pt x="4974335" y="3468624"/>
-                  </a:lnTo>
-                  <a:lnTo>
-                    <a:pt x="4974335" y="0"/>
-                  </a:lnTo>
-                  <a:close/>
-                </a:path>
-              </a:pathLst>
-            </a:custGeom>
-            <a:solidFill>
-              <a:srgbClr val="F8F9FB"/>
-            </a:solidFill>
-          </p:spPr>
-          <p:txBody>
-            <a:bodyPr wrap="square" lIns="0" tIns="0" rIns="0" bIns="0" rtlCol="0"/>
-            <a:lstStyle/>
-            <a:p>
-              <a:endParaRPr>
-                <a:latin typeface="Raleway" pitchFamily="2" charset="77"/>
-                <a:cs typeface="Times New Roman" panose="02020603050405020304"/>
-              </a:endParaRPr>
-            </a:p>
-          </p:txBody>
-        </p:sp>
-        <p:sp>
-          <p:nvSpPr>
-            <p:cNvPr id="6" name="object 6"/>
-            <p:cNvSpPr/>
-            <p:nvPr/>
-          </p:nvSpPr>
-          <p:spPr>
-            <a:xfrm>
-              <a:off x="222076" y="1217269"/>
-              <a:ext cx="27940" cy="3469004"/>
-            </a:xfrm>
-            <a:custGeom>
-              <a:avLst/>
-              <a:gdLst/>
-              <a:ahLst/>
-              <a:cxnLst/>
-              <a:rect l="l" t="t" r="r" b="b"/>
-              <a:pathLst>
-                <a:path w="27940" h="3469004">
-                  <a:moveTo>
-                    <a:pt x="27431" y="0"/>
-                  </a:moveTo>
-                  <a:lnTo>
-                    <a:pt x="0" y="0"/>
-                  </a:lnTo>
-                  <a:lnTo>
-                    <a:pt x="0" y="3468624"/>
-                  </a:lnTo>
-                  <a:lnTo>
-                    <a:pt x="27431" y="3468624"/>
-                  </a:lnTo>
-                  <a:lnTo>
-                    <a:pt x="27431" y="0"/>
-                  </a:lnTo>
-                  <a:close/>
-                </a:path>
-              </a:pathLst>
-            </a:custGeom>
-            <a:solidFill>
-              <a:srgbClr val="1E3989"/>
-            </a:solidFill>
-          </p:spPr>
-          <p:txBody>
-            <a:bodyPr wrap="square" lIns="0" tIns="0" rIns="0" bIns="0" rtlCol="0"/>
-            <a:lstStyle/>
-            <a:p>
-              <a:endParaRPr>
-                <a:latin typeface="Raleway" pitchFamily="2" charset="77"/>
-                <a:cs typeface="Times New Roman" panose="02020603050405020304"/>
-              </a:endParaRPr>
-            </a:p>
-          </p:txBody>
-        </p:sp>
-      </p:grpSp>
-      <p:sp>
-        <p:nvSpPr>
-          <p:cNvPr id="7" name="object 7"/>
-          <p:cNvSpPr txBox="1"/>
-          <p:nvPr/>
-        </p:nvSpPr>
-        <p:spPr>
-          <a:xfrm>
-            <a:off x="240030" y="1217295"/>
-            <a:ext cx="5195570" cy="3753485"/>
-          </a:xfrm>
-          <a:prstGeom prst="rect">
-            <a:avLst/>
-          </a:prstGeom>
-        </p:spPr>
-        <p:txBody>
-          <a:bodyPr vert="horz" wrap="square" lIns="0" tIns="14604" rIns="0" bIns="0" rtlCol="0" anchor="t">
-            <a:spAutoFit/>
-          </a:bodyPr>
-          <a:lstStyle/>
-          <a:p>
-            <a:pPr marL="0" indent="0" algn="l" hangingPunct="0">
-              <a:buNone/>
-              <a:defRPr sz="1800" b="0" i="0" u="none" strike="noStrike" kern="0" cap="none" spc="0" baseline="0">
-                <a:solidFill>
-                  <a:srgbClr val="000000"/>
-                </a:solidFill>
-                <a:uFillTx/>
-              </a:defRPr>
-            </a:pPr>
-            <a:r>
-              <a:rPr lang="en-US" altLang="en-US" sz="900" b="1">
-                <a:solidFill>
-                  <a:srgbClr val="000000"/>
-                </a:solidFill>
-                <a:latin typeface="Raleway" pitchFamily="2" charset="77"/>
-                <a:ea typeface="Calibri"/>
-                <a:cs typeface="Calibri"/>
-              </a:rPr>
-              <a:t>1. Homepage and Product Promotion </a:t>
-            </a:r>
-            <a:r>
-              <a:rPr lang="en-US" altLang="en-US" sz="900">
-                <a:solidFill>
-                  <a:srgbClr val="000000"/>
-                </a:solidFill>
-                <a:latin typeface="Raleway" pitchFamily="2" charset="77"/>
-                <a:ea typeface="Calibri"/>
-                <a:cs typeface="Calibri"/>
-              </a:rPr>
-              <a:t>                                                                                                                               </a:t>
-            </a:r>
-            <a:endParaRPr lang="en-US" altLang="en-US" sz="900">
-              <a:solidFill>
-                <a:srgbClr val="000000"/>
-              </a:solidFill>
-              <a:latin typeface="Raleway" pitchFamily="2" charset="77"/>
-              <a:ea typeface="Calibri"/>
-              <a:cs typeface="Calibri"/>
-            </a:endParaRPr>
-          </a:p>
-          <a:p>
-            <a:pPr marL="0" indent="0" algn="l" hangingPunct="0">
-              <a:buNone/>
-              <a:defRPr sz="1800" b="0" i="0" u="none" strike="noStrike" kern="0" cap="none" spc="0" baseline="0">
-                <a:solidFill>
-                  <a:srgbClr val="000000"/>
-                </a:solidFill>
-                <a:uFillTx/>
-              </a:defRPr>
-            </a:pPr>
-            <a:r>
-              <a:rPr lang="en-US" altLang="en-US" sz="900">
-                <a:solidFill>
-                  <a:srgbClr val="000000"/>
-                </a:solidFill>
-                <a:latin typeface="Raleway" pitchFamily="2" charset="77"/>
-                <a:ea typeface="Calibri"/>
-                <a:cs typeface="Calibri"/>
-              </a:rPr>
-              <a:t>We recommend strengthening product visibility on the Econet InfraCo website via the following:                                                                   </a:t>
-            </a:r>
-            <a:endParaRPr lang="en-US" altLang="en-US" sz="900">
-              <a:solidFill>
-                <a:srgbClr val="000000"/>
-              </a:solidFill>
-              <a:latin typeface="Raleway" pitchFamily="2" charset="77"/>
-              <a:ea typeface="Calibri"/>
-              <a:cs typeface="Calibri"/>
-            </a:endParaRPr>
-          </a:p>
-          <a:p>
-            <a:pPr marL="171450" indent="-171450" algn="l" hangingPunct="0">
-              <a:buFont typeface="Arial" panose="020B0704020202020204" pitchFamily="34" charset="0"/>
-              <a:buChar char="•"/>
-              <a:defRPr sz="1800" b="0" i="0" u="none" strike="noStrike" kern="0" cap="none" spc="0" baseline="0">
-                <a:solidFill>
-                  <a:srgbClr val="000000"/>
-                </a:solidFill>
-                <a:uFillTx/>
-              </a:defRPr>
-            </a:pPr>
-            <a:r>
-              <a:rPr lang="en-US" altLang="en-US" sz="900">
-                <a:solidFill>
-                  <a:srgbClr val="000000"/>
-                </a:solidFill>
-                <a:latin typeface="Raleway" pitchFamily="2" charset="77"/>
-                <a:ea typeface="Calibri"/>
-                <a:cs typeface="Calibri"/>
-              </a:rPr>
-              <a:t>Feature key divisions such as Econet Towers, Distributed Power Zimbabwe, and Econet Properties more prominently on the homepage with stronger redirecting CTAs.  </a:t>
-            </a:r>
-            <a:endParaRPr lang="en-US" altLang="en-US" sz="900">
-              <a:solidFill>
-                <a:srgbClr val="000000"/>
-              </a:solidFill>
-              <a:latin typeface="Raleway" pitchFamily="2" charset="77"/>
-              <a:ea typeface="Calibri"/>
-              <a:cs typeface="Calibri"/>
-            </a:endParaRPr>
-          </a:p>
-          <a:p>
-            <a:pPr marL="171450" indent="-171450" algn="l" hangingPunct="0">
-              <a:buFont typeface="Arial" panose="020B0704020202020204" pitchFamily="34" charset="0"/>
-              <a:buChar char="•"/>
-              <a:defRPr sz="1800" b="0" i="0" u="none" strike="noStrike" kern="0" cap="none" spc="0" baseline="0">
-                <a:solidFill>
-                  <a:srgbClr val="000000"/>
-                </a:solidFill>
-                <a:uFillTx/>
-              </a:defRPr>
-            </a:pPr>
-            <a:r>
-              <a:rPr lang="en-US" altLang="en-US" sz="900">
-                <a:solidFill>
-                  <a:srgbClr val="000000"/>
-                </a:solidFill>
-                <a:latin typeface="Raleway" pitchFamily="2" charset="77"/>
-                <a:ea typeface="Calibri"/>
-                <a:cs typeface="Calibri"/>
-              </a:rPr>
-              <a:t>We propose using homepage banners and division tiles to push users directly into the most relevant product and investment pages.                                 </a:t>
-            </a:r>
-            <a:endParaRPr lang="en-US" altLang="en-US" sz="900">
-              <a:solidFill>
-                <a:srgbClr val="000000"/>
-              </a:solidFill>
-              <a:latin typeface="Raleway" pitchFamily="2" charset="77"/>
-              <a:ea typeface="Calibri"/>
-              <a:cs typeface="Calibri"/>
-            </a:endParaRPr>
-          </a:p>
-          <a:p>
-            <a:pPr marL="171450" indent="-171450" algn="l" hangingPunct="0">
-              <a:buFont typeface="Arial" panose="020B0704020202020204" pitchFamily="34" charset="0"/>
-              <a:buChar char="•"/>
-              <a:defRPr sz="1800" b="0" i="0" u="none" strike="noStrike" kern="0" cap="none" spc="0" baseline="0">
-                <a:solidFill>
-                  <a:srgbClr val="000000"/>
-                </a:solidFill>
-                <a:uFillTx/>
-              </a:defRPr>
-            </a:pPr>
-            <a:r>
-              <a:rPr lang="en-US" altLang="en-US" sz="900">
-                <a:solidFill>
-                  <a:srgbClr val="000000"/>
-                </a:solidFill>
-                <a:latin typeface="Raleway" pitchFamily="2" charset="77"/>
-                <a:ea typeface="Calibri"/>
-                <a:cs typeface="Calibri"/>
-              </a:rPr>
-              <a:t>Promotional placements should guide both commercial customers and investors from awareness into contact or engagement intent more clearly.     </a:t>
-            </a:r>
-            <a:endParaRPr lang="en-US" altLang="en-US" sz="900">
-              <a:solidFill>
-                <a:srgbClr val="000000"/>
-              </a:solidFill>
-              <a:latin typeface="Raleway" pitchFamily="2" charset="77"/>
-              <a:ea typeface="Calibri"/>
-              <a:cs typeface="Calibri"/>
-            </a:endParaRPr>
-          </a:p>
-          <a:p>
-            <a:pPr marL="0" indent="0" algn="l" hangingPunct="0">
-              <a:buFont typeface="Arial" panose="020B0704020202020204" pitchFamily="34" charset="0"/>
-              <a:buNone/>
-              <a:defRPr sz="1800" b="0" i="0" u="none" strike="noStrike" kern="0" cap="none" spc="0" baseline="0">
-                <a:solidFill>
-                  <a:srgbClr val="000000"/>
-                </a:solidFill>
-                <a:uFillTx/>
-              </a:defRPr>
-            </a:pPr>
-            <a:r>
-              <a:rPr lang="en-US" altLang="en-US" sz="900" b="1">
-                <a:latin typeface="Raleway" pitchFamily="2" charset="77"/>
-                <a:ea typeface="Calibri"/>
-                <a:cs typeface="Calibri"/>
-                <a:sym typeface="+mn-ea"/>
-              </a:rPr>
-              <a:t>2. Content Strategy on Econet InfraCo</a:t>
-            </a:r>
-            <a:r>
-              <a:rPr lang="en-US" altLang="en-US" sz="900">
-                <a:latin typeface="Raleway" pitchFamily="2" charset="77"/>
-                <a:ea typeface="Calibri"/>
-                <a:cs typeface="Calibri"/>
-                <a:sym typeface="+mn-ea"/>
-              </a:rPr>
-              <a:t>      </a:t>
-            </a:r>
-            <a:r>
-              <a:rPr lang="en-US" altLang="en-US" sz="900">
-                <a:solidFill>
-                  <a:srgbClr val="000000"/>
-                </a:solidFill>
-                <a:latin typeface="Raleway" pitchFamily="2" charset="77"/>
-                <a:ea typeface="Calibri"/>
-                <a:cs typeface="Calibri"/>
-              </a:rPr>
-              <a:t>                                                                                                                                                                                                                                                                              </a:t>
-            </a:r>
-            <a:endParaRPr lang="en-US" altLang="en-US" sz="900">
-              <a:solidFill>
-                <a:srgbClr val="000000"/>
-              </a:solidFill>
-              <a:latin typeface="Raleway" pitchFamily="2" charset="77"/>
-              <a:ea typeface="Calibri"/>
-              <a:cs typeface="Calibri"/>
-            </a:endParaRPr>
-          </a:p>
-          <a:p>
-            <a:pPr marL="171450" indent="-171450" algn="l" hangingPunct="0">
-              <a:buFont typeface="Arial" panose="020B0704020202020204" pitchFamily="34" charset="0"/>
-              <a:buChar char="•"/>
-              <a:defRPr sz="1800" b="0" i="0" u="none" strike="noStrike" kern="0" cap="none" spc="0" baseline="0">
-                <a:solidFill>
-                  <a:srgbClr val="000000"/>
-                </a:solidFill>
-                <a:uFillTx/>
-              </a:defRPr>
-            </a:pPr>
-            <a:r>
-              <a:rPr lang="en-US" altLang="en-US" sz="900">
-                <a:solidFill>
-                  <a:srgbClr val="000000"/>
-                </a:solidFill>
-                <a:latin typeface="Raleway" pitchFamily="2" charset="77"/>
-                <a:ea typeface="Calibri"/>
-                <a:cs typeface="Calibri"/>
-              </a:rPr>
-              <a:t>We recommend using the Econet InfraCo website more intentionally as the main discovery platform for infrastructure investment and clean energy demand.           </a:t>
-            </a:r>
-            <a:endParaRPr lang="en-US" altLang="en-US" sz="900">
-              <a:solidFill>
-                <a:srgbClr val="000000"/>
-              </a:solidFill>
-              <a:latin typeface="Raleway" pitchFamily="2" charset="77"/>
-              <a:ea typeface="Calibri"/>
-              <a:cs typeface="Calibri"/>
-            </a:endParaRPr>
-          </a:p>
-          <a:p>
-            <a:pPr marL="171450" indent="-171450" algn="l" hangingPunct="0">
-              <a:buFont typeface="Arial" panose="020B0704020202020204" pitchFamily="34" charset="0"/>
-              <a:buChar char="•"/>
-              <a:defRPr sz="1800" b="0" i="0" u="none" strike="noStrike" kern="0" cap="none" spc="0" baseline="0">
-                <a:solidFill>
-                  <a:srgbClr val="000000"/>
-                </a:solidFill>
-                <a:uFillTx/>
-              </a:defRPr>
-            </a:pPr>
-            <a:r>
-              <a:rPr lang="en-US" altLang="en-US" sz="900">
-                <a:solidFill>
-                  <a:srgbClr val="000000"/>
-                </a:solidFill>
-                <a:latin typeface="Raleway" pitchFamily="2" charset="77"/>
-                <a:ea typeface="Calibri"/>
-                <a:cs typeface="Calibri"/>
-              </a:rPr>
-              <a:t> Build more content and landing-page sections around themes such as tower co-location, clean energy solutions, zero-capex power models, commercial property leasing, and infrastructure investment in Zimbabwe.                                                                                                              </a:t>
-            </a:r>
-            <a:endParaRPr lang="en-US" altLang="en-US" sz="900">
-              <a:solidFill>
-                <a:srgbClr val="000000"/>
-              </a:solidFill>
-              <a:latin typeface="Raleway" pitchFamily="2" charset="77"/>
-              <a:ea typeface="Calibri"/>
-              <a:cs typeface="Calibri"/>
-            </a:endParaRPr>
-          </a:p>
-          <a:p>
-            <a:pPr marL="171450" indent="-171450" algn="l" hangingPunct="0">
-              <a:buFont typeface="Arial" panose="020B0704020202020204" pitchFamily="34" charset="0"/>
-              <a:buChar char="•"/>
-              <a:defRPr sz="1800" b="0" i="0" u="none" strike="noStrike" kern="0" cap="none" spc="0" baseline="0">
-                <a:solidFill>
-                  <a:srgbClr val="000000"/>
-                </a:solidFill>
-                <a:uFillTx/>
-              </a:defRPr>
-            </a:pPr>
-            <a:r>
-              <a:rPr lang="en-US" altLang="en-US" sz="900">
-                <a:solidFill>
-                  <a:srgbClr val="000000"/>
-                </a:solidFill>
-                <a:latin typeface="Raleway" pitchFamily="2" charset="77"/>
-                <a:ea typeface="Calibri"/>
-                <a:cs typeface="Calibri"/>
-              </a:rPr>
-              <a:t>We propose linking these content areas directly to the relevant contact or inquiry pages instead of relying mainly on general Learn More buttons that stop short of a conversion action.                                                                                                                                                                                                                                                                                                             </a:t>
-            </a:r>
-            <a:endParaRPr lang="en-US" altLang="en-US" sz="900">
-              <a:solidFill>
-                <a:srgbClr val="000000"/>
-              </a:solidFill>
-              <a:latin typeface="Raleway" pitchFamily="2" charset="77"/>
-              <a:ea typeface="Calibri"/>
-              <a:cs typeface="Calibri"/>
-            </a:endParaRPr>
-          </a:p>
-          <a:p>
-            <a:pPr marL="0" indent="0" algn="l" hangingPunct="0">
-              <a:buNone/>
-              <a:defRPr sz="1800" b="0" i="0" u="none" strike="noStrike" kern="0" cap="none" spc="0" baseline="0">
-                <a:solidFill>
-                  <a:srgbClr val="000000"/>
-                </a:solidFill>
-                <a:uFillTx/>
-              </a:defRPr>
-            </a:pPr>
-            <a:r>
-              <a:rPr lang="en-US" altLang="en-US" sz="900" b="1">
-                <a:solidFill>
-                  <a:srgbClr val="000000"/>
-                </a:solidFill>
-                <a:latin typeface="Raleway" pitchFamily="2" charset="77"/>
-                <a:ea typeface="Calibri"/>
-                <a:cs typeface="Calibri"/>
-              </a:rPr>
-              <a:t>3. Messaging and Internal Linking</a:t>
-            </a:r>
-            <a:endParaRPr lang="en-US" altLang="en-US" sz="900" b="1">
-              <a:solidFill>
-                <a:srgbClr val="000000"/>
-              </a:solidFill>
-              <a:latin typeface="Raleway" pitchFamily="2" charset="77"/>
-              <a:ea typeface="Calibri"/>
-              <a:cs typeface="Calibri"/>
-            </a:endParaRPr>
-          </a:p>
-          <a:p>
-            <a:pPr marL="0" indent="0" algn="l" hangingPunct="0">
-              <a:buNone/>
-              <a:defRPr sz="1800" b="0" i="0" u="none" strike="noStrike" kern="0" cap="none" spc="0" baseline="0">
-                <a:solidFill>
-                  <a:srgbClr val="000000"/>
-                </a:solidFill>
-                <a:uFillTx/>
-              </a:defRPr>
-            </a:pPr>
-            <a:r>
-              <a:rPr lang="en-US" altLang="en-US" sz="900">
-                <a:solidFill>
-                  <a:srgbClr val="000000"/>
-                </a:solidFill>
-                <a:latin typeface="Raleway" pitchFamily="2" charset="77"/>
-                <a:ea typeface="Calibri"/>
-                <a:cs typeface="Calibri"/>
-              </a:rPr>
-              <a:t>Right now, the Econet InfraCo website already has strong divisional coverage, but the messaging can do more to drive action. We recommend embedding clearer conversion-led wording across the main site e.g:                                                                                                                 </a:t>
-            </a:r>
-            <a:endParaRPr lang="en-US" altLang="en-US" sz="900">
-              <a:solidFill>
-                <a:srgbClr val="000000"/>
-              </a:solidFill>
-              <a:latin typeface="Raleway" pitchFamily="2" charset="77"/>
-              <a:ea typeface="Calibri"/>
-              <a:cs typeface="Calibri"/>
-            </a:endParaRPr>
-          </a:p>
-          <a:p>
-            <a:pPr marL="0" indent="0" algn="l" hangingPunct="0">
-              <a:buNone/>
-              <a:defRPr sz="1800" b="0" i="0" u="none" strike="noStrike" kern="0" cap="none" spc="0" baseline="0">
-                <a:solidFill>
-                  <a:srgbClr val="000000"/>
-                </a:solidFill>
-                <a:uFillTx/>
-              </a:defRPr>
-            </a:pPr>
-            <a:r>
-              <a:rPr lang="en-US" altLang="en-US" sz="900" b="1">
-                <a:solidFill>
-                  <a:srgbClr val="000000"/>
-                </a:solidFill>
-                <a:latin typeface="Raleway" pitchFamily="2" charset="77"/>
-                <a:ea typeface="Calibri"/>
-                <a:cs typeface="Calibri"/>
-              </a:rPr>
-              <a:t>Primary &gt;&gt; </a:t>
-            </a:r>
-            <a:r>
-              <a:rPr lang="en-US" altLang="en-US" sz="900">
-                <a:solidFill>
-                  <a:srgbClr val="000000"/>
-                </a:solidFill>
-                <a:latin typeface="Raleway" pitchFamily="2" charset="77"/>
-                <a:ea typeface="Calibri"/>
-                <a:cs typeface="Calibri"/>
-              </a:rPr>
-              <a:t>Invest in Zimbabwe's infrastructure, Get clean energy with zero upfront cost, Co-locate on Econet Towers, Enquire about commercial property leasing</a:t>
-            </a:r>
-            <a:endParaRPr lang="en-US" altLang="en-US" sz="900">
-              <a:solidFill>
-                <a:srgbClr val="000000"/>
-              </a:solidFill>
-              <a:latin typeface="Raleway" pitchFamily="2" charset="77"/>
-              <a:ea typeface="Calibri"/>
-              <a:cs typeface="Calibri"/>
-            </a:endParaRPr>
-          </a:p>
-          <a:p>
-            <a:pPr marL="0" indent="0" algn="l" hangingPunct="0">
-              <a:buNone/>
-              <a:defRPr sz="1800" b="0" i="0" u="none" strike="noStrike" kern="0" cap="none" spc="0" baseline="0">
-                <a:solidFill>
-                  <a:srgbClr val="000000"/>
-                </a:solidFill>
-                <a:uFillTx/>
-              </a:defRPr>
-            </a:pPr>
-            <a:r>
-              <a:rPr lang="en-US" altLang="en-US" sz="900" b="1">
-                <a:solidFill>
-                  <a:srgbClr val="000000"/>
-                </a:solidFill>
-                <a:latin typeface="Raleway" pitchFamily="2" charset="77"/>
-                <a:ea typeface="Calibri"/>
-                <a:cs typeface="Calibri"/>
-              </a:rPr>
-              <a:t>Secondary long-tail &gt;&gt;</a:t>
-            </a:r>
-            <a:r>
-              <a:rPr lang="en-US" altLang="en-US" sz="900">
-                <a:solidFill>
-                  <a:srgbClr val="000000"/>
-                </a:solidFill>
-                <a:latin typeface="Raleway" pitchFamily="2" charset="77"/>
-                <a:ea typeface="Calibri"/>
-                <a:cs typeface="Calibri"/>
-              </a:rPr>
-              <a:t> Telecom tower co-location investment Zimbabwe, Clean energy solar solutions for businesses in Zimbabwe, Zero-capex power systems for      </a:t>
-            </a:r>
-            <a:endParaRPr lang="en-US" altLang="en-US" sz="900">
-              <a:solidFill>
-                <a:srgbClr val="000000"/>
-              </a:solidFill>
-              <a:latin typeface="Raleway" pitchFamily="2" charset="77"/>
-              <a:ea typeface="Calibri"/>
-              <a:cs typeface="Calibri"/>
-            </a:endParaRPr>
-          </a:p>
-          <a:p>
-            <a:pPr marL="0" indent="0" algn="l" hangingPunct="0">
-              <a:buNone/>
-              <a:defRPr sz="1800" b="0" i="0" u="none" strike="noStrike" kern="0" cap="none" spc="0" baseline="0">
-                <a:solidFill>
-                  <a:srgbClr val="000000"/>
-                </a:solidFill>
-                <a:uFillTx/>
-              </a:defRPr>
-            </a:pPr>
-            <a:r>
-              <a:rPr lang="en-US" altLang="en-US" sz="900">
-                <a:solidFill>
-                  <a:srgbClr val="000000"/>
-                </a:solidFill>
-                <a:latin typeface="Raleway" pitchFamily="2" charset="77"/>
-                <a:ea typeface="Calibri"/>
-                <a:cs typeface="Calibri"/>
-              </a:rPr>
-              <a:t>  commercial and industrial operators, Infrastructure investment opportunities in Zimbabwe </a:t>
-            </a:r>
-            <a:endParaRPr lang="en-US" altLang="en-US" sz="900">
-              <a:solidFill>
-                <a:srgbClr val="000000"/>
-              </a:solidFill>
-              <a:latin typeface="Raleway" pitchFamily="2" charset="77"/>
-              <a:ea typeface="Calibri"/>
-              <a:cs typeface="Calibri"/>
-            </a:endParaRPr>
-          </a:p>
-        </p:txBody>
-      </p:sp>
-      <p:sp>
-        <p:nvSpPr>
-          <p:cNvPr id="8" name="object 8"/>
-          <p:cNvSpPr/>
-          <p:nvPr/>
-        </p:nvSpPr>
-        <p:spPr>
-          <a:xfrm>
-            <a:off x="5486400" y="0"/>
-            <a:ext cx="3657600" cy="5148580"/>
-          </a:xfrm>
-          <a:custGeom>
-            <a:avLst/>
-            <a:gdLst/>
-            <a:ahLst/>
-            <a:cxnLst/>
-            <a:rect l="l" t="t" r="r" b="b"/>
-            <a:pathLst>
-              <a:path w="3657600" h="5148580">
-                <a:moveTo>
-                  <a:pt x="0" y="0"/>
-                </a:moveTo>
-                <a:lnTo>
-                  <a:pt x="0" y="5148071"/>
-                </a:lnTo>
-                <a:lnTo>
-                  <a:pt x="3657600" y="5148071"/>
-                </a:lnTo>
-                <a:lnTo>
-                  <a:pt x="3657600" y="3"/>
-                </a:lnTo>
-                <a:lnTo>
-                  <a:pt x="0" y="0"/>
-                </a:lnTo>
-                <a:close/>
-              </a:path>
-            </a:pathLst>
-          </a:custGeom>
-          <a:solidFill>
-            <a:srgbClr val="1E3989"/>
-          </a:solidFill>
-        </p:spPr>
-        <p:txBody>
-          <a:bodyPr wrap="square" lIns="0" tIns="0" rIns="0" bIns="0" rtlCol="0"/>
-          <a:lstStyle/>
-          <a:p>
-            <a:endParaRPr>
-              <a:latin typeface="Raleway" pitchFamily="2" charset="77"/>
-              <a:cs typeface="Times New Roman" panose="02020603050405020304"/>
-            </a:endParaRPr>
-          </a:p>
-        </p:txBody>
-      </p:sp>
-    </p:spTree>
-  </p:cSld>
-  <p:clrMapOvr>
-    <a:masterClrMapping/>
-  </p:clrMapOvr>
-</p:sld>
-</file>
-
-<file path=ppt/slides/slide8.xml><?xml version="1.0" encoding="utf-8"?>
-<p:sld xmlns:a="http://schemas.openxmlformats.org/drawingml/2006/main" xmlns:r="http://schemas.openxmlformats.org/officeDocument/2006/relationships" xmlns:p="http://schemas.openxmlformats.org/presentationml/2006/main" showMasterSp="0">
-  <p:cSld>
-    <p:spTree>
-      <p:nvGrpSpPr>
-        <p:cNvPr id="1" name=""/>
-        <p:cNvGrpSpPr/>
-        <p:nvPr/>
-      </p:nvGrpSpPr>
-      <p:grpSpPr>
-        <a:xfrm>
-          <a:off x="0" y="0"/>
-          <a:ext cx="0" cy="0"/>
-          <a:chOff x="0" y="0"/>
-          <a:chExt cx="0" cy="0"/>
-        </a:xfrm>
-      </p:grpSpPr>
-      <p:sp>
-        <p:nvSpPr>
-          <p:cNvPr id="2" name="object 2"/>
-          <p:cNvSpPr txBox="1">
-            <a:spLocks noGrp="1"/>
-          </p:cNvSpPr>
-          <p:nvPr>
-            <p:ph type="title"/>
-          </p:nvPr>
-        </p:nvSpPr>
-        <p:spPr>
-          <a:xfrm>
-            <a:off x="2275692" y="1993955"/>
-            <a:ext cx="4592616" cy="845744"/>
-          </a:xfrm>
-          <a:prstGeom prst="rect">
-            <a:avLst/>
-          </a:prstGeom>
-        </p:spPr>
-        <p:txBody>
-          <a:bodyPr vert="horz" wrap="square" lIns="0" tIns="14605" rIns="0" bIns="0" rtlCol="0">
-            <a:spAutoFit/>
-          </a:bodyPr>
-          <a:lstStyle/>
-          <a:p>
-            <a:pPr marL="12700">
-              <a:lnSpc>
-                <a:spcPct val="100000"/>
-              </a:lnSpc>
-              <a:spcBef>
-                <a:spcPts val="115"/>
-              </a:spcBef>
-            </a:pPr>
-            <a:r>
-              <a:rPr sz="5400" spc="250">
-                <a:latin typeface="Raleway" pitchFamily="2" charset="77"/>
-              </a:rPr>
-              <a:t>THANK</a:t>
-            </a:r>
-            <a:r>
-              <a:rPr sz="5400" spc="-335">
-                <a:latin typeface="Raleway" pitchFamily="2" charset="77"/>
-              </a:rPr>
-              <a:t> </a:t>
-            </a:r>
-            <a:r>
-              <a:rPr sz="5400" spc="250">
-                <a:latin typeface="Raleway" pitchFamily="2" charset="77"/>
-              </a:rPr>
-              <a:t>YOU</a:t>
-            </a:r>
-            <a:endParaRPr sz="5400">
-              <a:latin typeface="Raleway" pitchFamily="2" charset="77"/>
-            </a:endParaRPr>
-          </a:p>
-        </p:txBody>
-      </p:sp>
+      </p:pic>
     </p:spTree>
   </p:cSld>
   <p:clrMapOvr>
